--- a/input/Algorithmik_4_slides.pptx
+++ b/input/Algorithmik_4_slides.pptx
@@ -5,16 +5,13 @@
     <p:sldMasterId id="2147483648" r:id="rId1"/>
   </p:sldMasterIdLst>
   <p:notesMasterIdLst>
-    <p:notesMasterId r:id="rId6"/>
+    <p:notesMasterId r:id="rId3"/>
   </p:notesMasterIdLst>
   <p:handoutMasterIdLst>
-    <p:handoutMasterId r:id="rId7"/>
+    <p:handoutMasterId r:id="rId4"/>
   </p:handoutMasterIdLst>
   <p:sldIdLst>
-    <p:sldId id="1031" r:id="rId2"/>
-    <p:sldId id="1037" r:id="rId3"/>
-    <p:sldId id="283" r:id="rId4"/>
-    <p:sldId id="257" r:id="rId5"/>
+    <p:sldId id="257" r:id="rId2"/>
   </p:sldIdLst>
   <p:sldSz cx="12192000" cy="6858000"/>
   <p:notesSz cx="6797675" cy="9928225"/>
@@ -815,7 +812,7 @@
                 </a:lnSpc>
                 <a:defRPr/>
               </a:pPr>
-              <a:t>06.03.2026</a:t>
+              <a:t>12.03.2026</a:t>
             </a:fld>
             <a:endParaRPr lang="de-DE" sz="900" dirty="0"/>
           </a:p>
@@ -1800,7 +1797,7 @@
                 </a:lnSpc>
                 <a:defRPr/>
               </a:pPr>
-              <a:t>06.03.2026</a:t>
+              <a:t>12.03.2026</a:t>
             </a:fld>
             <a:endParaRPr lang="de-DE" sz="900" dirty="0"/>
           </a:p>
@@ -2173,335 +2170,6 @@
 </file>
 
 <file path=ppt/notesSlides/notesSlide1.xml><?xml version="1.0" encoding="utf-8"?>
-<p:notes xmlns:a="http://schemas.openxmlformats.org/drawingml/2006/main" xmlns:r="http://schemas.openxmlformats.org/officeDocument/2006/relationships" xmlns:p="http://schemas.openxmlformats.org/presentationml/2006/main">
-  <p:cSld>
-    <p:spTree>
-      <p:nvGrpSpPr>
-        <p:cNvPr id="1" name=""/>
-        <p:cNvGrpSpPr/>
-        <p:nvPr/>
-      </p:nvGrpSpPr>
-      <p:grpSpPr>
-        <a:xfrm>
-          <a:off x="0" y="0"/>
-          <a:ext cx="0" cy="0"/>
-          <a:chOff x="0" y="0"/>
-          <a:chExt cx="0" cy="0"/>
-        </a:xfrm>
-      </p:grpSpPr>
-      <p:sp>
-        <p:nvSpPr>
-          <p:cNvPr id="2" name="Folienbildplatzhalter 1"/>
-          <p:cNvSpPr>
-            <a:spLocks noGrp="1" noRot="1" noChangeAspect="1"/>
-          </p:cNvSpPr>
-          <p:nvPr>
-            <p:ph type="sldImg"/>
-          </p:nvPr>
-        </p:nvSpPr>
-        <p:spPr/>
-      </p:sp>
-      <p:sp>
-        <p:nvSpPr>
-          <p:cNvPr id="3" name="Notizenplatzhalter 2"/>
-          <p:cNvSpPr>
-            <a:spLocks noGrp="1"/>
-          </p:cNvSpPr>
-          <p:nvPr>
-            <p:ph type="body" idx="1"/>
-          </p:nvPr>
-        </p:nvSpPr>
-        <p:spPr/>
-        <p:txBody>
-          <a:bodyPr/>
-          <a:lstStyle/>
-          <a:p>
-            <a:endParaRPr lang="de-DE" dirty="0"/>
-          </a:p>
-        </p:txBody>
-      </p:sp>
-    </p:spTree>
-    <p:extLst>
-      <p:ext uri="{BB962C8B-B14F-4D97-AF65-F5344CB8AC3E}">
-        <p14:creationId xmlns:p14="http://schemas.microsoft.com/office/powerpoint/2010/main" val="3130216680"/>
-      </p:ext>
-    </p:extLst>
-  </p:cSld>
-  <p:clrMapOvr>
-    <a:masterClrMapping/>
-  </p:clrMapOvr>
-</p:notes>
-</file>
-
-<file path=ppt/notesSlides/notesSlide2.xml><?xml version="1.0" encoding="utf-8"?>
-<p:notes xmlns:a="http://schemas.openxmlformats.org/drawingml/2006/main" xmlns:r="http://schemas.openxmlformats.org/officeDocument/2006/relationships" xmlns:p="http://schemas.openxmlformats.org/presentationml/2006/main" showMasterSp="0" showMasterPhAnim="0">
-  <p:cSld>
-    <p:spTree>
-      <p:nvGrpSpPr>
-        <p:cNvPr id="1" name="Shape 754"/>
-        <p:cNvGrpSpPr/>
-        <p:nvPr/>
-      </p:nvGrpSpPr>
-      <p:grpSpPr>
-        <a:xfrm>
-          <a:off x="0" y="0"/>
-          <a:ext cx="0" cy="0"/>
-          <a:chOff x="0" y="0"/>
-          <a:chExt cx="0" cy="0"/>
-        </a:xfrm>
-      </p:grpSpPr>
-      <p:sp>
-        <p:nvSpPr>
-          <p:cNvPr id="755" name="Google Shape;755;g118b4eb0048_0_551:notes"/>
-          <p:cNvSpPr>
-            <a:spLocks noGrp="1" noRot="1" noChangeAspect="1"/>
-          </p:cNvSpPr>
-          <p:nvPr>
-            <p:ph type="sldImg" idx="2"/>
-          </p:nvPr>
-        </p:nvSpPr>
-        <p:spPr>
-          <a:xfrm>
-            <a:off x="2901950" y="220663"/>
-            <a:ext cx="1054100" cy="593725"/>
-          </a:xfrm>
-          <a:custGeom>
-            <a:avLst/>
-            <a:gdLst/>
-            <a:ahLst/>
-            <a:cxnLst/>
-            <a:rect l="l" t="t" r="r" b="b"/>
-            <a:pathLst>
-              <a:path w="120000" h="120000" extrusionOk="0">
-                <a:moveTo>
-                  <a:pt x="0" y="0"/>
-                </a:moveTo>
-                <a:lnTo>
-                  <a:pt x="120000" y="0"/>
-                </a:lnTo>
-                <a:lnTo>
-                  <a:pt x="120000" y="120000"/>
-                </a:lnTo>
-                <a:lnTo>
-                  <a:pt x="0" y="120000"/>
-                </a:lnTo>
-                <a:close/>
-              </a:path>
-            </a:pathLst>
-          </a:custGeom>
-          <a:noFill/>
-          <a:ln w="12700" cap="flat" cmpd="sng">
-            <a:solidFill>
-              <a:srgbClr val="000000"/>
-            </a:solidFill>
-            <a:prstDash val="solid"/>
-            <a:round/>
-            <a:headEnd type="none" w="sm" len="sm"/>
-            <a:tailEnd type="none" w="sm" len="sm"/>
-          </a:ln>
-        </p:spPr>
-      </p:sp>
-      <p:sp>
-        <p:nvSpPr>
-          <p:cNvPr id="756" name="Google Shape;756;g118b4eb0048_0_551:notes"/>
-          <p:cNvSpPr txBox="1">
-            <a:spLocks noGrp="1"/>
-          </p:cNvSpPr>
-          <p:nvPr>
-            <p:ph type="body" idx="1"/>
-          </p:nvPr>
-        </p:nvSpPr>
-        <p:spPr>
-          <a:xfrm>
-            <a:off x="685800" y="848023"/>
-            <a:ext cx="5486400" cy="693900"/>
-          </a:xfrm>
-          <a:prstGeom prst="rect">
-            <a:avLst/>
-          </a:prstGeom>
-          <a:noFill/>
-          <a:ln>
-            <a:noFill/>
-          </a:ln>
-        </p:spPr>
-        <p:txBody>
-          <a:bodyPr spcFirstLastPara="1" wrap="square" lIns="91425" tIns="45700" rIns="91425" bIns="45700" anchor="t" anchorCtr="0">
-            <a:noAutofit/>
-          </a:bodyPr>
-          <a:lstStyle/>
-          <a:p>
-            <a:pPr marL="0" lvl="0" indent="0" algn="l" rtl="0">
-              <a:spcBef>
-                <a:spcPts val="0"/>
-              </a:spcBef>
-              <a:spcAft>
-                <a:spcPts val="0"/>
-              </a:spcAft>
-              <a:buNone/>
-            </a:pPr>
-            <a:endParaRPr dirty="0"/>
-          </a:p>
-        </p:txBody>
-      </p:sp>
-      <p:sp>
-        <p:nvSpPr>
-          <p:cNvPr id="757" name="Google Shape;757;g118b4eb0048_0_551:notes"/>
-          <p:cNvSpPr txBox="1">
-            <a:spLocks noGrp="1"/>
-          </p:cNvSpPr>
-          <p:nvPr>
-            <p:ph type="sldNum" idx="12"/>
-          </p:nvPr>
-        </p:nvSpPr>
-        <p:spPr>
-          <a:xfrm>
-            <a:off x="3884613" y="1673713"/>
-            <a:ext cx="2971800" cy="88500"/>
-          </a:xfrm>
-          <a:prstGeom prst="rect">
-            <a:avLst/>
-          </a:prstGeom>
-          <a:noFill/>
-          <a:ln>
-            <a:noFill/>
-          </a:ln>
-        </p:spPr>
-        <p:txBody>
-          <a:bodyPr spcFirstLastPara="1" wrap="square" lIns="91425" tIns="45700" rIns="91425" bIns="45700" anchor="b" anchorCtr="0">
-            <a:noAutofit/>
-          </a:bodyPr>
-          <a:lstStyle/>
-          <a:p>
-            <a:pPr marL="0" lvl="0" indent="0" algn="r" rtl="0">
-              <a:spcBef>
-                <a:spcPts val="0"/>
-              </a:spcBef>
-              <a:spcAft>
-                <a:spcPts val="0"/>
-              </a:spcAft>
-              <a:buNone/>
-            </a:pPr>
-            <a:fld id="{00000000-1234-1234-1234-123412341234}" type="slidenum">
-              <a:rPr lang="en-US"/>
-              <a:t>2</a:t>
-            </a:fld>
-            <a:endParaRPr/>
-          </a:p>
-        </p:txBody>
-      </p:sp>
-    </p:spTree>
-  </p:cSld>
-  <p:clrMapOvr>
-    <a:masterClrMapping/>
-  </p:clrMapOvr>
-</p:notes>
-</file>
-
-<file path=ppt/notesSlides/notesSlide3.xml><?xml version="1.0" encoding="utf-8"?>
-<p:notes xmlns:a="http://schemas.openxmlformats.org/drawingml/2006/main" xmlns:r="http://schemas.openxmlformats.org/officeDocument/2006/relationships" xmlns:p="http://schemas.openxmlformats.org/presentationml/2006/main" showMasterSp="0" showMasterPhAnim="0">
-  <p:cSld>
-    <p:spTree>
-      <p:nvGrpSpPr>
-        <p:cNvPr id="1" name="Shape 750"/>
-        <p:cNvGrpSpPr/>
-        <p:nvPr/>
-      </p:nvGrpSpPr>
-      <p:grpSpPr>
-        <a:xfrm>
-          <a:off x="0" y="0"/>
-          <a:ext cx="0" cy="0"/>
-          <a:chOff x="0" y="0"/>
-          <a:chExt cx="0" cy="0"/>
-        </a:xfrm>
-      </p:grpSpPr>
-      <p:sp>
-        <p:nvSpPr>
-          <p:cNvPr id="751" name="Google Shape;751;p22:notes"/>
-          <p:cNvSpPr txBox="1">
-            <a:spLocks noGrp="1"/>
-          </p:cNvSpPr>
-          <p:nvPr>
-            <p:ph type="body" idx="1"/>
-          </p:nvPr>
-        </p:nvSpPr>
-        <p:spPr>
-          <a:xfrm>
-            <a:off x="685800" y="4400550"/>
-            <a:ext cx="5486400" cy="3600450"/>
-          </a:xfrm>
-          <a:prstGeom prst="rect">
-            <a:avLst/>
-          </a:prstGeom>
-        </p:spPr>
-        <p:txBody>
-          <a:bodyPr spcFirstLastPara="1" wrap="square" lIns="91425" tIns="45700" rIns="91425" bIns="45700" anchor="t" anchorCtr="0">
-            <a:noAutofit/>
-          </a:bodyPr>
-          <a:lstStyle/>
-          <a:p>
-            <a:pPr marL="0" lvl="0" indent="0" algn="l" rtl="0">
-              <a:spcBef>
-                <a:spcPts val="0"/>
-              </a:spcBef>
-              <a:spcAft>
-                <a:spcPts val="0"/>
-              </a:spcAft>
-              <a:buNone/>
-            </a:pPr>
-            <a:endParaRPr/>
-          </a:p>
-        </p:txBody>
-      </p:sp>
-      <p:sp>
-        <p:nvSpPr>
-          <p:cNvPr id="752" name="Google Shape;752;p22:notes"/>
-          <p:cNvSpPr>
-            <a:spLocks noGrp="1" noRot="1" noChangeAspect="1"/>
-          </p:cNvSpPr>
-          <p:nvPr>
-            <p:ph type="sldImg" idx="2"/>
-          </p:nvPr>
-        </p:nvSpPr>
-        <p:spPr>
-          <a:xfrm>
-            <a:off x="685800" y="1143000"/>
-            <a:ext cx="5486400" cy="3086100"/>
-          </a:xfrm>
-          <a:custGeom>
-            <a:avLst/>
-            <a:gdLst/>
-            <a:ahLst/>
-            <a:cxnLst/>
-            <a:rect l="l" t="t" r="r" b="b"/>
-            <a:pathLst>
-              <a:path w="120000" h="120000" extrusionOk="0">
-                <a:moveTo>
-                  <a:pt x="0" y="0"/>
-                </a:moveTo>
-                <a:lnTo>
-                  <a:pt x="120000" y="0"/>
-                </a:lnTo>
-                <a:lnTo>
-                  <a:pt x="120000" y="120000"/>
-                </a:lnTo>
-                <a:lnTo>
-                  <a:pt x="0" y="120000"/>
-                </a:lnTo>
-                <a:close/>
-              </a:path>
-            </a:pathLst>
-          </a:custGeom>
-        </p:spPr>
-      </p:sp>
-    </p:spTree>
-  </p:cSld>
-  <p:clrMapOvr>
-    <a:masterClrMapping/>
-  </p:clrMapOvr>
-</p:notes>
-</file>
-
-<file path=ppt/notesSlides/notesSlide4.xml><?xml version="1.0" encoding="utf-8"?>
 <p:notes xmlns:a="http://schemas.openxmlformats.org/drawingml/2006/main" xmlns:r="http://schemas.openxmlformats.org/officeDocument/2006/relationships" xmlns:p="http://schemas.openxmlformats.org/presentationml/2006/main" showMasterSp="0" showMasterPhAnim="0">
   <p:cSld>
     <p:spTree>
@@ -2830,7 +2498,7 @@
             </a:pPr>
             <a:fld id="{C9048784-7281-4837-A1AE-FC4A34A747D6}" type="datetime1">
               <a:rPr lang="de-DE" smtClean="0"/>
-              <a:t>06.03.2026</a:t>
+              <a:t>12.03.2026</a:t>
             </a:fld>
             <a:endParaRPr lang="de-DE" dirty="0"/>
           </a:p>
@@ -4311,7 +3979,7 @@
             </a:pPr>
             <a:fld id="{29E1D907-3A8C-4FA0-AF32-FB476100B44A}" type="datetime1">
               <a:rPr lang="de-DE" smtClean="0"/>
-              <a:t>06.03.2026</a:t>
+              <a:t>12.03.2026</a:t>
             </a:fld>
             <a:endParaRPr lang="de-DE" dirty="0"/>
           </a:p>
@@ -4722,7 +4390,7 @@
             </a:pPr>
             <a:fld id="{0D5930E3-AAC2-4ADF-925B-A037BED539BF}" type="datetime1">
               <a:rPr lang="de-DE" smtClean="0"/>
-              <a:t>06.03.2026</a:t>
+              <a:t>12.03.2026</a:t>
             </a:fld>
             <a:endParaRPr lang="en-US"/>
           </a:p>
@@ -5031,7 +4699,7 @@
             </a:pPr>
             <a:fld id="{77078B80-CC76-49E8-922A-90B2CBA19035}" type="datetime1">
               <a:rPr lang="de-DE" smtClean="0"/>
-              <a:t>06.03.2026</a:t>
+              <a:t>12.03.2026</a:t>
             </a:fld>
             <a:endParaRPr lang="en-US"/>
           </a:p>
@@ -5532,7 +5200,7 @@
             </a:pPr>
             <a:fld id="{410F1620-6991-468A-986C-DEA71AF2A6A8}" type="datetime1">
               <a:rPr lang="de-DE" smtClean="0"/>
-              <a:t>06.03.2026</a:t>
+              <a:t>12.03.2026</a:t>
             </a:fld>
             <a:endParaRPr lang="en-US"/>
           </a:p>
@@ -5930,7 +5598,7 @@
             </a:pPr>
             <a:fld id="{2A021128-E3BC-4510-A597-24FCB75D3A75}" type="datetime1">
               <a:rPr lang="de-DE" smtClean="0"/>
-              <a:t>06.03.2026</a:t>
+              <a:t>12.03.2026</a:t>
             </a:fld>
             <a:endParaRPr lang="de-DE" dirty="0"/>
           </a:p>
@@ -6187,7 +5855,7 @@
             </a:pPr>
             <a:fld id="{204B419C-6100-4ECC-A14C-29389AFC3646}" type="datetime1">
               <a:rPr lang="de-DE" smtClean="0"/>
-              <a:t>06.03.2026</a:t>
+              <a:t>12.03.2026</a:t>
             </a:fld>
             <a:endParaRPr lang="de-DE" dirty="0"/>
           </a:p>
@@ -6578,7 +6246,7 @@
             </a:pPr>
             <a:fld id="{17D379B7-331E-424B-A45F-F03D5981C976}" type="datetime1">
               <a:rPr lang="de-DE" smtClean="0"/>
-              <a:t>06.03.2026</a:t>
+              <a:t>12.03.2026</a:t>
             </a:fld>
             <a:endParaRPr lang="de-DE" dirty="0"/>
           </a:p>
@@ -7120,7 +6788,7 @@
             </a:pPr>
             <a:fld id="{F95F7EFE-EEF9-40C5-9AEC-F07BD35586E4}" type="datetime1">
               <a:rPr lang="de-DE" smtClean="0"/>
-              <a:t>06.03.2026</a:t>
+              <a:t>12.03.2026</a:t>
             </a:fld>
             <a:endParaRPr lang="de-DE" dirty="0"/>
           </a:p>
@@ -7376,7 +7044,7 @@
             </a:pPr>
             <a:fld id="{29F603B7-878E-43D0-A9A1-FA3C2AF87C58}" type="datetime1">
               <a:rPr lang="de-DE" smtClean="0"/>
-              <a:t>06.03.2026</a:t>
+              <a:t>12.03.2026</a:t>
             </a:fld>
             <a:endParaRPr lang="de-DE" dirty="0"/>
           </a:p>
@@ -7473,7 +7141,7 @@
             </a:pPr>
             <a:fld id="{64985212-05E7-49A7-ABD6-673A483CDAE3}" type="datetime1">
               <a:rPr lang="de-DE" smtClean="0"/>
-              <a:t>06.03.2026</a:t>
+              <a:t>12.03.2026</a:t>
             </a:fld>
             <a:endParaRPr lang="de-DE" dirty="0"/>
           </a:p>
@@ -8443,7 +8111,7 @@
             </a:pPr>
             <a:fld id="{8ED535EE-90AE-4348-98D3-AFE064A78180}" type="datetime1">
               <a:rPr lang="de-DE" smtClean="0"/>
-              <a:t>06.03.2026</a:t>
+              <a:t>12.03.2026</a:t>
             </a:fld>
             <a:endParaRPr lang="de-DE" dirty="0"/>
           </a:p>
@@ -9213,7 +8881,7 @@
             </a:pPr>
             <a:fld id="{9C590BB0-1566-4728-8689-C18D1116058A}" type="datetime1">
               <a:rPr lang="de-DE" smtClean="0"/>
-              <a:t>06.03.2026</a:t>
+              <a:t>12.03.2026</a:t>
             </a:fld>
             <a:endParaRPr lang="de-DE" dirty="0"/>
           </a:p>
@@ -9737,7 +9405,7 @@
   <p:cSld>
     <p:spTree>
       <p:nvGrpSpPr>
-        <p:cNvPr id="1" name=""/>
+        <p:cNvPr id="1" name="Shape 141"/>
         <p:cNvGrpSpPr/>
         <p:nvPr/>
       </p:nvGrpSpPr>
@@ -9749,5037 +9417,79 @@
           <a:chExt cx="0" cy="0"/>
         </a:xfrm>
       </p:grpSpPr>
-      <p:sp>
-        <p:nvSpPr>
-          <p:cNvPr id="2" name="Titel 1"/>
-          <p:cNvSpPr>
-            <a:spLocks noGrp="1"/>
-          </p:cNvSpPr>
-          <p:nvPr>
-            <p:ph type="title"/>
-          </p:nvPr>
-        </p:nvSpPr>
-        <p:spPr/>
-        <p:txBody>
-          <a:bodyPr/>
-          <a:lstStyle/>
-          <a:p>
-            <a:r>
-              <a:rPr lang="de-DE" noProof="0" dirty="0"/>
-              <a:t>Lernraum I: Abstrakte Datentypen, Datenstrukturen und Asymptotische Notation</a:t>
-            </a:r>
-          </a:p>
-        </p:txBody>
-      </p:sp>
-      <p:sp>
-        <p:nvSpPr>
-          <p:cNvPr id="3" name="Inhaltsplatzhalter 2"/>
-          <p:cNvSpPr>
-            <a:spLocks noGrp="1"/>
-          </p:cNvSpPr>
-          <p:nvPr>
-            <p:ph sz="quarter" idx="12"/>
-          </p:nvPr>
-        </p:nvSpPr>
-        <p:spPr/>
-        <p:txBody>
-          <a:bodyPr/>
-          <a:lstStyle/>
-          <a:p>
-            <a:pPr lvl="1"/>
-            <a:r>
-              <a:rPr lang="de-DE" noProof="0" dirty="0"/>
-              <a:t>Abstrakte Datentypen</a:t>
-            </a:r>
-          </a:p>
-          <a:p>
-            <a:pPr lvl="2"/>
-            <a:r>
-              <a:rPr lang="de-DE" noProof="0" dirty="0"/>
-              <a:t>Liste, Stapel, Warteschlange, Tabelle (Dictionary)</a:t>
-            </a:r>
-          </a:p>
-          <a:p>
-            <a:pPr lvl="1"/>
-            <a:r>
-              <a:rPr lang="de-DE" noProof="0" dirty="0"/>
-              <a:t>Datenstrukturen</a:t>
-            </a:r>
-          </a:p>
-          <a:p>
-            <a:pPr lvl="2"/>
-            <a:r>
-              <a:rPr lang="de-DE" noProof="0" dirty="0"/>
-              <a:t>Array, Verkettete Liste</a:t>
-            </a:r>
-          </a:p>
-          <a:p>
-            <a:pPr lvl="1"/>
-            <a:r>
-              <a:rPr lang="de-DE" noProof="0" dirty="0"/>
-              <a:t>Implementierungen der Abstrakten Datentypen mit den Datenstrukturen …</a:t>
-            </a:r>
-          </a:p>
-          <a:p>
-            <a:pPr lvl="2"/>
-            <a:r>
-              <a:rPr lang="de-DE" noProof="0" dirty="0"/>
-              <a:t>Array</a:t>
-            </a:r>
-          </a:p>
-          <a:p>
-            <a:pPr lvl="2"/>
-            <a:r>
-              <a:rPr lang="de-DE" noProof="0" dirty="0"/>
-              <a:t>Verkettete Listen</a:t>
-            </a:r>
-          </a:p>
-          <a:p>
-            <a:pPr lvl="1"/>
-            <a:r>
-              <a:rPr lang="de-DE" noProof="0" dirty="0"/>
-              <a:t>Analyse von Laufzeit und Speicherbedarf der Implementierungen</a:t>
-            </a:r>
-          </a:p>
-          <a:p>
-            <a:pPr lvl="2"/>
-            <a:r>
-              <a:rPr lang="de-DE" noProof="0" dirty="0"/>
-              <a:t>O-Notation</a:t>
-            </a:r>
-          </a:p>
-          <a:p>
-            <a:pPr lvl="1"/>
-            <a:r>
-              <a:rPr lang="de-DE" noProof="0" dirty="0">
-                <a:solidFill>
-                  <a:srgbClr val="002060"/>
-                </a:solidFill>
-              </a:rPr>
-              <a:t>Laufzeitanalyse von Algorithmen durch Asymptotische Notation</a:t>
-            </a:r>
-          </a:p>
-          <a:p>
-            <a:pPr lvl="2"/>
-            <a:r>
-              <a:rPr lang="de-DE" noProof="0" dirty="0">
-                <a:solidFill>
-                  <a:srgbClr val="002060"/>
-                </a:solidFill>
-              </a:rPr>
-              <a:t>O-Notation, Ω-Notation, Θ-Notation</a:t>
-            </a:r>
-          </a:p>
-          <a:p>
-            <a:pPr lvl="2"/>
-            <a:r>
-              <a:rPr lang="de-DE" noProof="0" dirty="0">
-                <a:solidFill>
-                  <a:srgbClr val="002060"/>
-                </a:solidFill>
-              </a:rPr>
-              <a:t>Fallanalyse: </a:t>
-            </a:r>
-            <a:r>
-              <a:rPr lang="de-DE" noProof="0" dirty="0" err="1">
-                <a:solidFill>
-                  <a:srgbClr val="002060"/>
-                </a:solidFill>
-              </a:rPr>
-              <a:t>Worst</a:t>
-            </a:r>
-            <a:r>
-              <a:rPr lang="de-DE" noProof="0" dirty="0">
-                <a:solidFill>
-                  <a:srgbClr val="002060"/>
-                </a:solidFill>
-              </a:rPr>
-              <a:t> Case, Best Case Analyse</a:t>
-            </a:r>
-          </a:p>
-          <a:p>
-            <a:pPr lvl="1"/>
-            <a:r>
-              <a:rPr lang="de-DE" noProof="0" dirty="0"/>
-              <a:t>Laufzeitanalyse von Rekursiven Algorithmen durch Asymptotische Notation</a:t>
-            </a:r>
-          </a:p>
-        </p:txBody>
-      </p:sp>
-      <p:sp>
-        <p:nvSpPr>
-          <p:cNvPr id="4" name="Textplatzhalter 3"/>
-          <p:cNvSpPr>
-            <a:spLocks noGrp="1"/>
-          </p:cNvSpPr>
-          <p:nvPr>
-            <p:ph type="body" idx="13"/>
-          </p:nvPr>
-        </p:nvSpPr>
-        <p:spPr/>
-        <p:txBody>
-          <a:bodyPr/>
-          <a:lstStyle/>
-          <a:p>
-            <a:r>
-              <a:rPr lang="de-DE" noProof="0" dirty="0"/>
-              <a:t>Algorithmik – Laufzeitanalyse von Algorithmen durch Asymptotische Notation</a:t>
-            </a:r>
-          </a:p>
-        </p:txBody>
-      </p:sp>
-      <p:sp>
-        <p:nvSpPr>
-          <p:cNvPr id="5" name="Datumsplatzhalter 4"/>
-          <p:cNvSpPr>
-            <a:spLocks noGrp="1"/>
-          </p:cNvSpPr>
-          <p:nvPr>
-            <p:ph type="dt" sz="half" idx="14"/>
-          </p:nvPr>
-        </p:nvSpPr>
-        <p:spPr/>
-        <p:txBody>
-          <a:bodyPr/>
-          <a:lstStyle/>
-          <a:p>
-            <a:fld id="{97C55095-590B-4AAB-8606-0F86796D070A}" type="datetime1">
-              <a:rPr lang="de-DE" smtClean="0"/>
-              <a:pPr/>
-              <a:t>06.03.2026</a:t>
-            </a:fld>
-            <a:endParaRPr lang="de-DE" dirty="0"/>
-          </a:p>
-        </p:txBody>
-      </p:sp>
-      <p:sp>
-        <p:nvSpPr>
-          <p:cNvPr id="6" name="Foliennummernplatzhalter 5"/>
-          <p:cNvSpPr>
-            <a:spLocks noGrp="1"/>
-          </p:cNvSpPr>
-          <p:nvPr>
-            <p:ph type="sldNum" sz="quarter" idx="15"/>
-          </p:nvPr>
-        </p:nvSpPr>
-        <p:spPr/>
-        <p:txBody>
-          <a:bodyPr/>
-          <a:lstStyle/>
-          <a:p>
-            <a:r>
-              <a:rPr lang="de-DE"/>
-              <a:t>Seite </a:t>
-            </a:r>
-            <a:fld id="{43310F81-32EE-4F95-9E9C-0BDC6AD52EEC}" type="slidenum">
-              <a:rPr lang="de-DE" smtClean="0"/>
-              <a:pPr/>
-              <a:t>1</a:t>
-            </a:fld>
-            <a:endParaRPr lang="de-DE"/>
-          </a:p>
-        </p:txBody>
-      </p:sp>
-    </p:spTree>
-    <p:extLst>
-      <p:ext uri="{BB962C8B-B14F-4D97-AF65-F5344CB8AC3E}">
-        <p14:creationId xmlns:p14="http://schemas.microsoft.com/office/powerpoint/2010/main" val="2556114085"/>
-      </p:ext>
-    </p:extLst>
-  </p:cSld>
-  <p:clrMapOvr>
-    <a:masterClrMapping/>
-  </p:clrMapOvr>
-  <p:timing>
-    <p:tnLst>
-      <p:par>
-        <p:cTn id="1" dur="indefinite" restart="never" nodeType="tmRoot">
-          <p:childTnLst>
-            <p:seq concurrent="1" nextAc="seek">
-              <p:cTn id="2" dur="indefinite" nodeType="mainSeq">
-                <p:childTnLst>
-                  <p:par>
-                    <p:cTn id="3" fill="hold">
-                      <p:stCondLst>
-                        <p:cond delay="indefinite"/>
-                      </p:stCondLst>
-                      <p:childTnLst>
-                        <p:par>
-                          <p:cTn id="4" fill="hold">
-                            <p:stCondLst>
-                              <p:cond delay="0"/>
-                            </p:stCondLst>
-                            <p:childTnLst>
-                              <p:par>
-                                <p:cTn id="5" presetID="1" presetClass="entr" presetSubtype="0" fill="hold" nodeType="clickEffect">
-                                  <p:stCondLst>
-                                    <p:cond delay="0"/>
-                                  </p:stCondLst>
-                                  <p:childTnLst>
-                                    <p:set>
-                                      <p:cBhvr>
-                                        <p:cTn id="6" dur="1" fill="hold">
-                                          <p:stCondLst>
-                                            <p:cond delay="0"/>
-                                          </p:stCondLst>
-                                        </p:cTn>
-                                        <p:tgtEl>
-                                          <p:spTgt spid="3">
-                                            <p:txEl>
-                                              <p:pRg st="4" end="4"/>
-                                            </p:txEl>
-                                          </p:spTgt>
-                                        </p:tgtEl>
-                                        <p:attrNameLst>
-                                          <p:attrName>style.visibility</p:attrName>
-                                        </p:attrNameLst>
-                                      </p:cBhvr>
-                                      <p:to>
-                                        <p:strVal val="visible"/>
-                                      </p:to>
-                                    </p:set>
-                                  </p:childTnLst>
-                                </p:cTn>
-                              </p:par>
-                              <p:par>
-                                <p:cTn id="7" presetID="1" presetClass="entr" presetSubtype="0" fill="hold" nodeType="withEffect">
-                                  <p:stCondLst>
-                                    <p:cond delay="0"/>
-                                  </p:stCondLst>
-                                  <p:childTnLst>
-                                    <p:set>
-                                      <p:cBhvr>
-                                        <p:cTn id="8" dur="1" fill="hold">
-                                          <p:stCondLst>
-                                            <p:cond delay="0"/>
-                                          </p:stCondLst>
-                                        </p:cTn>
-                                        <p:tgtEl>
-                                          <p:spTgt spid="3">
-                                            <p:txEl>
-                                              <p:pRg st="5" end="5"/>
-                                            </p:txEl>
-                                          </p:spTgt>
-                                        </p:tgtEl>
-                                        <p:attrNameLst>
-                                          <p:attrName>style.visibility</p:attrName>
-                                        </p:attrNameLst>
-                                      </p:cBhvr>
-                                      <p:to>
-                                        <p:strVal val="visible"/>
-                                      </p:to>
-                                    </p:set>
-                                  </p:childTnLst>
-                                </p:cTn>
-                              </p:par>
-                              <p:par>
-                                <p:cTn id="9" presetID="1" presetClass="entr" presetSubtype="0" fill="hold" nodeType="withEffect">
-                                  <p:stCondLst>
-                                    <p:cond delay="0"/>
-                                  </p:stCondLst>
-                                  <p:childTnLst>
-                                    <p:set>
-                                      <p:cBhvr>
-                                        <p:cTn id="10" dur="1" fill="hold">
-                                          <p:stCondLst>
-                                            <p:cond delay="0"/>
-                                          </p:stCondLst>
-                                        </p:cTn>
-                                        <p:tgtEl>
-                                          <p:spTgt spid="3">
-                                            <p:txEl>
-                                              <p:pRg st="6" end="6"/>
-                                            </p:txEl>
-                                          </p:spTgt>
-                                        </p:tgtEl>
-                                        <p:attrNameLst>
-                                          <p:attrName>style.visibility</p:attrName>
-                                        </p:attrNameLst>
-                                      </p:cBhvr>
-                                      <p:to>
-                                        <p:strVal val="visible"/>
-                                      </p:to>
-                                    </p:set>
-                                  </p:childTnLst>
-                                </p:cTn>
-                              </p:par>
-                              <p:par>
-                                <p:cTn id="11" presetID="1" presetClass="entr" presetSubtype="0" fill="hold" nodeType="withEffect">
-                                  <p:stCondLst>
-                                    <p:cond delay="0"/>
-                                  </p:stCondLst>
-                                  <p:childTnLst>
-                                    <p:set>
-                                      <p:cBhvr>
-                                        <p:cTn id="12" dur="1" fill="hold">
-                                          <p:stCondLst>
-                                            <p:cond delay="0"/>
-                                          </p:stCondLst>
-                                        </p:cTn>
-                                        <p:tgtEl>
-                                          <p:spTgt spid="3">
-                                            <p:txEl>
-                                              <p:pRg st="7" end="7"/>
-                                            </p:txEl>
-                                          </p:spTgt>
-                                        </p:tgtEl>
-                                        <p:attrNameLst>
-                                          <p:attrName>style.visibility</p:attrName>
-                                        </p:attrNameLst>
-                                      </p:cBhvr>
-                                      <p:to>
-                                        <p:strVal val="visible"/>
-                                      </p:to>
-                                    </p:set>
-                                  </p:childTnLst>
-                                </p:cTn>
-                              </p:par>
-                              <p:par>
-                                <p:cTn id="13" presetID="1" presetClass="entr" presetSubtype="0" fill="hold" nodeType="withEffect">
-                                  <p:stCondLst>
-                                    <p:cond delay="0"/>
-                                  </p:stCondLst>
-                                  <p:childTnLst>
-                                    <p:set>
-                                      <p:cBhvr>
-                                        <p:cTn id="14" dur="1" fill="hold">
-                                          <p:stCondLst>
-                                            <p:cond delay="0"/>
-                                          </p:stCondLst>
-                                        </p:cTn>
-                                        <p:tgtEl>
-                                          <p:spTgt spid="3">
-                                            <p:txEl>
-                                              <p:pRg st="8" end="8"/>
-                                            </p:txEl>
-                                          </p:spTgt>
-                                        </p:tgtEl>
-                                        <p:attrNameLst>
-                                          <p:attrName>style.visibility</p:attrName>
-                                        </p:attrNameLst>
-                                      </p:cBhvr>
-                                      <p:to>
-                                        <p:strVal val="visible"/>
-                                      </p:to>
-                                    </p:set>
-                                  </p:childTnLst>
-                                </p:cTn>
-                              </p:par>
-                            </p:childTnLst>
-                          </p:cTn>
-                        </p:par>
-                      </p:childTnLst>
-                    </p:cTn>
-                  </p:par>
-                  <p:par>
-                    <p:cTn id="15" fill="hold">
-                      <p:stCondLst>
-                        <p:cond delay="indefinite"/>
-                      </p:stCondLst>
-                      <p:childTnLst>
-                        <p:par>
-                          <p:cTn id="16" fill="hold">
-                            <p:stCondLst>
-                              <p:cond delay="0"/>
-                            </p:stCondLst>
-                            <p:childTnLst>
-                              <p:par>
-                                <p:cTn id="17" presetID="1" presetClass="entr" presetSubtype="0" fill="hold" nodeType="clickEffect">
-                                  <p:stCondLst>
-                                    <p:cond delay="0"/>
-                                  </p:stCondLst>
-                                  <p:childTnLst>
-                                    <p:set>
-                                      <p:cBhvr>
-                                        <p:cTn id="18" dur="1" fill="hold">
-                                          <p:stCondLst>
-                                            <p:cond delay="0"/>
-                                          </p:stCondLst>
-                                        </p:cTn>
-                                        <p:tgtEl>
-                                          <p:spTgt spid="3">
-                                            <p:txEl>
-                                              <p:pRg st="9" end="9"/>
-                                            </p:txEl>
-                                          </p:spTgt>
-                                        </p:tgtEl>
-                                        <p:attrNameLst>
-                                          <p:attrName>style.visibility</p:attrName>
-                                        </p:attrNameLst>
-                                      </p:cBhvr>
-                                      <p:to>
-                                        <p:strVal val="visible"/>
-                                      </p:to>
-                                    </p:set>
-                                  </p:childTnLst>
-                                </p:cTn>
-                              </p:par>
-                              <p:par>
-                                <p:cTn id="19" presetID="1" presetClass="entr" presetSubtype="0" fill="hold" nodeType="withEffect">
-                                  <p:stCondLst>
-                                    <p:cond delay="0"/>
-                                  </p:stCondLst>
-                                  <p:childTnLst>
-                                    <p:set>
-                                      <p:cBhvr>
-                                        <p:cTn id="20" dur="1" fill="hold">
-                                          <p:stCondLst>
-                                            <p:cond delay="0"/>
-                                          </p:stCondLst>
-                                        </p:cTn>
-                                        <p:tgtEl>
-                                          <p:spTgt spid="3">
-                                            <p:txEl>
-                                              <p:pRg st="10" end="10"/>
-                                            </p:txEl>
-                                          </p:spTgt>
-                                        </p:tgtEl>
-                                        <p:attrNameLst>
-                                          <p:attrName>style.visibility</p:attrName>
-                                        </p:attrNameLst>
-                                      </p:cBhvr>
-                                      <p:to>
-                                        <p:strVal val="visible"/>
-                                      </p:to>
-                                    </p:set>
-                                  </p:childTnLst>
-                                </p:cTn>
-                              </p:par>
-                              <p:par>
-                                <p:cTn id="21" presetID="1" presetClass="entr" presetSubtype="0" fill="hold" nodeType="withEffect">
-                                  <p:stCondLst>
-                                    <p:cond delay="0"/>
-                                  </p:stCondLst>
-                                  <p:childTnLst>
-                                    <p:set>
-                                      <p:cBhvr>
-                                        <p:cTn id="22" dur="1" fill="hold">
-                                          <p:stCondLst>
-                                            <p:cond delay="0"/>
-                                          </p:stCondLst>
-                                        </p:cTn>
-                                        <p:tgtEl>
-                                          <p:spTgt spid="3">
-                                            <p:txEl>
-                                              <p:pRg st="11" end="11"/>
-                                            </p:txEl>
-                                          </p:spTgt>
-                                        </p:tgtEl>
-                                        <p:attrNameLst>
-                                          <p:attrName>style.visibility</p:attrName>
-                                        </p:attrNameLst>
-                                      </p:cBhvr>
-                                      <p:to>
-                                        <p:strVal val="visible"/>
-                                      </p:to>
-                                    </p:set>
-                                  </p:childTnLst>
-                                </p:cTn>
-                              </p:par>
-                            </p:childTnLst>
-                          </p:cTn>
-                        </p:par>
-                      </p:childTnLst>
-                    </p:cTn>
-                  </p:par>
-                  <p:par>
-                    <p:cTn id="23" fill="hold">
-                      <p:stCondLst>
-                        <p:cond delay="indefinite"/>
-                      </p:stCondLst>
-                      <p:childTnLst>
-                        <p:par>
-                          <p:cTn id="24" fill="hold">
-                            <p:stCondLst>
-                              <p:cond delay="0"/>
-                            </p:stCondLst>
-                            <p:childTnLst>
-                              <p:par>
-                                <p:cTn id="25" presetID="1" presetClass="entr" presetSubtype="0" fill="hold" nodeType="clickEffect">
-                                  <p:stCondLst>
-                                    <p:cond delay="0"/>
-                                  </p:stCondLst>
-                                  <p:childTnLst>
-                                    <p:set>
-                                      <p:cBhvr>
-                                        <p:cTn id="26" dur="1" fill="hold">
-                                          <p:stCondLst>
-                                            <p:cond delay="0"/>
-                                          </p:stCondLst>
-                                        </p:cTn>
-                                        <p:tgtEl>
-                                          <p:spTgt spid="3">
-                                            <p:txEl>
-                                              <p:pRg st="12" end="12"/>
-                                            </p:txEl>
-                                          </p:spTgt>
-                                        </p:tgtEl>
-                                        <p:attrNameLst>
-                                          <p:attrName>style.visibility</p:attrName>
-                                        </p:attrNameLst>
-                                      </p:cBhvr>
-                                      <p:to>
-                                        <p:strVal val="visible"/>
-                                      </p:to>
-                                    </p:set>
-                                  </p:childTnLst>
-                                </p:cTn>
-                              </p:par>
-                            </p:childTnLst>
-                          </p:cTn>
-                        </p:par>
-                      </p:childTnLst>
-                    </p:cTn>
-                  </p:par>
-                </p:childTnLst>
-              </p:cTn>
-              <p:prevCondLst>
-                <p:cond evt="onPrev" delay="0">
-                  <p:tgtEl>
-                    <p:sldTgt/>
-                  </p:tgtEl>
-                </p:cond>
-              </p:prevCondLst>
-              <p:nextCondLst>
-                <p:cond evt="onNext" delay="0">
-                  <p:tgtEl>
-                    <p:sldTgt/>
-                  </p:tgtEl>
-                </p:cond>
-              </p:nextCondLst>
-            </p:seq>
-          </p:childTnLst>
-        </p:cTn>
-      </p:par>
-    </p:tnLst>
-  </p:timing>
-</p:sld>
-</file>
-
-<file path=ppt/slides/slide2.xml><?xml version="1.0" encoding="utf-8"?>
-<p:sld xmlns:a="http://schemas.openxmlformats.org/drawingml/2006/main" xmlns:r="http://schemas.openxmlformats.org/officeDocument/2006/relationships" xmlns:p="http://schemas.openxmlformats.org/presentationml/2006/main">
-  <p:cSld>
-    <p:spTree>
-      <p:nvGrpSpPr>
-        <p:cNvPr id="1" name="Shape 758"/>
-        <p:cNvGrpSpPr/>
-        <p:nvPr/>
-      </p:nvGrpSpPr>
-      <p:grpSpPr>
-        <a:xfrm>
-          <a:off x="0" y="0"/>
-          <a:ext cx="0" cy="0"/>
-          <a:chOff x="0" y="0"/>
-          <a:chExt cx="0" cy="0"/>
-        </a:xfrm>
-      </p:grpSpPr>
-      <p:sp>
-        <p:nvSpPr>
-          <p:cNvPr id="4" name="Titel 3">
+      <p:grpSp>
+        <p:nvGrpSpPr>
+          <p:cNvPr id="38" name="Gruppieren 37">
             <a:extLst>
               <a:ext uri="{FF2B5EF4-FFF2-40B4-BE49-F238E27FC236}">
-                <a16:creationId xmlns:a16="http://schemas.microsoft.com/office/drawing/2014/main" id="{560009B3-4363-49E4-9E84-D17A2A0673FE}"/>
+                <a16:creationId xmlns:a16="http://schemas.microsoft.com/office/drawing/2014/main" id="{3E20075B-7A52-4F26-A090-9C63D480AAF3}"/>
               </a:ext>
             </a:extLst>
           </p:cNvPr>
-          <p:cNvSpPr>
-            <a:spLocks noGrp="1"/>
-          </p:cNvSpPr>
-          <p:nvPr>
-            <p:ph type="title"/>
-          </p:nvPr>
-        </p:nvSpPr>
-        <p:spPr/>
-        <p:txBody>
-          <a:bodyPr/>
-          <a:lstStyle/>
-          <a:p>
-            <a:r>
-              <a:rPr lang="de-DE" noProof="0" dirty="0"/>
-              <a:t>Klassifikation der Wachstumsordnung</a:t>
-            </a:r>
-          </a:p>
-        </p:txBody>
-      </p:sp>
-      <p:sp>
-        <p:nvSpPr>
-          <p:cNvPr id="2" name="Inhaltsplatzhalter 1">
-            <a:extLst>
-              <a:ext uri="{FF2B5EF4-FFF2-40B4-BE49-F238E27FC236}">
-                <a16:creationId xmlns:a16="http://schemas.microsoft.com/office/drawing/2014/main" id="{4BF10E30-8BF6-4E47-9C16-971F642C6672}"/>
-              </a:ext>
-            </a:extLst>
-          </p:cNvPr>
-          <p:cNvSpPr>
-            <a:spLocks noGrp="1"/>
-          </p:cNvSpPr>
-          <p:nvPr>
-            <p:ph sz="quarter" idx="12"/>
-          </p:nvPr>
-        </p:nvSpPr>
-        <p:spPr/>
-        <p:txBody>
-          <a:bodyPr/>
-          <a:lstStyle/>
-          <a:p>
-            <a:r>
-              <a:rPr lang="de-DE" b="1" noProof="0" dirty="0">
-                <a:sym typeface="Quattrocento Sans"/>
-              </a:rPr>
-              <a:t>Wachstumsordnung</a:t>
-            </a:r>
-            <a:r>
-              <a:rPr lang="de-DE" noProof="0" dirty="0">
-                <a:sym typeface="Quattrocento Sans"/>
-              </a:rPr>
-              <a:t>: Eine Kategorie der </a:t>
-            </a:r>
-            <a:r>
-              <a:rPr lang="de-DE" noProof="0" dirty="0" err="1">
-                <a:sym typeface="Quattrocento Sans"/>
-              </a:rPr>
-              <a:t>Algorithmeneffizienz</a:t>
-            </a:r>
-            <a:r>
-              <a:rPr lang="de-DE" noProof="0" dirty="0">
-                <a:sym typeface="Quattrocento Sans"/>
-              </a:rPr>
-              <a:t>, die auf dem Verhältnis des Algorithmus zur Eingabegröße n basiert.</a:t>
-            </a:r>
-            <a:endParaRPr lang="de-DE" noProof="0" dirty="0"/>
-          </a:p>
-        </p:txBody>
-      </p:sp>
-      <p:sp>
-        <p:nvSpPr>
-          <p:cNvPr id="9" name="Textplatzhalter 8">
-            <a:extLst>
-              <a:ext uri="{FF2B5EF4-FFF2-40B4-BE49-F238E27FC236}">
-                <a16:creationId xmlns:a16="http://schemas.microsoft.com/office/drawing/2014/main" id="{1D4269AE-763D-4E82-8E6D-5C41F31B4DF0}"/>
-              </a:ext>
-            </a:extLst>
-          </p:cNvPr>
-          <p:cNvSpPr>
-            <a:spLocks noGrp="1"/>
-          </p:cNvSpPr>
-          <p:nvPr>
-            <p:ph type="body" idx="13"/>
-          </p:nvPr>
-        </p:nvSpPr>
-        <p:spPr/>
-        <p:txBody>
-          <a:bodyPr/>
-          <a:lstStyle/>
-          <a:p>
-            <a:r>
-              <a:rPr lang="de-DE" dirty="0"/>
-              <a:t>Algorithmik – Laufzeitanalyse von Algorithmen durch Asymptotische Notation</a:t>
-            </a:r>
-          </a:p>
-        </p:txBody>
-      </p:sp>
-      <p:sp>
-        <p:nvSpPr>
-          <p:cNvPr id="13" name="Datumsplatzhalter 4">
-            <a:extLst>
-              <a:ext uri="{FF2B5EF4-FFF2-40B4-BE49-F238E27FC236}">
-                <a16:creationId xmlns:a16="http://schemas.microsoft.com/office/drawing/2014/main" id="{A10456D1-8DBA-4572-B154-048ED812169E}"/>
-              </a:ext>
-            </a:extLst>
-          </p:cNvPr>
-          <p:cNvSpPr>
-            <a:spLocks noGrp="1"/>
-          </p:cNvSpPr>
-          <p:nvPr>
-            <p:ph type="dt" sz="half" idx="14"/>
-          </p:nvPr>
-        </p:nvSpPr>
-        <p:spPr/>
-        <p:txBody>
-          <a:bodyPr/>
-          <a:lstStyle/>
-          <a:p>
-            <a:fld id="{F2D06E3F-368B-43DC-96F3-4B8E65027050}" type="datetime1">
-              <a:rPr lang="de-DE" smtClean="0"/>
-              <a:pPr/>
-              <a:t>06.03.2026</a:t>
-            </a:fld>
-            <a:endParaRPr lang="de-DE" dirty="0"/>
-          </a:p>
-        </p:txBody>
-      </p:sp>
-      <p:sp>
-        <p:nvSpPr>
-          <p:cNvPr id="14" name="Foliennummernplatzhalter 5">
-            <a:extLst>
-              <a:ext uri="{FF2B5EF4-FFF2-40B4-BE49-F238E27FC236}">
-                <a16:creationId xmlns:a16="http://schemas.microsoft.com/office/drawing/2014/main" id="{0B566CFB-AD9D-4285-B0FA-4022FC1DBDBA}"/>
-              </a:ext>
-            </a:extLst>
-          </p:cNvPr>
-          <p:cNvSpPr>
-            <a:spLocks noGrp="1"/>
-          </p:cNvSpPr>
-          <p:nvPr>
-            <p:ph type="sldNum" sz="quarter" idx="15"/>
-          </p:nvPr>
-        </p:nvSpPr>
-        <p:spPr/>
-        <p:txBody>
-          <a:bodyPr/>
-          <a:lstStyle/>
-          <a:p>
-            <a:r>
-              <a:rPr lang="de-DE"/>
-              <a:t>Seite </a:t>
-            </a:r>
-            <a:fld id="{43310F81-32EE-4F95-9E9C-0BDC6AD52EEC}" type="slidenum">
-              <a:rPr lang="de-DE" smtClean="0"/>
-              <a:pPr/>
-              <a:t>2</a:t>
-            </a:fld>
-            <a:endParaRPr lang="de-DE" dirty="0"/>
-          </a:p>
-        </p:txBody>
-      </p:sp>
-      <p:graphicFrame>
-        <p:nvGraphicFramePr>
-          <p:cNvPr id="762" name="Google Shape;762;g118b4eb0048_0_551"/>
-          <p:cNvGraphicFramePr/>
-          <p:nvPr/>
-        </p:nvGraphicFramePr>
-        <p:xfrm>
-          <a:off x="323539" y="2398763"/>
-          <a:ext cx="6305875" cy="3519396"/>
-        </p:xfrm>
-        <a:graphic>
-          <a:graphicData uri="http://schemas.openxmlformats.org/drawingml/2006/table">
-            <a:tbl>
-              <a:tblPr>
-                <a:noFill/>
-              </a:tblPr>
-              <a:tblGrid>
-                <a:gridCol w="1311200">
-                  <a:extLst>
-                    <a:ext uri="{9D8B030D-6E8A-4147-A177-3AD203B41FA5}">
-                      <a16:colId xmlns:a16="http://schemas.microsoft.com/office/drawing/2014/main" val="20000"/>
-                    </a:ext>
-                  </a:extLst>
-                </a:gridCol>
-                <a:gridCol w="1137100">
-                  <a:extLst>
-                    <a:ext uri="{9D8B030D-6E8A-4147-A177-3AD203B41FA5}">
-                      <a16:colId xmlns:a16="http://schemas.microsoft.com/office/drawing/2014/main" val="20001"/>
-                    </a:ext>
-                  </a:extLst>
-                </a:gridCol>
-                <a:gridCol w="1772450">
-                  <a:extLst>
-                    <a:ext uri="{9D8B030D-6E8A-4147-A177-3AD203B41FA5}">
-                      <a16:colId xmlns:a16="http://schemas.microsoft.com/office/drawing/2014/main" val="20002"/>
-                    </a:ext>
-                  </a:extLst>
-                </a:gridCol>
-                <a:gridCol w="2085125">
-                  <a:extLst>
-                    <a:ext uri="{9D8B030D-6E8A-4147-A177-3AD203B41FA5}">
-                      <a16:colId xmlns:a16="http://schemas.microsoft.com/office/drawing/2014/main" val="20003"/>
-                    </a:ext>
-                  </a:extLst>
-                </a:gridCol>
-              </a:tblGrid>
-              <a:tr h="369900">
-                <a:tc>
-                  <a:txBody>
-                    <a:bodyPr/>
-                    <a:lstStyle/>
-                    <a:p>
-                      <a:pPr marL="0" marR="0" lvl="0" indent="0" algn="ctr" rtl="0">
-                        <a:lnSpc>
-                          <a:spcPct val="90000"/>
-                        </a:lnSpc>
-                        <a:spcBef>
-                          <a:spcPts val="0"/>
-                        </a:spcBef>
-                        <a:spcAft>
-                          <a:spcPts val="0"/>
-                        </a:spcAft>
-                        <a:buClr>
-                          <a:schemeClr val="lt1"/>
-                        </a:buClr>
-                        <a:buSzPts val="1400"/>
-                        <a:buFont typeface="Tahoma"/>
-                        <a:buNone/>
-                      </a:pPr>
-                      <a:r>
-                        <a:rPr lang="en-US" sz="1400" b="1" i="0" u="none" strike="noStrike" cap="none" dirty="0">
-                          <a:solidFill>
-                            <a:schemeClr val="lt1"/>
-                          </a:solidFill>
-                          <a:latin typeface="Tahoma"/>
-                          <a:ea typeface="Tahoma"/>
-                          <a:cs typeface="Tahoma"/>
-                          <a:sym typeface="Tahoma"/>
-                        </a:rPr>
-                        <a:t>Description</a:t>
-                      </a:r>
-                      <a:endParaRPr dirty="0"/>
-                    </a:p>
-                  </a:txBody>
-                  <a:tcPr marL="91450" marR="91450" marT="39675" marB="39675">
-                    <a:lnL w="12700" cap="flat" cmpd="sng">
-                      <a:solidFill>
-                        <a:srgbClr val="000000"/>
-                      </a:solidFill>
-                      <a:prstDash val="solid"/>
-                      <a:round/>
-                      <a:headEnd type="none" w="sm" len="sm"/>
-                      <a:tailEnd type="none" w="sm" len="sm"/>
-                    </a:lnL>
-                    <a:lnR w="12700" cap="flat" cmpd="sng">
-                      <a:solidFill>
-                        <a:srgbClr val="000000"/>
-                      </a:solidFill>
-                      <a:prstDash val="solid"/>
-                      <a:round/>
-                      <a:headEnd type="none" w="sm" len="sm"/>
-                      <a:tailEnd type="none" w="sm" len="sm"/>
-                    </a:lnR>
-                    <a:lnT w="12700" cap="flat" cmpd="sng">
-                      <a:solidFill>
-                        <a:srgbClr val="000000"/>
-                      </a:solidFill>
-                      <a:prstDash val="solid"/>
-                      <a:round/>
-                      <a:headEnd type="none" w="sm" len="sm"/>
-                      <a:tailEnd type="none" w="sm" len="sm"/>
-                    </a:lnT>
-                    <a:lnB w="12700" cap="flat" cmpd="sng">
-                      <a:solidFill>
-                        <a:srgbClr val="000000"/>
-                      </a:solidFill>
-                      <a:prstDash val="solid"/>
-                      <a:round/>
-                      <a:headEnd type="none" w="sm" len="sm"/>
-                      <a:tailEnd type="none" w="sm" len="sm"/>
-                    </a:lnB>
-                    <a:solidFill>
-                      <a:srgbClr val="4C3282"/>
-                    </a:solidFill>
-                  </a:tcPr>
-                </a:tc>
-                <a:tc>
-                  <a:txBody>
-                    <a:bodyPr/>
-                    <a:lstStyle/>
-                    <a:p>
-                      <a:pPr marL="0" marR="0" lvl="0" indent="0" algn="ctr" rtl="0">
-                        <a:lnSpc>
-                          <a:spcPct val="90000"/>
-                        </a:lnSpc>
-                        <a:spcBef>
-                          <a:spcPts val="0"/>
-                        </a:spcBef>
-                        <a:spcAft>
-                          <a:spcPts val="0"/>
-                        </a:spcAft>
-                        <a:buClr>
-                          <a:schemeClr val="lt1"/>
-                        </a:buClr>
-                        <a:buSzPts val="1400"/>
-                        <a:buFont typeface="Tahoma"/>
-                        <a:buNone/>
-                      </a:pPr>
-                      <a:r>
-                        <a:rPr lang="en-US" sz="1400" b="1" i="0" u="none" strike="noStrike" cap="none" dirty="0">
-                          <a:solidFill>
-                            <a:schemeClr val="lt1"/>
-                          </a:solidFill>
-                          <a:latin typeface="Tahoma"/>
-                          <a:ea typeface="Tahoma"/>
-                          <a:cs typeface="Tahoma"/>
-                          <a:sym typeface="Tahoma"/>
-                        </a:rPr>
-                        <a:t>O-Notation</a:t>
-                      </a:r>
-                      <a:endParaRPr dirty="0"/>
-                    </a:p>
-                  </a:txBody>
-                  <a:tcPr marL="91450" marR="91450" marT="39675" marB="39675">
-                    <a:lnL w="12700" cap="flat" cmpd="sng">
-                      <a:solidFill>
-                        <a:srgbClr val="000000"/>
-                      </a:solidFill>
-                      <a:prstDash val="solid"/>
-                      <a:round/>
-                      <a:headEnd type="none" w="sm" len="sm"/>
-                      <a:tailEnd type="none" w="sm" len="sm"/>
-                    </a:lnL>
-                    <a:lnR w="12700" cap="flat" cmpd="sng">
-                      <a:solidFill>
-                        <a:srgbClr val="000000"/>
-                      </a:solidFill>
-                      <a:prstDash val="solid"/>
-                      <a:round/>
-                      <a:headEnd type="none" w="sm" len="sm"/>
-                      <a:tailEnd type="none" w="sm" len="sm"/>
-                    </a:lnR>
-                    <a:lnT w="12700" cap="flat" cmpd="sng">
-                      <a:solidFill>
-                        <a:srgbClr val="000000"/>
-                      </a:solidFill>
-                      <a:prstDash val="solid"/>
-                      <a:round/>
-                      <a:headEnd type="none" w="sm" len="sm"/>
-                      <a:tailEnd type="none" w="sm" len="sm"/>
-                    </a:lnT>
-                    <a:lnB w="12700" cap="flat" cmpd="sng">
-                      <a:solidFill>
-                        <a:srgbClr val="000000"/>
-                      </a:solidFill>
-                      <a:prstDash val="solid"/>
-                      <a:round/>
-                      <a:headEnd type="none" w="sm" len="sm"/>
-                      <a:tailEnd type="none" w="sm" len="sm"/>
-                    </a:lnB>
-                    <a:solidFill>
-                      <a:srgbClr val="4C3282"/>
-                    </a:solidFill>
-                  </a:tcPr>
-                </a:tc>
-                <a:tc>
-                  <a:txBody>
-                    <a:bodyPr/>
-                    <a:lstStyle/>
-                    <a:p>
-                      <a:pPr marL="0" marR="0" lvl="0" indent="0" algn="ctr" rtl="0">
-                        <a:lnSpc>
-                          <a:spcPct val="90000"/>
-                        </a:lnSpc>
-                        <a:spcBef>
-                          <a:spcPts val="0"/>
-                        </a:spcBef>
-                        <a:spcAft>
-                          <a:spcPts val="0"/>
-                        </a:spcAft>
-                        <a:buClr>
-                          <a:schemeClr val="lt1"/>
-                        </a:buClr>
-                        <a:buSzPts val="1400"/>
-                        <a:buFont typeface="Tahoma"/>
-                        <a:buNone/>
-                      </a:pPr>
-                      <a:r>
-                        <a:rPr lang="en-US" sz="1400" b="1" i="0" u="none" strike="noStrike" cap="none" dirty="0">
-                          <a:solidFill>
-                            <a:schemeClr val="lt1"/>
-                          </a:solidFill>
-                          <a:latin typeface="Tahoma"/>
-                          <a:ea typeface="Tahoma"/>
-                          <a:cs typeface="Tahoma"/>
-                          <a:sym typeface="Tahoma"/>
-                        </a:rPr>
-                        <a:t>Runtime if you double n</a:t>
-                      </a:r>
-                      <a:endParaRPr dirty="0"/>
-                    </a:p>
-                  </a:txBody>
-                  <a:tcPr marL="91450" marR="91450" marT="39675" marB="39675">
-                    <a:lnL w="12700" cap="flat" cmpd="sng">
-                      <a:solidFill>
-                        <a:srgbClr val="000000"/>
-                      </a:solidFill>
-                      <a:prstDash val="solid"/>
-                      <a:round/>
-                      <a:headEnd type="none" w="sm" len="sm"/>
-                      <a:tailEnd type="none" w="sm" len="sm"/>
-                    </a:lnL>
-                    <a:lnR w="12700" cap="flat" cmpd="sng">
-                      <a:solidFill>
-                        <a:srgbClr val="000000"/>
-                      </a:solidFill>
-                      <a:prstDash val="solid"/>
-                      <a:round/>
-                      <a:headEnd type="none" w="sm" len="sm"/>
-                      <a:tailEnd type="none" w="sm" len="sm"/>
-                    </a:lnR>
-                    <a:lnT w="12700" cap="flat" cmpd="sng">
-                      <a:solidFill>
-                        <a:srgbClr val="000000"/>
-                      </a:solidFill>
-                      <a:prstDash val="solid"/>
-                      <a:round/>
-                      <a:headEnd type="none" w="sm" len="sm"/>
-                      <a:tailEnd type="none" w="sm" len="sm"/>
-                    </a:lnT>
-                    <a:lnB w="12700" cap="flat" cmpd="sng">
-                      <a:solidFill>
-                        <a:srgbClr val="000000"/>
-                      </a:solidFill>
-                      <a:prstDash val="solid"/>
-                      <a:round/>
-                      <a:headEnd type="none" w="sm" len="sm"/>
-                      <a:tailEnd type="none" w="sm" len="sm"/>
-                    </a:lnB>
-                    <a:solidFill>
-                      <a:srgbClr val="4C3282"/>
-                    </a:solidFill>
-                  </a:tcPr>
-                </a:tc>
-                <a:tc>
-                  <a:txBody>
-                    <a:bodyPr/>
-                    <a:lstStyle/>
-                    <a:p>
-                      <a:pPr marL="0" marR="0" lvl="0" indent="0" algn="ctr" rtl="0">
-                        <a:lnSpc>
-                          <a:spcPct val="90000"/>
-                        </a:lnSpc>
-                        <a:spcBef>
-                          <a:spcPts val="0"/>
-                        </a:spcBef>
-                        <a:spcAft>
-                          <a:spcPts val="0"/>
-                        </a:spcAft>
-                        <a:buClr>
-                          <a:schemeClr val="lt1"/>
-                        </a:buClr>
-                        <a:buSzPts val="1400"/>
-                        <a:buFont typeface="Tahoma"/>
-                        <a:buNone/>
-                      </a:pPr>
-                      <a:r>
-                        <a:rPr lang="en-US" sz="1400" b="1" i="0" u="none" strike="noStrike" cap="none">
-                          <a:solidFill>
-                            <a:schemeClr val="lt1"/>
-                          </a:solidFill>
-                          <a:latin typeface="Tahoma"/>
-                          <a:ea typeface="Tahoma"/>
-                          <a:cs typeface="Tahoma"/>
-                          <a:sym typeface="Tahoma"/>
-                        </a:rPr>
-                        <a:t>Example Algorithm</a:t>
-                      </a:r>
-                      <a:endParaRPr/>
-                    </a:p>
-                  </a:txBody>
-                  <a:tcPr marL="91450" marR="91450" marT="39675" marB="39675">
-                    <a:lnL w="12700" cap="flat" cmpd="sng">
-                      <a:solidFill>
-                        <a:srgbClr val="000000"/>
-                      </a:solidFill>
-                      <a:prstDash val="solid"/>
-                      <a:round/>
-                      <a:headEnd type="none" w="sm" len="sm"/>
-                      <a:tailEnd type="none" w="sm" len="sm"/>
-                    </a:lnL>
-                    <a:lnR w="12700" cap="flat" cmpd="sng">
-                      <a:solidFill>
-                        <a:srgbClr val="000000"/>
-                      </a:solidFill>
-                      <a:prstDash val="solid"/>
-                      <a:round/>
-                      <a:headEnd type="none" w="sm" len="sm"/>
-                      <a:tailEnd type="none" w="sm" len="sm"/>
-                    </a:lnR>
-                    <a:lnT w="12700" cap="flat" cmpd="sng">
-                      <a:solidFill>
-                        <a:srgbClr val="000000"/>
-                      </a:solidFill>
-                      <a:prstDash val="solid"/>
-                      <a:round/>
-                      <a:headEnd type="none" w="sm" len="sm"/>
-                      <a:tailEnd type="none" w="sm" len="sm"/>
-                    </a:lnT>
-                    <a:lnB w="12700" cap="flat" cmpd="sng">
-                      <a:solidFill>
-                        <a:srgbClr val="000000"/>
-                      </a:solidFill>
-                      <a:prstDash val="solid"/>
-                      <a:round/>
-                      <a:headEnd type="none" w="sm" len="sm"/>
-                      <a:tailEnd type="none" w="sm" len="sm"/>
-                    </a:lnB>
-                    <a:solidFill>
-                      <a:srgbClr val="4C3282"/>
-                    </a:solidFill>
-                  </a:tcPr>
-                </a:tc>
-                <a:extLst>
-                  <a:ext uri="{0D108BD9-81ED-4DB2-BD59-A6C34878D82A}">
-                    <a16:rowId xmlns:a16="http://schemas.microsoft.com/office/drawing/2014/main" val="10000"/>
-                  </a:ext>
-                </a:extLst>
-              </a:tr>
-              <a:tr h="369900">
-                <a:tc>
-                  <a:txBody>
-                    <a:bodyPr/>
-                    <a:lstStyle/>
-                    <a:p>
-                      <a:pPr marL="0" marR="0" lvl="0" indent="0" algn="l" rtl="0">
-                        <a:lnSpc>
-                          <a:spcPct val="90000"/>
-                        </a:lnSpc>
-                        <a:spcBef>
-                          <a:spcPts val="0"/>
-                        </a:spcBef>
-                        <a:spcAft>
-                          <a:spcPts val="0"/>
-                        </a:spcAft>
-                        <a:buClr>
-                          <a:schemeClr val="dk1"/>
-                        </a:buClr>
-                        <a:buSzPts val="1400"/>
-                        <a:buFont typeface="Tahoma"/>
-                        <a:buNone/>
-                      </a:pPr>
-                      <a:r>
-                        <a:rPr lang="en-US" sz="1400" b="0" i="0" u="none" strike="noStrike" cap="none" dirty="0">
-                          <a:solidFill>
-                            <a:schemeClr val="dk1"/>
-                          </a:solidFill>
-                          <a:latin typeface="Tahoma"/>
-                          <a:ea typeface="Tahoma"/>
-                          <a:cs typeface="Tahoma"/>
-                          <a:sym typeface="Tahoma"/>
-                        </a:rPr>
-                        <a:t>constant</a:t>
-                      </a:r>
-                      <a:endParaRPr dirty="0"/>
-                    </a:p>
-                  </a:txBody>
-                  <a:tcPr marL="91450" marR="91450" marT="39675" marB="39675">
-                    <a:lnL w="12700" cap="flat" cmpd="sng">
-                      <a:solidFill>
-                        <a:srgbClr val="000000"/>
-                      </a:solidFill>
-                      <a:prstDash val="solid"/>
-                      <a:round/>
-                      <a:headEnd type="none" w="sm" len="sm"/>
-                      <a:tailEnd type="none" w="sm" len="sm"/>
-                    </a:lnL>
-                    <a:lnR w="12700" cap="flat" cmpd="sng">
-                      <a:solidFill>
-                        <a:srgbClr val="000000"/>
-                      </a:solidFill>
-                      <a:prstDash val="solid"/>
-                      <a:round/>
-                      <a:headEnd type="none" w="sm" len="sm"/>
-                      <a:tailEnd type="none" w="sm" len="sm"/>
-                    </a:lnR>
-                    <a:lnT w="12700" cap="flat" cmpd="sng">
-                      <a:solidFill>
-                        <a:srgbClr val="000000"/>
-                      </a:solidFill>
-                      <a:prstDash val="solid"/>
-                      <a:round/>
-                      <a:headEnd type="none" w="sm" len="sm"/>
-                      <a:tailEnd type="none" w="sm" len="sm"/>
-                    </a:lnT>
-                    <a:lnB w="12700" cap="flat" cmpd="sng">
-                      <a:solidFill>
-                        <a:srgbClr val="000000"/>
-                      </a:solidFill>
-                      <a:prstDash val="solid"/>
-                      <a:round/>
-                      <a:headEnd type="none" w="sm" len="sm"/>
-                      <a:tailEnd type="none" w="sm" len="sm"/>
-                    </a:lnB>
-                  </a:tcPr>
-                </a:tc>
-                <a:tc>
-                  <a:txBody>
-                    <a:bodyPr/>
-                    <a:lstStyle/>
-                    <a:p>
-                      <a:pPr marL="0" marR="0" lvl="0" indent="0" algn="l" rtl="0">
-                        <a:lnSpc>
-                          <a:spcPct val="90000"/>
-                        </a:lnSpc>
-                        <a:spcBef>
-                          <a:spcPts val="0"/>
-                        </a:spcBef>
-                        <a:spcAft>
-                          <a:spcPts val="0"/>
-                        </a:spcAft>
-                        <a:buClr>
-                          <a:schemeClr val="dk1"/>
-                        </a:buClr>
-                        <a:buSzPts val="1400"/>
-                        <a:buFont typeface="Tahoma"/>
-                        <a:buNone/>
-                      </a:pPr>
-                      <a:r>
-                        <a:rPr lang="en-US" sz="1400" b="0" i="0" u="none" strike="noStrike" cap="none">
-                          <a:solidFill>
-                            <a:schemeClr val="dk1"/>
-                          </a:solidFill>
-                          <a:latin typeface="Tahoma"/>
-                          <a:ea typeface="Tahoma"/>
-                          <a:cs typeface="Tahoma"/>
-                          <a:sym typeface="Tahoma"/>
-                        </a:rPr>
-                        <a:t>O(1)</a:t>
-                      </a:r>
-                      <a:endParaRPr/>
-                    </a:p>
-                  </a:txBody>
-                  <a:tcPr marL="91450" marR="91450" marT="39675" marB="39675">
-                    <a:lnL w="12700" cap="flat" cmpd="sng">
-                      <a:solidFill>
-                        <a:srgbClr val="000000"/>
-                      </a:solidFill>
-                      <a:prstDash val="solid"/>
-                      <a:round/>
-                      <a:headEnd type="none" w="sm" len="sm"/>
-                      <a:tailEnd type="none" w="sm" len="sm"/>
-                    </a:lnL>
-                    <a:lnR w="12700" cap="flat" cmpd="sng">
-                      <a:solidFill>
-                        <a:srgbClr val="000000"/>
-                      </a:solidFill>
-                      <a:prstDash val="solid"/>
-                      <a:round/>
-                      <a:headEnd type="none" w="sm" len="sm"/>
-                      <a:tailEnd type="none" w="sm" len="sm"/>
-                    </a:lnR>
-                    <a:lnT w="12700" cap="flat" cmpd="sng">
-                      <a:solidFill>
-                        <a:srgbClr val="000000"/>
-                      </a:solidFill>
-                      <a:prstDash val="solid"/>
-                      <a:round/>
-                      <a:headEnd type="none" w="sm" len="sm"/>
-                      <a:tailEnd type="none" w="sm" len="sm"/>
-                    </a:lnT>
-                    <a:lnB w="12700" cap="flat" cmpd="sng">
-                      <a:solidFill>
-                        <a:srgbClr val="000000"/>
-                      </a:solidFill>
-                      <a:prstDash val="solid"/>
-                      <a:round/>
-                      <a:headEnd type="none" w="sm" len="sm"/>
-                      <a:tailEnd type="none" w="sm" len="sm"/>
-                    </a:lnB>
-                  </a:tcPr>
-                </a:tc>
-                <a:tc>
-                  <a:txBody>
-                    <a:bodyPr/>
-                    <a:lstStyle/>
-                    <a:p>
-                      <a:pPr marL="0" marR="0" lvl="0" indent="0" algn="l" rtl="0">
-                        <a:lnSpc>
-                          <a:spcPct val="90000"/>
-                        </a:lnSpc>
-                        <a:spcBef>
-                          <a:spcPts val="0"/>
-                        </a:spcBef>
-                        <a:spcAft>
-                          <a:spcPts val="0"/>
-                        </a:spcAft>
-                        <a:buClr>
-                          <a:schemeClr val="dk1"/>
-                        </a:buClr>
-                        <a:buSzPts val="1400"/>
-                        <a:buFont typeface="Tahoma"/>
-                        <a:buNone/>
-                      </a:pPr>
-                      <a:r>
-                        <a:rPr lang="en-US" sz="1400" b="0" i="0" u="none" strike="noStrike" cap="none">
-                          <a:solidFill>
-                            <a:schemeClr val="dk1"/>
-                          </a:solidFill>
-                          <a:latin typeface="Tahoma"/>
-                          <a:ea typeface="Tahoma"/>
-                          <a:cs typeface="Tahoma"/>
-                          <a:sym typeface="Tahoma"/>
-                        </a:rPr>
-                        <a:t>unchanged</a:t>
-                      </a:r>
-                      <a:endParaRPr/>
-                    </a:p>
-                  </a:txBody>
-                  <a:tcPr marL="91450" marR="91450" marT="39675" marB="39675">
-                    <a:lnL w="12700" cap="flat" cmpd="sng">
-                      <a:solidFill>
-                        <a:srgbClr val="000000"/>
-                      </a:solidFill>
-                      <a:prstDash val="solid"/>
-                      <a:round/>
-                      <a:headEnd type="none" w="sm" len="sm"/>
-                      <a:tailEnd type="none" w="sm" len="sm"/>
-                    </a:lnL>
-                    <a:lnR w="12700" cap="flat" cmpd="sng">
-                      <a:solidFill>
-                        <a:srgbClr val="000000"/>
-                      </a:solidFill>
-                      <a:prstDash val="solid"/>
-                      <a:round/>
-                      <a:headEnd type="none" w="sm" len="sm"/>
-                      <a:tailEnd type="none" w="sm" len="sm"/>
-                    </a:lnR>
-                    <a:lnT w="12700" cap="flat" cmpd="sng">
-                      <a:solidFill>
-                        <a:srgbClr val="000000"/>
-                      </a:solidFill>
-                      <a:prstDash val="solid"/>
-                      <a:round/>
-                      <a:headEnd type="none" w="sm" len="sm"/>
-                      <a:tailEnd type="none" w="sm" len="sm"/>
-                    </a:lnT>
-                    <a:lnB w="12700" cap="flat" cmpd="sng">
-                      <a:solidFill>
-                        <a:srgbClr val="000000"/>
-                      </a:solidFill>
-                      <a:prstDash val="solid"/>
-                      <a:round/>
-                      <a:headEnd type="none" w="sm" len="sm"/>
-                      <a:tailEnd type="none" w="sm" len="sm"/>
-                    </a:lnB>
-                  </a:tcPr>
-                </a:tc>
-                <a:tc>
-                  <a:txBody>
-                    <a:bodyPr/>
-                    <a:lstStyle/>
-                    <a:p>
-                      <a:pPr marL="0" marR="0" lvl="0" indent="0" algn="l" rtl="0">
-                        <a:lnSpc>
-                          <a:spcPct val="90000"/>
-                        </a:lnSpc>
-                        <a:spcBef>
-                          <a:spcPts val="0"/>
-                        </a:spcBef>
-                        <a:spcAft>
-                          <a:spcPts val="0"/>
-                        </a:spcAft>
-                        <a:buClr>
-                          <a:schemeClr val="dk1"/>
-                        </a:buClr>
-                        <a:buSzPts val="1400"/>
-                        <a:buFont typeface="Tahoma"/>
-                        <a:buNone/>
-                      </a:pPr>
-                      <a:r>
-                        <a:rPr lang="en-US" sz="1400" b="0" i="0" u="none" strike="noStrike" cap="none">
-                          <a:solidFill>
-                            <a:schemeClr val="dk1"/>
-                          </a:solidFill>
-                          <a:latin typeface="Tahoma"/>
-                          <a:ea typeface="Tahoma"/>
-                          <a:cs typeface="Tahoma"/>
-                          <a:sym typeface="Tahoma"/>
-                        </a:rPr>
-                        <a:t>Accessing an index of an array</a:t>
-                      </a:r>
-                      <a:endParaRPr/>
-                    </a:p>
-                  </a:txBody>
-                  <a:tcPr marL="91450" marR="91450" marT="39675" marB="39675">
-                    <a:lnL w="12700" cap="flat" cmpd="sng">
-                      <a:solidFill>
-                        <a:srgbClr val="000000"/>
-                      </a:solidFill>
-                      <a:prstDash val="solid"/>
-                      <a:round/>
-                      <a:headEnd type="none" w="sm" len="sm"/>
-                      <a:tailEnd type="none" w="sm" len="sm"/>
-                    </a:lnL>
-                    <a:lnR w="12700" cap="flat" cmpd="sng">
-                      <a:solidFill>
-                        <a:srgbClr val="000000"/>
-                      </a:solidFill>
-                      <a:prstDash val="solid"/>
-                      <a:round/>
-                      <a:headEnd type="none" w="sm" len="sm"/>
-                      <a:tailEnd type="none" w="sm" len="sm"/>
-                    </a:lnR>
-                    <a:lnT w="12700" cap="flat" cmpd="sng">
-                      <a:solidFill>
-                        <a:srgbClr val="000000"/>
-                      </a:solidFill>
-                      <a:prstDash val="solid"/>
-                      <a:round/>
-                      <a:headEnd type="none" w="sm" len="sm"/>
-                      <a:tailEnd type="none" w="sm" len="sm"/>
-                    </a:lnT>
-                    <a:lnB w="12700" cap="flat" cmpd="sng">
-                      <a:solidFill>
-                        <a:srgbClr val="000000"/>
-                      </a:solidFill>
-                      <a:prstDash val="solid"/>
-                      <a:round/>
-                      <a:headEnd type="none" w="sm" len="sm"/>
-                      <a:tailEnd type="none" w="sm" len="sm"/>
-                    </a:lnB>
-                  </a:tcPr>
-                </a:tc>
-                <a:extLst>
-                  <a:ext uri="{0D108BD9-81ED-4DB2-BD59-A6C34878D82A}">
-                    <a16:rowId xmlns:a16="http://schemas.microsoft.com/office/drawing/2014/main" val="10001"/>
-                  </a:ext>
-                </a:extLst>
-              </a:tr>
-              <a:tr h="369900">
-                <a:tc>
-                  <a:txBody>
-                    <a:bodyPr/>
-                    <a:lstStyle/>
-                    <a:p>
-                      <a:pPr marL="0" marR="0" lvl="0" indent="0" algn="l" rtl="0">
-                        <a:lnSpc>
-                          <a:spcPct val="90000"/>
-                        </a:lnSpc>
-                        <a:spcBef>
-                          <a:spcPts val="0"/>
-                        </a:spcBef>
-                        <a:spcAft>
-                          <a:spcPts val="0"/>
-                        </a:spcAft>
-                        <a:buClr>
-                          <a:schemeClr val="dk1"/>
-                        </a:buClr>
-                        <a:buSzPts val="1400"/>
-                        <a:buFont typeface="Tahoma"/>
-                        <a:buNone/>
-                      </a:pPr>
-                      <a:r>
-                        <a:rPr lang="en-US" sz="1400" b="0" i="0" u="none" strike="noStrike" cap="none" dirty="0">
-                          <a:solidFill>
-                            <a:schemeClr val="dk1"/>
-                          </a:solidFill>
-                          <a:latin typeface="Tahoma"/>
-                          <a:ea typeface="Tahoma"/>
-                          <a:cs typeface="Tahoma"/>
-                          <a:sym typeface="Tahoma"/>
-                        </a:rPr>
-                        <a:t>logarithmic</a:t>
-                      </a:r>
-                      <a:endParaRPr dirty="0"/>
-                    </a:p>
-                  </a:txBody>
-                  <a:tcPr marL="91450" marR="91450" marT="39675" marB="39675">
-                    <a:lnL w="12700" cap="flat" cmpd="sng">
-                      <a:solidFill>
-                        <a:srgbClr val="000000"/>
-                      </a:solidFill>
-                      <a:prstDash val="solid"/>
-                      <a:round/>
-                      <a:headEnd type="none" w="sm" len="sm"/>
-                      <a:tailEnd type="none" w="sm" len="sm"/>
-                    </a:lnL>
-                    <a:lnR w="12700" cap="flat" cmpd="sng">
-                      <a:solidFill>
-                        <a:srgbClr val="000000"/>
-                      </a:solidFill>
-                      <a:prstDash val="solid"/>
-                      <a:round/>
-                      <a:headEnd type="none" w="sm" len="sm"/>
-                      <a:tailEnd type="none" w="sm" len="sm"/>
-                    </a:lnR>
-                    <a:lnT w="12700" cap="flat" cmpd="sng">
-                      <a:solidFill>
-                        <a:srgbClr val="000000"/>
-                      </a:solidFill>
-                      <a:prstDash val="solid"/>
-                      <a:round/>
-                      <a:headEnd type="none" w="sm" len="sm"/>
-                      <a:tailEnd type="none" w="sm" len="sm"/>
-                    </a:lnT>
-                    <a:lnB w="12700" cap="flat" cmpd="sng">
-                      <a:solidFill>
-                        <a:srgbClr val="000000"/>
-                      </a:solidFill>
-                      <a:prstDash val="solid"/>
-                      <a:round/>
-                      <a:headEnd type="none" w="sm" len="sm"/>
-                      <a:tailEnd type="none" w="sm" len="sm"/>
-                    </a:lnB>
-                  </a:tcPr>
-                </a:tc>
-                <a:tc>
-                  <a:txBody>
-                    <a:bodyPr/>
-                    <a:lstStyle/>
-                    <a:p>
-                      <a:pPr marL="0" marR="0" lvl="0" indent="0" algn="l" rtl="0">
-                        <a:lnSpc>
-                          <a:spcPct val="90000"/>
-                        </a:lnSpc>
-                        <a:spcBef>
-                          <a:spcPts val="0"/>
-                        </a:spcBef>
-                        <a:spcAft>
-                          <a:spcPts val="0"/>
-                        </a:spcAft>
-                        <a:buClr>
-                          <a:schemeClr val="dk1"/>
-                        </a:buClr>
-                        <a:buSzPts val="1400"/>
-                        <a:buFont typeface="Tahoma"/>
-                        <a:buNone/>
-                      </a:pPr>
-                      <a:r>
-                        <a:rPr lang="en-US" sz="1400" b="0" i="0" u="none" strike="noStrike" cap="none" dirty="0">
-                          <a:solidFill>
-                            <a:schemeClr val="dk1"/>
-                          </a:solidFill>
-                          <a:latin typeface="Tahoma"/>
-                          <a:ea typeface="Tahoma"/>
-                          <a:cs typeface="Tahoma"/>
-                          <a:sym typeface="Tahoma"/>
-                        </a:rPr>
-                        <a:t>O(log</a:t>
-                      </a:r>
-                      <a:r>
-                        <a:rPr lang="en-US" sz="1400" b="0" i="0" u="none" strike="noStrike" cap="none" baseline="-25000" dirty="0">
-                          <a:solidFill>
-                            <a:schemeClr val="dk1"/>
-                          </a:solidFill>
-                          <a:latin typeface="Tahoma"/>
-                          <a:ea typeface="Tahoma"/>
-                          <a:cs typeface="Tahoma"/>
-                          <a:sym typeface="Tahoma"/>
-                        </a:rPr>
-                        <a:t>2</a:t>
-                      </a:r>
-                      <a:r>
-                        <a:rPr lang="en-US" sz="1400" b="0" i="0" u="none" strike="noStrike" cap="none" dirty="0">
-                          <a:solidFill>
-                            <a:schemeClr val="dk1"/>
-                          </a:solidFill>
-                          <a:latin typeface="Tahoma"/>
-                          <a:ea typeface="Tahoma"/>
-                          <a:cs typeface="Tahoma"/>
-                          <a:sym typeface="Tahoma"/>
-                        </a:rPr>
-                        <a:t> n)</a:t>
-                      </a:r>
-                      <a:endParaRPr dirty="0"/>
-                    </a:p>
-                  </a:txBody>
-                  <a:tcPr marL="91450" marR="91450" marT="39675" marB="39675">
-                    <a:lnL w="12700" cap="flat" cmpd="sng">
-                      <a:solidFill>
-                        <a:srgbClr val="000000"/>
-                      </a:solidFill>
-                      <a:prstDash val="solid"/>
-                      <a:round/>
-                      <a:headEnd type="none" w="sm" len="sm"/>
-                      <a:tailEnd type="none" w="sm" len="sm"/>
-                    </a:lnL>
-                    <a:lnR w="12700" cap="flat" cmpd="sng">
-                      <a:solidFill>
-                        <a:srgbClr val="000000"/>
-                      </a:solidFill>
-                      <a:prstDash val="solid"/>
-                      <a:round/>
-                      <a:headEnd type="none" w="sm" len="sm"/>
-                      <a:tailEnd type="none" w="sm" len="sm"/>
-                    </a:lnR>
-                    <a:lnT w="12700" cap="flat" cmpd="sng">
-                      <a:solidFill>
-                        <a:srgbClr val="000000"/>
-                      </a:solidFill>
-                      <a:prstDash val="solid"/>
-                      <a:round/>
-                      <a:headEnd type="none" w="sm" len="sm"/>
-                      <a:tailEnd type="none" w="sm" len="sm"/>
-                    </a:lnT>
-                    <a:lnB w="12700" cap="flat" cmpd="sng">
-                      <a:solidFill>
-                        <a:srgbClr val="000000"/>
-                      </a:solidFill>
-                      <a:prstDash val="solid"/>
-                      <a:round/>
-                      <a:headEnd type="none" w="sm" len="sm"/>
-                      <a:tailEnd type="none" w="sm" len="sm"/>
-                    </a:lnB>
-                  </a:tcPr>
-                </a:tc>
-                <a:tc>
-                  <a:txBody>
-                    <a:bodyPr/>
-                    <a:lstStyle/>
-                    <a:p>
-                      <a:pPr marL="0" marR="0" lvl="0" indent="0" algn="l" rtl="0">
-                        <a:lnSpc>
-                          <a:spcPct val="90000"/>
-                        </a:lnSpc>
-                        <a:spcBef>
-                          <a:spcPts val="0"/>
-                        </a:spcBef>
-                        <a:spcAft>
-                          <a:spcPts val="0"/>
-                        </a:spcAft>
-                        <a:buClr>
-                          <a:schemeClr val="dk1"/>
-                        </a:buClr>
-                        <a:buSzPts val="1400"/>
-                        <a:buFont typeface="Tahoma"/>
-                        <a:buNone/>
-                      </a:pPr>
-                      <a:r>
-                        <a:rPr lang="en-US" sz="1400" b="0" i="0" u="none" strike="noStrike" cap="none">
-                          <a:solidFill>
-                            <a:schemeClr val="dk1"/>
-                          </a:solidFill>
-                          <a:latin typeface="Tahoma"/>
-                          <a:ea typeface="Tahoma"/>
-                          <a:cs typeface="Tahoma"/>
-                          <a:sym typeface="Tahoma"/>
-                        </a:rPr>
-                        <a:t>increases slightly</a:t>
-                      </a:r>
-                      <a:endParaRPr/>
-                    </a:p>
-                  </a:txBody>
-                  <a:tcPr marL="91450" marR="91450" marT="39675" marB="39675">
-                    <a:lnL w="12700" cap="flat" cmpd="sng">
-                      <a:solidFill>
-                        <a:srgbClr val="000000"/>
-                      </a:solidFill>
-                      <a:prstDash val="solid"/>
-                      <a:round/>
-                      <a:headEnd type="none" w="sm" len="sm"/>
-                      <a:tailEnd type="none" w="sm" len="sm"/>
-                    </a:lnL>
-                    <a:lnR w="12700" cap="flat" cmpd="sng">
-                      <a:solidFill>
-                        <a:srgbClr val="000000"/>
-                      </a:solidFill>
-                      <a:prstDash val="solid"/>
-                      <a:round/>
-                      <a:headEnd type="none" w="sm" len="sm"/>
-                      <a:tailEnd type="none" w="sm" len="sm"/>
-                    </a:lnR>
-                    <a:lnT w="12700" cap="flat" cmpd="sng">
-                      <a:solidFill>
-                        <a:srgbClr val="000000"/>
-                      </a:solidFill>
-                      <a:prstDash val="solid"/>
-                      <a:round/>
-                      <a:headEnd type="none" w="sm" len="sm"/>
-                      <a:tailEnd type="none" w="sm" len="sm"/>
-                    </a:lnT>
-                    <a:lnB w="12700" cap="flat" cmpd="sng">
-                      <a:solidFill>
-                        <a:srgbClr val="000000"/>
-                      </a:solidFill>
-                      <a:prstDash val="solid"/>
-                      <a:round/>
-                      <a:headEnd type="none" w="sm" len="sm"/>
-                      <a:tailEnd type="none" w="sm" len="sm"/>
-                    </a:lnB>
-                  </a:tcPr>
-                </a:tc>
-                <a:tc>
-                  <a:txBody>
-                    <a:bodyPr/>
-                    <a:lstStyle/>
-                    <a:p>
-                      <a:pPr marL="0" marR="0" lvl="0" indent="0" algn="l" rtl="0">
-                        <a:lnSpc>
-                          <a:spcPct val="90000"/>
-                        </a:lnSpc>
-                        <a:spcBef>
-                          <a:spcPts val="0"/>
-                        </a:spcBef>
-                        <a:spcAft>
-                          <a:spcPts val="0"/>
-                        </a:spcAft>
-                        <a:buClr>
-                          <a:schemeClr val="dk1"/>
-                        </a:buClr>
-                        <a:buSzPts val="1400"/>
-                        <a:buFont typeface="Tahoma"/>
-                        <a:buNone/>
-                      </a:pPr>
-                      <a:r>
-                        <a:rPr lang="en-US" sz="1400" b="0" i="0" u="none" strike="noStrike" cap="none">
-                          <a:solidFill>
-                            <a:schemeClr val="dk1"/>
-                          </a:solidFill>
-                          <a:latin typeface="Tahoma"/>
-                          <a:ea typeface="Tahoma"/>
-                          <a:cs typeface="Tahoma"/>
-                          <a:sym typeface="Tahoma"/>
-                        </a:rPr>
-                        <a:t>Binary search</a:t>
-                      </a:r>
-                      <a:endParaRPr/>
-                    </a:p>
-                  </a:txBody>
-                  <a:tcPr marL="91450" marR="91450" marT="39675" marB="39675">
-                    <a:lnL w="12700" cap="flat" cmpd="sng">
-                      <a:solidFill>
-                        <a:srgbClr val="000000"/>
-                      </a:solidFill>
-                      <a:prstDash val="solid"/>
-                      <a:round/>
-                      <a:headEnd type="none" w="sm" len="sm"/>
-                      <a:tailEnd type="none" w="sm" len="sm"/>
-                    </a:lnL>
-                    <a:lnR w="12700" cap="flat" cmpd="sng">
-                      <a:solidFill>
-                        <a:srgbClr val="000000"/>
-                      </a:solidFill>
-                      <a:prstDash val="solid"/>
-                      <a:round/>
-                      <a:headEnd type="none" w="sm" len="sm"/>
-                      <a:tailEnd type="none" w="sm" len="sm"/>
-                    </a:lnR>
-                    <a:lnT w="12700" cap="flat" cmpd="sng">
-                      <a:solidFill>
-                        <a:srgbClr val="000000"/>
-                      </a:solidFill>
-                      <a:prstDash val="solid"/>
-                      <a:round/>
-                      <a:headEnd type="none" w="sm" len="sm"/>
-                      <a:tailEnd type="none" w="sm" len="sm"/>
-                    </a:lnT>
-                    <a:lnB w="12700" cap="flat" cmpd="sng">
-                      <a:solidFill>
-                        <a:srgbClr val="000000"/>
-                      </a:solidFill>
-                      <a:prstDash val="solid"/>
-                      <a:round/>
-                      <a:headEnd type="none" w="sm" len="sm"/>
-                      <a:tailEnd type="none" w="sm" len="sm"/>
-                    </a:lnB>
-                  </a:tcPr>
-                </a:tc>
-                <a:extLst>
-                  <a:ext uri="{0D108BD9-81ED-4DB2-BD59-A6C34878D82A}">
-                    <a16:rowId xmlns:a16="http://schemas.microsoft.com/office/drawing/2014/main" val="10002"/>
-                  </a:ext>
-                </a:extLst>
-              </a:tr>
-              <a:tr h="369900">
-                <a:tc>
-                  <a:txBody>
-                    <a:bodyPr/>
-                    <a:lstStyle/>
-                    <a:p>
-                      <a:pPr marL="0" marR="0" lvl="0" indent="0" algn="l" rtl="0">
-                        <a:lnSpc>
-                          <a:spcPct val="90000"/>
-                        </a:lnSpc>
-                        <a:spcBef>
-                          <a:spcPts val="0"/>
-                        </a:spcBef>
-                        <a:spcAft>
-                          <a:spcPts val="0"/>
-                        </a:spcAft>
-                        <a:buClr>
-                          <a:schemeClr val="dk1"/>
-                        </a:buClr>
-                        <a:buSzPts val="1400"/>
-                        <a:buFont typeface="Tahoma"/>
-                        <a:buNone/>
-                      </a:pPr>
-                      <a:r>
-                        <a:rPr lang="en-US" sz="1400" b="0" i="0" u="none" strike="noStrike" cap="none">
-                          <a:solidFill>
-                            <a:schemeClr val="dk1"/>
-                          </a:solidFill>
-                          <a:latin typeface="Tahoma"/>
-                          <a:ea typeface="Tahoma"/>
-                          <a:cs typeface="Tahoma"/>
-                          <a:sym typeface="Tahoma"/>
-                        </a:rPr>
-                        <a:t>linear</a:t>
-                      </a:r>
-                      <a:endParaRPr/>
-                    </a:p>
-                  </a:txBody>
-                  <a:tcPr marL="91450" marR="91450" marT="39675" marB="39675">
-                    <a:lnL w="12700" cap="flat" cmpd="sng">
-                      <a:solidFill>
-                        <a:srgbClr val="000000"/>
-                      </a:solidFill>
-                      <a:prstDash val="solid"/>
-                      <a:round/>
-                      <a:headEnd type="none" w="sm" len="sm"/>
-                      <a:tailEnd type="none" w="sm" len="sm"/>
-                    </a:lnL>
-                    <a:lnR w="12700" cap="flat" cmpd="sng">
-                      <a:solidFill>
-                        <a:srgbClr val="000000"/>
-                      </a:solidFill>
-                      <a:prstDash val="solid"/>
-                      <a:round/>
-                      <a:headEnd type="none" w="sm" len="sm"/>
-                      <a:tailEnd type="none" w="sm" len="sm"/>
-                    </a:lnR>
-                    <a:lnT w="12700" cap="flat" cmpd="sng">
-                      <a:solidFill>
-                        <a:srgbClr val="000000"/>
-                      </a:solidFill>
-                      <a:prstDash val="solid"/>
-                      <a:round/>
-                      <a:headEnd type="none" w="sm" len="sm"/>
-                      <a:tailEnd type="none" w="sm" len="sm"/>
-                    </a:lnT>
-                    <a:lnB w="12700" cap="flat" cmpd="sng">
-                      <a:solidFill>
-                        <a:srgbClr val="000000"/>
-                      </a:solidFill>
-                      <a:prstDash val="solid"/>
-                      <a:round/>
-                      <a:headEnd type="none" w="sm" len="sm"/>
-                      <a:tailEnd type="none" w="sm" len="sm"/>
-                    </a:lnB>
-                  </a:tcPr>
-                </a:tc>
-                <a:tc>
-                  <a:txBody>
-                    <a:bodyPr/>
-                    <a:lstStyle/>
-                    <a:p>
-                      <a:pPr marL="0" marR="0" lvl="0" indent="0" algn="l" rtl="0">
-                        <a:lnSpc>
-                          <a:spcPct val="90000"/>
-                        </a:lnSpc>
-                        <a:spcBef>
-                          <a:spcPts val="0"/>
-                        </a:spcBef>
-                        <a:spcAft>
-                          <a:spcPts val="0"/>
-                        </a:spcAft>
-                        <a:buClr>
-                          <a:schemeClr val="dk1"/>
-                        </a:buClr>
-                        <a:buSzPts val="1400"/>
-                        <a:buFont typeface="Tahoma"/>
-                        <a:buNone/>
-                      </a:pPr>
-                      <a:r>
-                        <a:rPr lang="en-US" sz="1400" b="0" i="0" u="none" strike="noStrike" cap="none" dirty="0">
-                          <a:solidFill>
-                            <a:schemeClr val="dk1"/>
-                          </a:solidFill>
-                          <a:latin typeface="Tahoma"/>
-                          <a:ea typeface="Tahoma"/>
-                          <a:cs typeface="Tahoma"/>
-                          <a:sym typeface="Tahoma"/>
-                        </a:rPr>
-                        <a:t>O(n)</a:t>
-                      </a:r>
-                      <a:endParaRPr dirty="0"/>
-                    </a:p>
-                  </a:txBody>
-                  <a:tcPr marL="91450" marR="91450" marT="39675" marB="39675">
-                    <a:lnL w="12700" cap="flat" cmpd="sng">
-                      <a:solidFill>
-                        <a:srgbClr val="000000"/>
-                      </a:solidFill>
-                      <a:prstDash val="solid"/>
-                      <a:round/>
-                      <a:headEnd type="none" w="sm" len="sm"/>
-                      <a:tailEnd type="none" w="sm" len="sm"/>
-                    </a:lnL>
-                    <a:lnR w="12700" cap="flat" cmpd="sng">
-                      <a:solidFill>
-                        <a:srgbClr val="000000"/>
-                      </a:solidFill>
-                      <a:prstDash val="solid"/>
-                      <a:round/>
-                      <a:headEnd type="none" w="sm" len="sm"/>
-                      <a:tailEnd type="none" w="sm" len="sm"/>
-                    </a:lnR>
-                    <a:lnT w="12700" cap="flat" cmpd="sng">
-                      <a:solidFill>
-                        <a:srgbClr val="000000"/>
-                      </a:solidFill>
-                      <a:prstDash val="solid"/>
-                      <a:round/>
-                      <a:headEnd type="none" w="sm" len="sm"/>
-                      <a:tailEnd type="none" w="sm" len="sm"/>
-                    </a:lnT>
-                    <a:lnB w="12700" cap="flat" cmpd="sng">
-                      <a:solidFill>
-                        <a:srgbClr val="000000"/>
-                      </a:solidFill>
-                      <a:prstDash val="solid"/>
-                      <a:round/>
-                      <a:headEnd type="none" w="sm" len="sm"/>
-                      <a:tailEnd type="none" w="sm" len="sm"/>
-                    </a:lnB>
-                  </a:tcPr>
-                </a:tc>
-                <a:tc>
-                  <a:txBody>
-                    <a:bodyPr/>
-                    <a:lstStyle/>
-                    <a:p>
-                      <a:pPr marL="0" marR="0" lvl="0" indent="0" algn="l" rtl="0">
-                        <a:lnSpc>
-                          <a:spcPct val="90000"/>
-                        </a:lnSpc>
-                        <a:spcBef>
-                          <a:spcPts val="0"/>
-                        </a:spcBef>
-                        <a:spcAft>
-                          <a:spcPts val="0"/>
-                        </a:spcAft>
-                        <a:buClr>
-                          <a:schemeClr val="dk1"/>
-                        </a:buClr>
-                        <a:buSzPts val="1400"/>
-                        <a:buFont typeface="Tahoma"/>
-                        <a:buNone/>
-                      </a:pPr>
-                      <a:r>
-                        <a:rPr lang="en-US" sz="1400" b="0" i="0" u="none" strike="noStrike" cap="none">
-                          <a:solidFill>
-                            <a:schemeClr val="dk1"/>
-                          </a:solidFill>
-                          <a:latin typeface="Tahoma"/>
-                          <a:ea typeface="Tahoma"/>
-                          <a:cs typeface="Tahoma"/>
-                          <a:sym typeface="Tahoma"/>
-                        </a:rPr>
-                        <a:t>doubles</a:t>
-                      </a:r>
-                      <a:endParaRPr/>
-                    </a:p>
-                  </a:txBody>
-                  <a:tcPr marL="91450" marR="91450" marT="39675" marB="39675">
-                    <a:lnL w="12700" cap="flat" cmpd="sng">
-                      <a:solidFill>
-                        <a:srgbClr val="000000"/>
-                      </a:solidFill>
-                      <a:prstDash val="solid"/>
-                      <a:round/>
-                      <a:headEnd type="none" w="sm" len="sm"/>
-                      <a:tailEnd type="none" w="sm" len="sm"/>
-                    </a:lnL>
-                    <a:lnR w="12700" cap="flat" cmpd="sng">
-                      <a:solidFill>
-                        <a:srgbClr val="000000"/>
-                      </a:solidFill>
-                      <a:prstDash val="solid"/>
-                      <a:round/>
-                      <a:headEnd type="none" w="sm" len="sm"/>
-                      <a:tailEnd type="none" w="sm" len="sm"/>
-                    </a:lnR>
-                    <a:lnT w="12700" cap="flat" cmpd="sng">
-                      <a:solidFill>
-                        <a:srgbClr val="000000"/>
-                      </a:solidFill>
-                      <a:prstDash val="solid"/>
-                      <a:round/>
-                      <a:headEnd type="none" w="sm" len="sm"/>
-                      <a:tailEnd type="none" w="sm" len="sm"/>
-                    </a:lnT>
-                    <a:lnB w="12700" cap="flat" cmpd="sng">
-                      <a:solidFill>
-                        <a:srgbClr val="000000"/>
-                      </a:solidFill>
-                      <a:prstDash val="solid"/>
-                      <a:round/>
-                      <a:headEnd type="none" w="sm" len="sm"/>
-                      <a:tailEnd type="none" w="sm" len="sm"/>
-                    </a:lnB>
-                  </a:tcPr>
-                </a:tc>
-                <a:tc>
-                  <a:txBody>
-                    <a:bodyPr/>
-                    <a:lstStyle/>
-                    <a:p>
-                      <a:pPr marL="0" marR="0" lvl="0" indent="0" algn="l" rtl="0">
-                        <a:lnSpc>
-                          <a:spcPct val="90000"/>
-                        </a:lnSpc>
-                        <a:spcBef>
-                          <a:spcPts val="0"/>
-                        </a:spcBef>
-                        <a:spcAft>
-                          <a:spcPts val="0"/>
-                        </a:spcAft>
-                        <a:buClr>
-                          <a:schemeClr val="dk1"/>
-                        </a:buClr>
-                        <a:buSzPts val="1400"/>
-                        <a:buFont typeface="Tahoma"/>
-                        <a:buNone/>
-                      </a:pPr>
-                      <a:r>
-                        <a:rPr lang="en-US" sz="1400" b="0" i="0" u="none" strike="noStrike" cap="none">
-                          <a:solidFill>
-                            <a:schemeClr val="dk1"/>
-                          </a:solidFill>
-                          <a:latin typeface="Tahoma"/>
-                          <a:ea typeface="Tahoma"/>
-                          <a:cs typeface="Tahoma"/>
-                          <a:sym typeface="Tahoma"/>
-                        </a:rPr>
-                        <a:t>Looping over an array</a:t>
-                      </a:r>
-                      <a:endParaRPr/>
-                    </a:p>
-                  </a:txBody>
-                  <a:tcPr marL="91450" marR="91450" marT="39675" marB="39675">
-                    <a:lnL w="12700" cap="flat" cmpd="sng">
-                      <a:solidFill>
-                        <a:srgbClr val="000000"/>
-                      </a:solidFill>
-                      <a:prstDash val="solid"/>
-                      <a:round/>
-                      <a:headEnd type="none" w="sm" len="sm"/>
-                      <a:tailEnd type="none" w="sm" len="sm"/>
-                    </a:lnL>
-                    <a:lnR w="12700" cap="flat" cmpd="sng">
-                      <a:solidFill>
-                        <a:srgbClr val="000000"/>
-                      </a:solidFill>
-                      <a:prstDash val="solid"/>
-                      <a:round/>
-                      <a:headEnd type="none" w="sm" len="sm"/>
-                      <a:tailEnd type="none" w="sm" len="sm"/>
-                    </a:lnR>
-                    <a:lnT w="12700" cap="flat" cmpd="sng">
-                      <a:solidFill>
-                        <a:srgbClr val="000000"/>
-                      </a:solidFill>
-                      <a:prstDash val="solid"/>
-                      <a:round/>
-                      <a:headEnd type="none" w="sm" len="sm"/>
-                      <a:tailEnd type="none" w="sm" len="sm"/>
-                    </a:lnT>
-                    <a:lnB w="12700" cap="flat" cmpd="sng">
-                      <a:solidFill>
-                        <a:srgbClr val="000000"/>
-                      </a:solidFill>
-                      <a:prstDash val="solid"/>
-                      <a:round/>
-                      <a:headEnd type="none" w="sm" len="sm"/>
-                      <a:tailEnd type="none" w="sm" len="sm"/>
-                    </a:lnB>
-                  </a:tcPr>
-                </a:tc>
-                <a:extLst>
-                  <a:ext uri="{0D108BD9-81ED-4DB2-BD59-A6C34878D82A}">
-                    <a16:rowId xmlns:a16="http://schemas.microsoft.com/office/drawing/2014/main" val="10003"/>
-                  </a:ext>
-                </a:extLst>
-              </a:tr>
-              <a:tr h="647300">
-                <a:tc>
-                  <a:txBody>
-                    <a:bodyPr/>
-                    <a:lstStyle/>
-                    <a:p>
-                      <a:pPr marL="0" marR="0" lvl="0" indent="0" algn="l" rtl="0">
-                        <a:lnSpc>
-                          <a:spcPct val="90000"/>
-                        </a:lnSpc>
-                        <a:spcBef>
-                          <a:spcPts val="0"/>
-                        </a:spcBef>
-                        <a:spcAft>
-                          <a:spcPts val="0"/>
-                        </a:spcAft>
-                        <a:buClr>
-                          <a:schemeClr val="dk1"/>
-                        </a:buClr>
-                        <a:buSzPts val="1400"/>
-                        <a:buFont typeface="Tahoma"/>
-                        <a:buNone/>
-                      </a:pPr>
-                      <a:r>
-                        <a:rPr lang="en-US" sz="1400" b="0" i="0" u="none" strike="noStrike" cap="none">
-                          <a:solidFill>
-                            <a:schemeClr val="dk1"/>
-                          </a:solidFill>
-                          <a:latin typeface="Tahoma"/>
-                          <a:ea typeface="Tahoma"/>
-                          <a:cs typeface="Tahoma"/>
-                          <a:sym typeface="Tahoma"/>
-                        </a:rPr>
-                        <a:t>log-linear</a:t>
-                      </a:r>
-                      <a:endParaRPr/>
-                    </a:p>
-                  </a:txBody>
-                  <a:tcPr marL="91450" marR="91450" marT="39675" marB="39675">
-                    <a:lnL w="12700" cap="flat" cmpd="sng">
-                      <a:solidFill>
-                        <a:srgbClr val="000000"/>
-                      </a:solidFill>
-                      <a:prstDash val="solid"/>
-                      <a:round/>
-                      <a:headEnd type="none" w="sm" len="sm"/>
-                      <a:tailEnd type="none" w="sm" len="sm"/>
-                    </a:lnL>
-                    <a:lnR w="12700" cap="flat" cmpd="sng">
-                      <a:solidFill>
-                        <a:srgbClr val="000000"/>
-                      </a:solidFill>
-                      <a:prstDash val="solid"/>
-                      <a:round/>
-                      <a:headEnd type="none" w="sm" len="sm"/>
-                      <a:tailEnd type="none" w="sm" len="sm"/>
-                    </a:lnR>
-                    <a:lnT w="12700" cap="flat" cmpd="sng">
-                      <a:solidFill>
-                        <a:srgbClr val="000000"/>
-                      </a:solidFill>
-                      <a:prstDash val="solid"/>
-                      <a:round/>
-                      <a:headEnd type="none" w="sm" len="sm"/>
-                      <a:tailEnd type="none" w="sm" len="sm"/>
-                    </a:lnT>
-                    <a:lnB w="12700" cap="flat" cmpd="sng">
-                      <a:solidFill>
-                        <a:srgbClr val="000000"/>
-                      </a:solidFill>
-                      <a:prstDash val="solid"/>
-                      <a:round/>
-                      <a:headEnd type="none" w="sm" len="sm"/>
-                      <a:tailEnd type="none" w="sm" len="sm"/>
-                    </a:lnB>
-                  </a:tcPr>
-                </a:tc>
-                <a:tc>
-                  <a:txBody>
-                    <a:bodyPr/>
-                    <a:lstStyle/>
-                    <a:p>
-                      <a:pPr marL="0" marR="0" lvl="0" indent="0" algn="l" rtl="0">
-                        <a:lnSpc>
-                          <a:spcPct val="90000"/>
-                        </a:lnSpc>
-                        <a:spcBef>
-                          <a:spcPts val="0"/>
-                        </a:spcBef>
-                        <a:spcAft>
-                          <a:spcPts val="0"/>
-                        </a:spcAft>
-                        <a:buClr>
-                          <a:schemeClr val="dk1"/>
-                        </a:buClr>
-                        <a:buSzPts val="1400"/>
-                        <a:buFont typeface="Tahoma"/>
-                        <a:buNone/>
-                      </a:pPr>
-                      <a:r>
-                        <a:rPr lang="en-US" sz="1400" b="0" i="0" u="none" strike="noStrike" cap="none" dirty="0">
-                          <a:solidFill>
-                            <a:schemeClr val="dk1"/>
-                          </a:solidFill>
-                          <a:latin typeface="Tahoma"/>
-                          <a:ea typeface="Tahoma"/>
-                          <a:cs typeface="Tahoma"/>
-                          <a:sym typeface="Tahoma"/>
-                        </a:rPr>
-                        <a:t>O(n log</a:t>
-                      </a:r>
-                      <a:r>
-                        <a:rPr lang="en-US" sz="1400" b="0" i="0" u="none" strike="noStrike" cap="none" baseline="-25000" dirty="0">
-                          <a:solidFill>
-                            <a:schemeClr val="dk1"/>
-                          </a:solidFill>
-                          <a:latin typeface="Tahoma"/>
-                          <a:ea typeface="Tahoma"/>
-                          <a:cs typeface="Tahoma"/>
-                          <a:sym typeface="Tahoma"/>
-                        </a:rPr>
-                        <a:t>2</a:t>
-                      </a:r>
-                      <a:r>
-                        <a:rPr lang="en-US" sz="1400" b="0" i="0" u="none" strike="noStrike" cap="none" dirty="0">
-                          <a:solidFill>
-                            <a:schemeClr val="dk1"/>
-                          </a:solidFill>
-                          <a:latin typeface="Tahoma"/>
-                          <a:ea typeface="Tahoma"/>
-                          <a:cs typeface="Tahoma"/>
-                          <a:sym typeface="Tahoma"/>
-                        </a:rPr>
-                        <a:t> n)</a:t>
-                      </a:r>
-                      <a:endParaRPr dirty="0"/>
-                    </a:p>
-                  </a:txBody>
-                  <a:tcPr marL="91450" marR="91450" marT="39675" marB="39675">
-                    <a:lnL w="12700" cap="flat" cmpd="sng">
-                      <a:solidFill>
-                        <a:srgbClr val="000000"/>
-                      </a:solidFill>
-                      <a:prstDash val="solid"/>
-                      <a:round/>
-                      <a:headEnd type="none" w="sm" len="sm"/>
-                      <a:tailEnd type="none" w="sm" len="sm"/>
-                    </a:lnL>
-                    <a:lnR w="12700" cap="flat" cmpd="sng">
-                      <a:solidFill>
-                        <a:srgbClr val="000000"/>
-                      </a:solidFill>
-                      <a:prstDash val="solid"/>
-                      <a:round/>
-                      <a:headEnd type="none" w="sm" len="sm"/>
-                      <a:tailEnd type="none" w="sm" len="sm"/>
-                    </a:lnR>
-                    <a:lnT w="12700" cap="flat" cmpd="sng">
-                      <a:solidFill>
-                        <a:srgbClr val="000000"/>
-                      </a:solidFill>
-                      <a:prstDash val="solid"/>
-                      <a:round/>
-                      <a:headEnd type="none" w="sm" len="sm"/>
-                      <a:tailEnd type="none" w="sm" len="sm"/>
-                    </a:lnT>
-                    <a:lnB w="12700" cap="flat" cmpd="sng">
-                      <a:solidFill>
-                        <a:srgbClr val="000000"/>
-                      </a:solidFill>
-                      <a:prstDash val="solid"/>
-                      <a:round/>
-                      <a:headEnd type="none" w="sm" len="sm"/>
-                      <a:tailEnd type="none" w="sm" len="sm"/>
-                    </a:lnB>
-                  </a:tcPr>
-                </a:tc>
-                <a:tc>
-                  <a:txBody>
-                    <a:bodyPr/>
-                    <a:lstStyle/>
-                    <a:p>
-                      <a:pPr marL="0" marR="0" lvl="0" indent="0" algn="l" rtl="0">
-                        <a:lnSpc>
-                          <a:spcPct val="90000"/>
-                        </a:lnSpc>
-                        <a:spcBef>
-                          <a:spcPts val="0"/>
-                        </a:spcBef>
-                        <a:spcAft>
-                          <a:spcPts val="0"/>
-                        </a:spcAft>
-                        <a:buClr>
-                          <a:schemeClr val="dk1"/>
-                        </a:buClr>
-                        <a:buSzPts val="1400"/>
-                        <a:buFont typeface="Tahoma"/>
-                        <a:buNone/>
-                      </a:pPr>
-                      <a:r>
-                        <a:rPr lang="en-US" sz="1400" b="0" i="0" u="none" strike="noStrike" cap="none" dirty="0">
-                          <a:solidFill>
-                            <a:schemeClr val="dk1"/>
-                          </a:solidFill>
-                          <a:latin typeface="Tahoma"/>
-                          <a:ea typeface="Tahoma"/>
-                          <a:cs typeface="Tahoma"/>
-                          <a:sym typeface="Tahoma"/>
-                        </a:rPr>
-                        <a:t>slightly more than doubles</a:t>
-                      </a:r>
-                      <a:endParaRPr dirty="0"/>
-                    </a:p>
-                  </a:txBody>
-                  <a:tcPr marL="91450" marR="91450" marT="39675" marB="39675">
-                    <a:lnL w="12700" cap="flat" cmpd="sng">
-                      <a:solidFill>
-                        <a:srgbClr val="000000"/>
-                      </a:solidFill>
-                      <a:prstDash val="solid"/>
-                      <a:round/>
-                      <a:headEnd type="none" w="sm" len="sm"/>
-                      <a:tailEnd type="none" w="sm" len="sm"/>
-                    </a:lnL>
-                    <a:lnR w="12700" cap="flat" cmpd="sng">
-                      <a:solidFill>
-                        <a:srgbClr val="000000"/>
-                      </a:solidFill>
-                      <a:prstDash val="solid"/>
-                      <a:round/>
-                      <a:headEnd type="none" w="sm" len="sm"/>
-                      <a:tailEnd type="none" w="sm" len="sm"/>
-                    </a:lnR>
-                    <a:lnT w="12700" cap="flat" cmpd="sng">
-                      <a:solidFill>
-                        <a:srgbClr val="000000"/>
-                      </a:solidFill>
-                      <a:prstDash val="solid"/>
-                      <a:round/>
-                      <a:headEnd type="none" w="sm" len="sm"/>
-                      <a:tailEnd type="none" w="sm" len="sm"/>
-                    </a:lnT>
-                    <a:lnB w="12700" cap="flat" cmpd="sng">
-                      <a:solidFill>
-                        <a:srgbClr val="000000"/>
-                      </a:solidFill>
-                      <a:prstDash val="solid"/>
-                      <a:round/>
-                      <a:headEnd type="none" w="sm" len="sm"/>
-                      <a:tailEnd type="none" w="sm" len="sm"/>
-                    </a:lnB>
-                  </a:tcPr>
-                </a:tc>
-                <a:tc>
-                  <a:txBody>
-                    <a:bodyPr/>
-                    <a:lstStyle/>
-                    <a:p>
-                      <a:pPr marL="0" marR="0" lvl="0" indent="0" algn="l" rtl="0">
-                        <a:lnSpc>
-                          <a:spcPct val="90000"/>
-                        </a:lnSpc>
-                        <a:spcBef>
-                          <a:spcPts val="0"/>
-                        </a:spcBef>
-                        <a:spcAft>
-                          <a:spcPts val="0"/>
-                        </a:spcAft>
-                        <a:buClr>
-                          <a:schemeClr val="dk1"/>
-                        </a:buClr>
-                        <a:buSzPts val="1400"/>
-                        <a:buFont typeface="Tahoma"/>
-                        <a:buNone/>
-                      </a:pPr>
-                      <a:r>
-                        <a:rPr lang="en-US" sz="1400" b="0" i="0" u="none" strike="noStrike" cap="none">
-                          <a:solidFill>
-                            <a:schemeClr val="dk1"/>
-                          </a:solidFill>
-                          <a:latin typeface="Tahoma"/>
-                          <a:ea typeface="Tahoma"/>
-                          <a:cs typeface="Tahoma"/>
-                          <a:sym typeface="Tahoma"/>
-                        </a:rPr>
-                        <a:t>Merge sort algorithm</a:t>
-                      </a:r>
-                      <a:endParaRPr/>
-                    </a:p>
-                  </a:txBody>
-                  <a:tcPr marL="91450" marR="91450" marT="39675" marB="39675">
-                    <a:lnL w="12700" cap="flat" cmpd="sng">
-                      <a:solidFill>
-                        <a:srgbClr val="000000"/>
-                      </a:solidFill>
-                      <a:prstDash val="solid"/>
-                      <a:round/>
-                      <a:headEnd type="none" w="sm" len="sm"/>
-                      <a:tailEnd type="none" w="sm" len="sm"/>
-                    </a:lnL>
-                    <a:lnR w="12700" cap="flat" cmpd="sng">
-                      <a:solidFill>
-                        <a:srgbClr val="000000"/>
-                      </a:solidFill>
-                      <a:prstDash val="solid"/>
-                      <a:round/>
-                      <a:headEnd type="none" w="sm" len="sm"/>
-                      <a:tailEnd type="none" w="sm" len="sm"/>
-                    </a:lnR>
-                    <a:lnT w="12700" cap="flat" cmpd="sng">
-                      <a:solidFill>
-                        <a:srgbClr val="000000"/>
-                      </a:solidFill>
-                      <a:prstDash val="solid"/>
-                      <a:round/>
-                      <a:headEnd type="none" w="sm" len="sm"/>
-                      <a:tailEnd type="none" w="sm" len="sm"/>
-                    </a:lnT>
-                    <a:lnB w="12700" cap="flat" cmpd="sng">
-                      <a:solidFill>
-                        <a:srgbClr val="000000"/>
-                      </a:solidFill>
-                      <a:prstDash val="solid"/>
-                      <a:round/>
-                      <a:headEnd type="none" w="sm" len="sm"/>
-                      <a:tailEnd type="none" w="sm" len="sm"/>
-                    </a:lnB>
-                  </a:tcPr>
-                </a:tc>
-                <a:extLst>
-                  <a:ext uri="{0D108BD9-81ED-4DB2-BD59-A6C34878D82A}">
-                    <a16:rowId xmlns:a16="http://schemas.microsoft.com/office/drawing/2014/main" val="10004"/>
-                  </a:ext>
-                </a:extLst>
-              </a:tr>
-              <a:tr h="399750">
-                <a:tc>
-                  <a:txBody>
-                    <a:bodyPr/>
-                    <a:lstStyle/>
-                    <a:p>
-                      <a:pPr marL="0" marR="0" lvl="0" indent="0" algn="l" rtl="0">
-                        <a:lnSpc>
-                          <a:spcPct val="90000"/>
-                        </a:lnSpc>
-                        <a:spcBef>
-                          <a:spcPts val="0"/>
-                        </a:spcBef>
-                        <a:spcAft>
-                          <a:spcPts val="0"/>
-                        </a:spcAft>
-                        <a:buClr>
-                          <a:schemeClr val="dk1"/>
-                        </a:buClr>
-                        <a:buSzPts val="1400"/>
-                        <a:buFont typeface="Tahoma"/>
-                        <a:buNone/>
-                      </a:pPr>
-                      <a:r>
-                        <a:rPr lang="en-US" sz="1400" b="0" i="0" u="none" strike="noStrike" cap="none">
-                          <a:solidFill>
-                            <a:schemeClr val="dk1"/>
-                          </a:solidFill>
-                          <a:latin typeface="Tahoma"/>
-                          <a:ea typeface="Tahoma"/>
-                          <a:cs typeface="Tahoma"/>
-                          <a:sym typeface="Tahoma"/>
-                        </a:rPr>
-                        <a:t>quadratic</a:t>
-                      </a:r>
-                      <a:endParaRPr/>
-                    </a:p>
-                  </a:txBody>
-                  <a:tcPr marL="91450" marR="91450" marT="39675" marB="39675">
-                    <a:lnL w="12700" cap="flat" cmpd="sng">
-                      <a:solidFill>
-                        <a:srgbClr val="000000"/>
-                      </a:solidFill>
-                      <a:prstDash val="solid"/>
-                      <a:round/>
-                      <a:headEnd type="none" w="sm" len="sm"/>
-                      <a:tailEnd type="none" w="sm" len="sm"/>
-                    </a:lnL>
-                    <a:lnR w="12700" cap="flat" cmpd="sng">
-                      <a:solidFill>
-                        <a:srgbClr val="000000"/>
-                      </a:solidFill>
-                      <a:prstDash val="solid"/>
-                      <a:round/>
-                      <a:headEnd type="none" w="sm" len="sm"/>
-                      <a:tailEnd type="none" w="sm" len="sm"/>
-                    </a:lnR>
-                    <a:lnT w="12700" cap="flat" cmpd="sng">
-                      <a:solidFill>
-                        <a:srgbClr val="000000"/>
-                      </a:solidFill>
-                      <a:prstDash val="solid"/>
-                      <a:round/>
-                      <a:headEnd type="none" w="sm" len="sm"/>
-                      <a:tailEnd type="none" w="sm" len="sm"/>
-                    </a:lnT>
-                    <a:lnB w="12700" cap="flat" cmpd="sng">
-                      <a:solidFill>
-                        <a:srgbClr val="000000"/>
-                      </a:solidFill>
-                      <a:prstDash val="solid"/>
-                      <a:round/>
-                      <a:headEnd type="none" w="sm" len="sm"/>
-                      <a:tailEnd type="none" w="sm" len="sm"/>
-                    </a:lnB>
-                  </a:tcPr>
-                </a:tc>
-                <a:tc>
-                  <a:txBody>
-                    <a:bodyPr/>
-                    <a:lstStyle/>
-                    <a:p>
-                      <a:pPr marL="0" marR="0" lvl="0" indent="0" algn="l" rtl="0">
-                        <a:lnSpc>
-                          <a:spcPct val="90000"/>
-                        </a:lnSpc>
-                        <a:spcBef>
-                          <a:spcPts val="0"/>
-                        </a:spcBef>
-                        <a:spcAft>
-                          <a:spcPts val="0"/>
-                        </a:spcAft>
-                        <a:buClr>
-                          <a:schemeClr val="dk1"/>
-                        </a:buClr>
-                        <a:buSzPts val="1400"/>
-                        <a:buFont typeface="Tahoma"/>
-                        <a:buNone/>
-                      </a:pPr>
-                      <a:r>
-                        <a:rPr lang="en-US" sz="1400" b="0" i="0" u="none" strike="noStrike" cap="none" dirty="0">
-                          <a:solidFill>
-                            <a:schemeClr val="dk1"/>
-                          </a:solidFill>
-                          <a:latin typeface="Tahoma"/>
-                          <a:ea typeface="Tahoma"/>
-                          <a:cs typeface="Tahoma"/>
-                          <a:sym typeface="Tahoma"/>
-                        </a:rPr>
-                        <a:t>O(n</a:t>
-                      </a:r>
-                      <a:r>
-                        <a:rPr lang="en-US" sz="1400" b="0" i="0" u="none" strike="noStrike" cap="none" baseline="30000" dirty="0">
-                          <a:solidFill>
-                            <a:schemeClr val="dk1"/>
-                          </a:solidFill>
-                          <a:latin typeface="Tahoma"/>
-                          <a:ea typeface="Tahoma"/>
-                          <a:cs typeface="Tahoma"/>
-                          <a:sym typeface="Tahoma"/>
-                        </a:rPr>
-                        <a:t>2</a:t>
-                      </a:r>
-                      <a:r>
-                        <a:rPr lang="en-US" sz="1400" b="0" i="0" u="none" strike="noStrike" cap="none" dirty="0">
-                          <a:solidFill>
-                            <a:schemeClr val="dk1"/>
-                          </a:solidFill>
-                          <a:latin typeface="Tahoma"/>
-                          <a:ea typeface="Tahoma"/>
-                          <a:cs typeface="Tahoma"/>
-                          <a:sym typeface="Tahoma"/>
-                        </a:rPr>
-                        <a:t>)</a:t>
-                      </a:r>
-                      <a:endParaRPr dirty="0"/>
-                    </a:p>
-                  </a:txBody>
-                  <a:tcPr marL="91450" marR="91450" marT="39675" marB="39675">
-                    <a:lnL w="12700" cap="flat" cmpd="sng">
-                      <a:solidFill>
-                        <a:srgbClr val="000000"/>
-                      </a:solidFill>
-                      <a:prstDash val="solid"/>
-                      <a:round/>
-                      <a:headEnd type="none" w="sm" len="sm"/>
-                      <a:tailEnd type="none" w="sm" len="sm"/>
-                    </a:lnL>
-                    <a:lnR w="12700" cap="flat" cmpd="sng">
-                      <a:solidFill>
-                        <a:srgbClr val="000000"/>
-                      </a:solidFill>
-                      <a:prstDash val="solid"/>
-                      <a:round/>
-                      <a:headEnd type="none" w="sm" len="sm"/>
-                      <a:tailEnd type="none" w="sm" len="sm"/>
-                    </a:lnR>
-                    <a:lnT w="12700" cap="flat" cmpd="sng">
-                      <a:solidFill>
-                        <a:srgbClr val="000000"/>
-                      </a:solidFill>
-                      <a:prstDash val="solid"/>
-                      <a:round/>
-                      <a:headEnd type="none" w="sm" len="sm"/>
-                      <a:tailEnd type="none" w="sm" len="sm"/>
-                    </a:lnT>
-                    <a:lnB w="12700" cap="flat" cmpd="sng">
-                      <a:solidFill>
-                        <a:srgbClr val="000000"/>
-                      </a:solidFill>
-                      <a:prstDash val="solid"/>
-                      <a:round/>
-                      <a:headEnd type="none" w="sm" len="sm"/>
-                      <a:tailEnd type="none" w="sm" len="sm"/>
-                    </a:lnB>
-                  </a:tcPr>
-                </a:tc>
-                <a:tc>
-                  <a:txBody>
-                    <a:bodyPr/>
-                    <a:lstStyle/>
-                    <a:p>
-                      <a:pPr marL="0" marR="0" lvl="0" indent="0" algn="l" rtl="0">
-                        <a:lnSpc>
-                          <a:spcPct val="90000"/>
-                        </a:lnSpc>
-                        <a:spcBef>
-                          <a:spcPts val="0"/>
-                        </a:spcBef>
-                        <a:spcAft>
-                          <a:spcPts val="0"/>
-                        </a:spcAft>
-                        <a:buClr>
-                          <a:schemeClr val="dk1"/>
-                        </a:buClr>
-                        <a:buSzPts val="1400"/>
-                        <a:buFont typeface="Tahoma"/>
-                        <a:buNone/>
-                      </a:pPr>
-                      <a:r>
-                        <a:rPr lang="en-US" sz="1400" b="0" i="0" u="none" strike="noStrike" cap="none" dirty="0">
-                          <a:solidFill>
-                            <a:schemeClr val="dk1"/>
-                          </a:solidFill>
-                          <a:latin typeface="Tahoma"/>
-                          <a:ea typeface="Tahoma"/>
-                          <a:cs typeface="Tahoma"/>
-                          <a:sym typeface="Tahoma"/>
-                        </a:rPr>
-                        <a:t>quadruples</a:t>
-                      </a:r>
-                      <a:endParaRPr dirty="0"/>
-                    </a:p>
-                  </a:txBody>
-                  <a:tcPr marL="91450" marR="91450" marT="39675" marB="39675">
-                    <a:lnL w="12700" cap="flat" cmpd="sng">
-                      <a:solidFill>
-                        <a:srgbClr val="000000"/>
-                      </a:solidFill>
-                      <a:prstDash val="solid"/>
-                      <a:round/>
-                      <a:headEnd type="none" w="sm" len="sm"/>
-                      <a:tailEnd type="none" w="sm" len="sm"/>
-                    </a:lnL>
-                    <a:lnR w="12700" cap="flat" cmpd="sng">
-                      <a:solidFill>
-                        <a:srgbClr val="000000"/>
-                      </a:solidFill>
-                      <a:prstDash val="solid"/>
-                      <a:round/>
-                      <a:headEnd type="none" w="sm" len="sm"/>
-                      <a:tailEnd type="none" w="sm" len="sm"/>
-                    </a:lnR>
-                    <a:lnT w="12700" cap="flat" cmpd="sng">
-                      <a:solidFill>
-                        <a:srgbClr val="000000"/>
-                      </a:solidFill>
-                      <a:prstDash val="solid"/>
-                      <a:round/>
-                      <a:headEnd type="none" w="sm" len="sm"/>
-                      <a:tailEnd type="none" w="sm" len="sm"/>
-                    </a:lnT>
-                    <a:lnB w="12700" cap="flat" cmpd="sng">
-                      <a:solidFill>
-                        <a:srgbClr val="000000"/>
-                      </a:solidFill>
-                      <a:prstDash val="solid"/>
-                      <a:round/>
-                      <a:headEnd type="none" w="sm" len="sm"/>
-                      <a:tailEnd type="none" w="sm" len="sm"/>
-                    </a:lnB>
-                  </a:tcPr>
-                </a:tc>
-                <a:tc>
-                  <a:txBody>
-                    <a:bodyPr/>
-                    <a:lstStyle/>
-                    <a:p>
-                      <a:pPr marL="0" marR="0" lvl="0" indent="0" algn="l" rtl="0">
-                        <a:lnSpc>
-                          <a:spcPct val="90000"/>
-                        </a:lnSpc>
-                        <a:spcBef>
-                          <a:spcPts val="0"/>
-                        </a:spcBef>
-                        <a:spcAft>
-                          <a:spcPts val="0"/>
-                        </a:spcAft>
-                        <a:buClr>
-                          <a:schemeClr val="dk1"/>
-                        </a:buClr>
-                        <a:buSzPts val="1400"/>
-                        <a:buFont typeface="Tahoma"/>
-                        <a:buNone/>
-                      </a:pPr>
-                      <a:r>
-                        <a:rPr lang="en-US" sz="1400" b="0" i="0" u="none" strike="noStrike" cap="none">
-                          <a:solidFill>
-                            <a:schemeClr val="dk1"/>
-                          </a:solidFill>
-                          <a:latin typeface="Tahoma"/>
-                          <a:ea typeface="Tahoma"/>
-                          <a:cs typeface="Tahoma"/>
-                          <a:sym typeface="Tahoma"/>
-                        </a:rPr>
-                        <a:t>Nested loops!</a:t>
-                      </a:r>
-                      <a:endParaRPr/>
-                    </a:p>
-                  </a:txBody>
-                  <a:tcPr marL="91450" marR="91450" marT="39675" marB="39675">
-                    <a:lnL w="12700" cap="flat" cmpd="sng">
-                      <a:solidFill>
-                        <a:srgbClr val="000000"/>
-                      </a:solidFill>
-                      <a:prstDash val="solid"/>
-                      <a:round/>
-                      <a:headEnd type="none" w="sm" len="sm"/>
-                      <a:tailEnd type="none" w="sm" len="sm"/>
-                    </a:lnL>
-                    <a:lnR w="12700" cap="flat" cmpd="sng">
-                      <a:solidFill>
-                        <a:srgbClr val="000000"/>
-                      </a:solidFill>
-                      <a:prstDash val="solid"/>
-                      <a:round/>
-                      <a:headEnd type="none" w="sm" len="sm"/>
-                      <a:tailEnd type="none" w="sm" len="sm"/>
-                    </a:lnR>
-                    <a:lnT w="12700" cap="flat" cmpd="sng">
-                      <a:solidFill>
-                        <a:srgbClr val="000000"/>
-                      </a:solidFill>
-                      <a:prstDash val="solid"/>
-                      <a:round/>
-                      <a:headEnd type="none" w="sm" len="sm"/>
-                      <a:tailEnd type="none" w="sm" len="sm"/>
-                    </a:lnT>
-                    <a:lnB w="12700" cap="flat" cmpd="sng">
-                      <a:solidFill>
-                        <a:srgbClr val="000000"/>
-                      </a:solidFill>
-                      <a:prstDash val="solid"/>
-                      <a:round/>
-                      <a:headEnd type="none" w="sm" len="sm"/>
-                      <a:tailEnd type="none" w="sm" len="sm"/>
-                    </a:lnB>
-                  </a:tcPr>
-                </a:tc>
-                <a:extLst>
-                  <a:ext uri="{0D108BD9-81ED-4DB2-BD59-A6C34878D82A}">
-                    <a16:rowId xmlns:a16="http://schemas.microsoft.com/office/drawing/2014/main" val="10005"/>
-                  </a:ext>
-                </a:extLst>
-              </a:tr>
-              <a:tr h="399750">
-                <a:tc>
-                  <a:txBody>
-                    <a:bodyPr/>
-                    <a:lstStyle/>
-                    <a:p>
-                      <a:pPr marL="0" marR="0" lvl="0" indent="0" algn="l" rtl="0">
-                        <a:lnSpc>
-                          <a:spcPct val="90000"/>
-                        </a:lnSpc>
-                        <a:spcBef>
-                          <a:spcPts val="0"/>
-                        </a:spcBef>
-                        <a:spcAft>
-                          <a:spcPts val="0"/>
-                        </a:spcAft>
-                        <a:buClr>
-                          <a:schemeClr val="dk1"/>
-                        </a:buClr>
-                        <a:buSzPts val="1400"/>
-                        <a:buFont typeface="Tahoma"/>
-                        <a:buNone/>
-                      </a:pPr>
-                      <a:r>
-                        <a:rPr lang="en-US" sz="1400" b="0" i="0" u="none" strike="noStrike" cap="none">
-                          <a:solidFill>
-                            <a:schemeClr val="dk1"/>
-                          </a:solidFill>
-                          <a:latin typeface="Tahoma"/>
-                          <a:ea typeface="Tahoma"/>
-                          <a:cs typeface="Tahoma"/>
-                          <a:sym typeface="Tahoma"/>
-                        </a:rPr>
-                        <a:t>...</a:t>
-                      </a:r>
-                      <a:endParaRPr/>
-                    </a:p>
-                  </a:txBody>
-                  <a:tcPr marL="91450" marR="91450" marT="39675" marB="39675">
-                    <a:lnL w="12700" cap="flat" cmpd="sng">
-                      <a:solidFill>
-                        <a:srgbClr val="000000"/>
-                      </a:solidFill>
-                      <a:prstDash val="solid"/>
-                      <a:round/>
-                      <a:headEnd type="none" w="sm" len="sm"/>
-                      <a:tailEnd type="none" w="sm" len="sm"/>
-                    </a:lnL>
-                    <a:lnR w="12700" cap="flat" cmpd="sng">
-                      <a:solidFill>
-                        <a:srgbClr val="000000"/>
-                      </a:solidFill>
-                      <a:prstDash val="solid"/>
-                      <a:round/>
-                      <a:headEnd type="none" w="sm" len="sm"/>
-                      <a:tailEnd type="none" w="sm" len="sm"/>
-                    </a:lnR>
-                    <a:lnT w="12700" cap="flat" cmpd="sng">
-                      <a:solidFill>
-                        <a:srgbClr val="000000"/>
-                      </a:solidFill>
-                      <a:prstDash val="solid"/>
-                      <a:round/>
-                      <a:headEnd type="none" w="sm" len="sm"/>
-                      <a:tailEnd type="none" w="sm" len="sm"/>
-                    </a:lnT>
-                    <a:lnB w="12700" cap="flat" cmpd="sng">
-                      <a:solidFill>
-                        <a:srgbClr val="000000"/>
-                      </a:solidFill>
-                      <a:prstDash val="solid"/>
-                      <a:round/>
-                      <a:headEnd type="none" w="sm" len="sm"/>
-                      <a:tailEnd type="none" w="sm" len="sm"/>
-                    </a:lnB>
-                  </a:tcPr>
-                </a:tc>
-                <a:tc>
-                  <a:txBody>
-                    <a:bodyPr/>
-                    <a:lstStyle/>
-                    <a:p>
-                      <a:pPr marL="0" marR="0" lvl="0" indent="0" algn="l" rtl="0">
-                        <a:lnSpc>
-                          <a:spcPct val="90000"/>
-                        </a:lnSpc>
-                        <a:spcBef>
-                          <a:spcPts val="0"/>
-                        </a:spcBef>
-                        <a:spcAft>
-                          <a:spcPts val="0"/>
-                        </a:spcAft>
-                        <a:buClr>
-                          <a:schemeClr val="dk1"/>
-                        </a:buClr>
-                        <a:buSzPts val="1400"/>
-                        <a:buFont typeface="Tahoma"/>
-                        <a:buNone/>
-                      </a:pPr>
-                      <a:r>
-                        <a:rPr lang="en-US" sz="1400" b="0" i="0" u="none" strike="noStrike" cap="none" dirty="0">
-                          <a:solidFill>
-                            <a:schemeClr val="dk1"/>
-                          </a:solidFill>
-                          <a:latin typeface="Tahoma"/>
-                          <a:ea typeface="Tahoma"/>
-                          <a:cs typeface="Tahoma"/>
-                          <a:sym typeface="Tahoma"/>
-                        </a:rPr>
-                        <a:t>...</a:t>
-                      </a:r>
-                      <a:endParaRPr dirty="0"/>
-                    </a:p>
-                  </a:txBody>
-                  <a:tcPr marL="91450" marR="91450" marT="39675" marB="39675">
-                    <a:lnL w="12700" cap="flat" cmpd="sng">
-                      <a:solidFill>
-                        <a:srgbClr val="000000"/>
-                      </a:solidFill>
-                      <a:prstDash val="solid"/>
-                      <a:round/>
-                      <a:headEnd type="none" w="sm" len="sm"/>
-                      <a:tailEnd type="none" w="sm" len="sm"/>
-                    </a:lnL>
-                    <a:lnR w="12700" cap="flat" cmpd="sng">
-                      <a:solidFill>
-                        <a:srgbClr val="000000"/>
-                      </a:solidFill>
-                      <a:prstDash val="solid"/>
-                      <a:round/>
-                      <a:headEnd type="none" w="sm" len="sm"/>
-                      <a:tailEnd type="none" w="sm" len="sm"/>
-                    </a:lnR>
-                    <a:lnT w="12700" cap="flat" cmpd="sng">
-                      <a:solidFill>
-                        <a:srgbClr val="000000"/>
-                      </a:solidFill>
-                      <a:prstDash val="solid"/>
-                      <a:round/>
-                      <a:headEnd type="none" w="sm" len="sm"/>
-                      <a:tailEnd type="none" w="sm" len="sm"/>
-                    </a:lnT>
-                    <a:lnB w="12700" cap="flat" cmpd="sng">
-                      <a:solidFill>
-                        <a:srgbClr val="000000"/>
-                      </a:solidFill>
-                      <a:prstDash val="solid"/>
-                      <a:round/>
-                      <a:headEnd type="none" w="sm" len="sm"/>
-                      <a:tailEnd type="none" w="sm" len="sm"/>
-                    </a:lnB>
-                  </a:tcPr>
-                </a:tc>
-                <a:tc>
-                  <a:txBody>
-                    <a:bodyPr/>
-                    <a:lstStyle/>
-                    <a:p>
-                      <a:pPr marL="0" marR="0" lvl="0" indent="0" algn="l" rtl="0">
-                        <a:lnSpc>
-                          <a:spcPct val="90000"/>
-                        </a:lnSpc>
-                        <a:spcBef>
-                          <a:spcPts val="0"/>
-                        </a:spcBef>
-                        <a:spcAft>
-                          <a:spcPts val="0"/>
-                        </a:spcAft>
-                        <a:buClr>
-                          <a:schemeClr val="dk1"/>
-                        </a:buClr>
-                        <a:buSzPts val="1400"/>
-                        <a:buFont typeface="Tahoma"/>
-                        <a:buNone/>
-                      </a:pPr>
-                      <a:r>
-                        <a:rPr lang="en-US" sz="1400" b="0" i="0" u="none" strike="noStrike" cap="none">
-                          <a:solidFill>
-                            <a:schemeClr val="dk1"/>
-                          </a:solidFill>
-                          <a:latin typeface="Tahoma"/>
-                          <a:ea typeface="Tahoma"/>
-                          <a:cs typeface="Tahoma"/>
-                          <a:sym typeface="Tahoma"/>
-                        </a:rPr>
-                        <a:t>...</a:t>
-                      </a:r>
-                      <a:endParaRPr/>
-                    </a:p>
-                  </a:txBody>
-                  <a:tcPr marL="91450" marR="91450" marT="39675" marB="39675">
-                    <a:lnL w="12700" cap="flat" cmpd="sng">
-                      <a:solidFill>
-                        <a:srgbClr val="000000"/>
-                      </a:solidFill>
-                      <a:prstDash val="solid"/>
-                      <a:round/>
-                      <a:headEnd type="none" w="sm" len="sm"/>
-                      <a:tailEnd type="none" w="sm" len="sm"/>
-                    </a:lnL>
-                    <a:lnR w="12700" cap="flat" cmpd="sng">
-                      <a:solidFill>
-                        <a:srgbClr val="000000"/>
-                      </a:solidFill>
-                      <a:prstDash val="solid"/>
-                      <a:round/>
-                      <a:headEnd type="none" w="sm" len="sm"/>
-                      <a:tailEnd type="none" w="sm" len="sm"/>
-                    </a:lnR>
-                    <a:lnT w="12700" cap="flat" cmpd="sng">
-                      <a:solidFill>
-                        <a:srgbClr val="000000"/>
-                      </a:solidFill>
-                      <a:prstDash val="solid"/>
-                      <a:round/>
-                      <a:headEnd type="none" w="sm" len="sm"/>
-                      <a:tailEnd type="none" w="sm" len="sm"/>
-                    </a:lnT>
-                    <a:lnB w="12700" cap="flat" cmpd="sng">
-                      <a:solidFill>
-                        <a:srgbClr val="000000"/>
-                      </a:solidFill>
-                      <a:prstDash val="solid"/>
-                      <a:round/>
-                      <a:headEnd type="none" w="sm" len="sm"/>
-                      <a:tailEnd type="none" w="sm" len="sm"/>
-                    </a:lnB>
-                  </a:tcPr>
-                </a:tc>
-                <a:tc>
-                  <a:txBody>
-                    <a:bodyPr/>
-                    <a:lstStyle/>
-                    <a:p>
-                      <a:pPr marL="0" marR="0" lvl="0" indent="0" algn="l" rtl="0">
-                        <a:lnSpc>
-                          <a:spcPct val="90000"/>
-                        </a:lnSpc>
-                        <a:spcBef>
-                          <a:spcPts val="0"/>
-                        </a:spcBef>
-                        <a:spcAft>
-                          <a:spcPts val="0"/>
-                        </a:spcAft>
-                        <a:buClr>
-                          <a:schemeClr val="dk1"/>
-                        </a:buClr>
-                        <a:buSzPts val="1400"/>
-                        <a:buFont typeface="Tahoma"/>
-                        <a:buNone/>
-                      </a:pPr>
-                      <a:r>
-                        <a:rPr lang="en-US" sz="1400" b="0" i="0" u="none" strike="noStrike" cap="none">
-                          <a:solidFill>
-                            <a:schemeClr val="dk1"/>
-                          </a:solidFill>
-                          <a:latin typeface="Tahoma"/>
-                          <a:ea typeface="Tahoma"/>
-                          <a:cs typeface="Tahoma"/>
-                          <a:sym typeface="Tahoma"/>
-                        </a:rPr>
-                        <a:t>...</a:t>
-                      </a:r>
-                      <a:endParaRPr/>
-                    </a:p>
-                  </a:txBody>
-                  <a:tcPr marL="91450" marR="91450" marT="39675" marB="39675">
-                    <a:lnL w="12700" cap="flat" cmpd="sng">
-                      <a:solidFill>
-                        <a:srgbClr val="000000"/>
-                      </a:solidFill>
-                      <a:prstDash val="solid"/>
-                      <a:round/>
-                      <a:headEnd type="none" w="sm" len="sm"/>
-                      <a:tailEnd type="none" w="sm" len="sm"/>
-                    </a:lnL>
-                    <a:lnR w="12700" cap="flat" cmpd="sng">
-                      <a:solidFill>
-                        <a:srgbClr val="000000"/>
-                      </a:solidFill>
-                      <a:prstDash val="solid"/>
-                      <a:round/>
-                      <a:headEnd type="none" w="sm" len="sm"/>
-                      <a:tailEnd type="none" w="sm" len="sm"/>
-                    </a:lnR>
-                    <a:lnT w="12700" cap="flat" cmpd="sng">
-                      <a:solidFill>
-                        <a:srgbClr val="000000"/>
-                      </a:solidFill>
-                      <a:prstDash val="solid"/>
-                      <a:round/>
-                      <a:headEnd type="none" w="sm" len="sm"/>
-                      <a:tailEnd type="none" w="sm" len="sm"/>
-                    </a:lnT>
-                    <a:lnB w="12700" cap="flat" cmpd="sng">
-                      <a:solidFill>
-                        <a:srgbClr val="000000"/>
-                      </a:solidFill>
-                      <a:prstDash val="solid"/>
-                      <a:round/>
-                      <a:headEnd type="none" w="sm" len="sm"/>
-                      <a:tailEnd type="none" w="sm" len="sm"/>
-                    </a:lnB>
-                  </a:tcPr>
-                </a:tc>
-                <a:extLst>
-                  <a:ext uri="{0D108BD9-81ED-4DB2-BD59-A6C34878D82A}">
-                    <a16:rowId xmlns:a16="http://schemas.microsoft.com/office/drawing/2014/main" val="10006"/>
-                  </a:ext>
-                </a:extLst>
-              </a:tr>
-              <a:tr h="406000">
-                <a:tc>
-                  <a:txBody>
-                    <a:bodyPr/>
-                    <a:lstStyle/>
-                    <a:p>
-                      <a:pPr marL="0" marR="0" lvl="0" indent="0" algn="l" rtl="0">
-                        <a:lnSpc>
-                          <a:spcPct val="90000"/>
-                        </a:lnSpc>
-                        <a:spcBef>
-                          <a:spcPts val="0"/>
-                        </a:spcBef>
-                        <a:spcAft>
-                          <a:spcPts val="0"/>
-                        </a:spcAft>
-                        <a:buClr>
-                          <a:schemeClr val="dk1"/>
-                        </a:buClr>
-                        <a:buSzPts val="1400"/>
-                        <a:buFont typeface="Tahoma"/>
-                        <a:buNone/>
-                      </a:pPr>
-                      <a:r>
-                        <a:rPr lang="en-US" sz="1400" b="0" i="0" u="none" strike="noStrike" cap="none">
-                          <a:solidFill>
-                            <a:schemeClr val="dk1"/>
-                          </a:solidFill>
-                          <a:latin typeface="Tahoma"/>
-                          <a:ea typeface="Tahoma"/>
-                          <a:cs typeface="Tahoma"/>
-                          <a:sym typeface="Tahoma"/>
-                        </a:rPr>
-                        <a:t>exponential</a:t>
-                      </a:r>
-                      <a:endParaRPr/>
-                    </a:p>
-                  </a:txBody>
-                  <a:tcPr marL="91450" marR="91450" marT="39675" marB="39675">
-                    <a:lnL w="12700" cap="flat" cmpd="sng">
-                      <a:solidFill>
-                        <a:srgbClr val="000000"/>
-                      </a:solidFill>
-                      <a:prstDash val="solid"/>
-                      <a:round/>
-                      <a:headEnd type="none" w="sm" len="sm"/>
-                      <a:tailEnd type="none" w="sm" len="sm"/>
-                    </a:lnL>
-                    <a:lnR w="12700" cap="flat" cmpd="sng">
-                      <a:solidFill>
-                        <a:srgbClr val="000000"/>
-                      </a:solidFill>
-                      <a:prstDash val="solid"/>
-                      <a:round/>
-                      <a:headEnd type="none" w="sm" len="sm"/>
-                      <a:tailEnd type="none" w="sm" len="sm"/>
-                    </a:lnR>
-                    <a:lnT w="12700" cap="flat" cmpd="sng">
-                      <a:solidFill>
-                        <a:srgbClr val="000000"/>
-                      </a:solidFill>
-                      <a:prstDash val="solid"/>
-                      <a:round/>
-                      <a:headEnd type="none" w="sm" len="sm"/>
-                      <a:tailEnd type="none" w="sm" len="sm"/>
-                    </a:lnT>
-                    <a:lnB w="12700" cap="flat" cmpd="sng">
-                      <a:solidFill>
-                        <a:srgbClr val="000000"/>
-                      </a:solidFill>
-                      <a:prstDash val="solid"/>
-                      <a:round/>
-                      <a:headEnd type="none" w="sm" len="sm"/>
-                      <a:tailEnd type="none" w="sm" len="sm"/>
-                    </a:lnB>
-                  </a:tcPr>
-                </a:tc>
-                <a:tc>
-                  <a:txBody>
-                    <a:bodyPr/>
-                    <a:lstStyle/>
-                    <a:p>
-                      <a:pPr marL="0" marR="0" lvl="0" indent="0" algn="l" rtl="0">
-                        <a:lnSpc>
-                          <a:spcPct val="90000"/>
-                        </a:lnSpc>
-                        <a:spcBef>
-                          <a:spcPts val="0"/>
-                        </a:spcBef>
-                        <a:spcAft>
-                          <a:spcPts val="0"/>
-                        </a:spcAft>
-                        <a:buClr>
-                          <a:schemeClr val="dk1"/>
-                        </a:buClr>
-                        <a:buSzPts val="1400"/>
-                        <a:buFont typeface="Tahoma"/>
-                        <a:buNone/>
-                      </a:pPr>
-                      <a:r>
-                        <a:rPr lang="en-US" sz="1400" b="0" i="0" u="none" strike="noStrike" cap="none" dirty="0">
-                          <a:solidFill>
-                            <a:schemeClr val="dk1"/>
-                          </a:solidFill>
-                          <a:latin typeface="Tahoma"/>
-                          <a:ea typeface="Tahoma"/>
-                          <a:cs typeface="Tahoma"/>
-                          <a:sym typeface="Tahoma"/>
-                        </a:rPr>
-                        <a:t>O(2</a:t>
-                      </a:r>
-                      <a:r>
-                        <a:rPr lang="en-US" sz="1400" b="0" i="0" u="none" strike="noStrike" cap="none" baseline="30000" dirty="0">
-                          <a:solidFill>
-                            <a:schemeClr val="dk1"/>
-                          </a:solidFill>
-                          <a:latin typeface="Tahoma"/>
-                          <a:ea typeface="Tahoma"/>
-                          <a:cs typeface="Tahoma"/>
-                          <a:sym typeface="Tahoma"/>
-                        </a:rPr>
-                        <a:t>n</a:t>
-                      </a:r>
-                      <a:r>
-                        <a:rPr lang="en-US" sz="1400" b="0" i="0" u="none" strike="noStrike" cap="none" dirty="0">
-                          <a:solidFill>
-                            <a:schemeClr val="dk1"/>
-                          </a:solidFill>
-                          <a:latin typeface="Tahoma"/>
-                          <a:ea typeface="Tahoma"/>
-                          <a:cs typeface="Tahoma"/>
-                          <a:sym typeface="Tahoma"/>
-                        </a:rPr>
-                        <a:t>)</a:t>
-                      </a:r>
-                      <a:endParaRPr dirty="0"/>
-                    </a:p>
-                  </a:txBody>
-                  <a:tcPr marL="91450" marR="91450" marT="39675" marB="39675">
-                    <a:lnL w="12700" cap="flat" cmpd="sng">
-                      <a:solidFill>
-                        <a:srgbClr val="000000"/>
-                      </a:solidFill>
-                      <a:prstDash val="solid"/>
-                      <a:round/>
-                      <a:headEnd type="none" w="sm" len="sm"/>
-                      <a:tailEnd type="none" w="sm" len="sm"/>
-                    </a:lnL>
-                    <a:lnR w="12700" cap="flat" cmpd="sng">
-                      <a:solidFill>
-                        <a:srgbClr val="000000"/>
-                      </a:solidFill>
-                      <a:prstDash val="solid"/>
-                      <a:round/>
-                      <a:headEnd type="none" w="sm" len="sm"/>
-                      <a:tailEnd type="none" w="sm" len="sm"/>
-                    </a:lnR>
-                    <a:lnT w="12700" cap="flat" cmpd="sng">
-                      <a:solidFill>
-                        <a:srgbClr val="000000"/>
-                      </a:solidFill>
-                      <a:prstDash val="solid"/>
-                      <a:round/>
-                      <a:headEnd type="none" w="sm" len="sm"/>
-                      <a:tailEnd type="none" w="sm" len="sm"/>
-                    </a:lnT>
-                    <a:lnB w="12700" cap="flat" cmpd="sng">
-                      <a:solidFill>
-                        <a:srgbClr val="000000"/>
-                      </a:solidFill>
-                      <a:prstDash val="solid"/>
-                      <a:round/>
-                      <a:headEnd type="none" w="sm" len="sm"/>
-                      <a:tailEnd type="none" w="sm" len="sm"/>
-                    </a:lnB>
-                  </a:tcPr>
-                </a:tc>
-                <a:tc>
-                  <a:txBody>
-                    <a:bodyPr/>
-                    <a:lstStyle/>
-                    <a:p>
-                      <a:pPr marL="0" marR="0" lvl="0" indent="0" algn="l" rtl="0">
-                        <a:lnSpc>
-                          <a:spcPct val="90000"/>
-                        </a:lnSpc>
-                        <a:spcBef>
-                          <a:spcPts val="0"/>
-                        </a:spcBef>
-                        <a:spcAft>
-                          <a:spcPts val="0"/>
-                        </a:spcAft>
-                        <a:buClr>
-                          <a:schemeClr val="dk1"/>
-                        </a:buClr>
-                        <a:buSzPts val="1400"/>
-                        <a:buFont typeface="Tahoma"/>
-                        <a:buNone/>
-                      </a:pPr>
-                      <a:r>
-                        <a:rPr lang="en-US" sz="1400" b="0" i="0" u="none" strike="noStrike" cap="none">
-                          <a:solidFill>
-                            <a:schemeClr val="dk1"/>
-                          </a:solidFill>
-                          <a:latin typeface="Tahoma"/>
-                          <a:ea typeface="Tahoma"/>
-                          <a:cs typeface="Tahoma"/>
-                          <a:sym typeface="Tahoma"/>
-                        </a:rPr>
-                        <a:t>multiplies drastically</a:t>
-                      </a:r>
-                      <a:endParaRPr/>
-                    </a:p>
-                  </a:txBody>
-                  <a:tcPr marL="91450" marR="91450" marT="39675" marB="39675">
-                    <a:lnL w="12700" cap="flat" cmpd="sng">
-                      <a:solidFill>
-                        <a:srgbClr val="000000"/>
-                      </a:solidFill>
-                      <a:prstDash val="solid"/>
-                      <a:round/>
-                      <a:headEnd type="none" w="sm" len="sm"/>
-                      <a:tailEnd type="none" w="sm" len="sm"/>
-                    </a:lnL>
-                    <a:lnR w="12700" cap="flat" cmpd="sng">
-                      <a:solidFill>
-                        <a:srgbClr val="000000"/>
-                      </a:solidFill>
-                      <a:prstDash val="solid"/>
-                      <a:round/>
-                      <a:headEnd type="none" w="sm" len="sm"/>
-                      <a:tailEnd type="none" w="sm" len="sm"/>
-                    </a:lnR>
-                    <a:lnT w="12700" cap="flat" cmpd="sng">
-                      <a:solidFill>
-                        <a:srgbClr val="000000"/>
-                      </a:solidFill>
-                      <a:prstDash val="solid"/>
-                      <a:round/>
-                      <a:headEnd type="none" w="sm" len="sm"/>
-                      <a:tailEnd type="none" w="sm" len="sm"/>
-                    </a:lnT>
-                    <a:lnB w="12700" cap="flat" cmpd="sng">
-                      <a:solidFill>
-                        <a:srgbClr val="000000"/>
-                      </a:solidFill>
-                      <a:prstDash val="solid"/>
-                      <a:round/>
-                      <a:headEnd type="none" w="sm" len="sm"/>
-                      <a:tailEnd type="none" w="sm" len="sm"/>
-                    </a:lnB>
-                  </a:tcPr>
-                </a:tc>
-                <a:tc>
-                  <a:txBody>
-                    <a:bodyPr/>
-                    <a:lstStyle/>
-                    <a:p>
-                      <a:pPr marL="0" marR="0" lvl="0" indent="0" algn="l" rtl="0">
-                        <a:lnSpc>
-                          <a:spcPct val="90000"/>
-                        </a:lnSpc>
-                        <a:spcBef>
-                          <a:spcPts val="0"/>
-                        </a:spcBef>
-                        <a:spcAft>
-                          <a:spcPts val="0"/>
-                        </a:spcAft>
-                        <a:buClr>
-                          <a:schemeClr val="dk1"/>
-                        </a:buClr>
-                        <a:buSzPts val="1400"/>
-                        <a:buFont typeface="Tahoma"/>
-                        <a:buNone/>
-                      </a:pPr>
-                      <a:r>
-                        <a:rPr lang="en-US" sz="1400" b="0" i="0" u="none" strike="noStrike" cap="none" dirty="0">
-                          <a:solidFill>
-                            <a:schemeClr val="dk1"/>
-                          </a:solidFill>
-                          <a:latin typeface="Tahoma"/>
-                          <a:ea typeface="Tahoma"/>
-                          <a:cs typeface="Tahoma"/>
-                          <a:sym typeface="Tahoma"/>
-                        </a:rPr>
-                        <a:t>Fibonacci with recursion</a:t>
-                      </a:r>
-                      <a:endParaRPr dirty="0"/>
-                    </a:p>
-                  </a:txBody>
-                  <a:tcPr marL="91450" marR="91450" marT="39675" marB="39675">
-                    <a:lnL w="12700" cap="flat" cmpd="sng">
-                      <a:solidFill>
-                        <a:srgbClr val="000000"/>
-                      </a:solidFill>
-                      <a:prstDash val="solid"/>
-                      <a:round/>
-                      <a:headEnd type="none" w="sm" len="sm"/>
-                      <a:tailEnd type="none" w="sm" len="sm"/>
-                    </a:lnL>
-                    <a:lnR w="12700" cap="flat" cmpd="sng">
-                      <a:solidFill>
-                        <a:srgbClr val="000000"/>
-                      </a:solidFill>
-                      <a:prstDash val="solid"/>
-                      <a:round/>
-                      <a:headEnd type="none" w="sm" len="sm"/>
-                      <a:tailEnd type="none" w="sm" len="sm"/>
-                    </a:lnR>
-                    <a:lnT w="12700" cap="flat" cmpd="sng">
-                      <a:solidFill>
-                        <a:srgbClr val="000000"/>
-                      </a:solidFill>
-                      <a:prstDash val="solid"/>
-                      <a:round/>
-                      <a:headEnd type="none" w="sm" len="sm"/>
-                      <a:tailEnd type="none" w="sm" len="sm"/>
-                    </a:lnT>
-                    <a:lnB w="12700" cap="flat" cmpd="sng">
-                      <a:solidFill>
-                        <a:srgbClr val="000000"/>
-                      </a:solidFill>
-                      <a:prstDash val="solid"/>
-                      <a:round/>
-                      <a:headEnd type="none" w="sm" len="sm"/>
-                      <a:tailEnd type="none" w="sm" len="sm"/>
-                    </a:lnB>
-                  </a:tcPr>
-                </a:tc>
-                <a:extLst>
-                  <a:ext uri="{0D108BD9-81ED-4DB2-BD59-A6C34878D82A}">
-                    <a16:rowId xmlns:a16="http://schemas.microsoft.com/office/drawing/2014/main" val="10007"/>
-                  </a:ext>
-                </a:extLst>
-              </a:tr>
-            </a:tbl>
-          </a:graphicData>
-        </a:graphic>
-      </p:graphicFrame>
-      <p:pic>
-        <p:nvPicPr>
-          <p:cNvPr id="763" name="Google Shape;763;g118b4eb0048_0_551" descr="A screenshot of a cell phone &#10; &#10;Description automatically generated"/>
-          <p:cNvPicPr preferRelativeResize="0"/>
-          <p:nvPr/>
-        </p:nvPicPr>
-        <p:blipFill rotWithShape="1">
-          <a:blip r:embed="rId3">
-            <a:alphaModFix/>
-          </a:blip>
-          <a:srcRect l="2998" r="1216"/>
-          <a:stretch/>
-        </p:blipFill>
-        <p:spPr>
-          <a:xfrm>
-            <a:off x="6757172" y="2490907"/>
-            <a:ext cx="5257027" cy="3392535"/>
-          </a:xfrm>
-          <a:prstGeom prst="rect">
-            <a:avLst/>
-          </a:prstGeom>
-          <a:noFill/>
-          <a:ln>
-            <a:noFill/>
-          </a:ln>
-        </p:spPr>
-      </p:pic>
-      <p:sp>
-        <p:nvSpPr>
-          <p:cNvPr id="11" name="Google Shape;257;p13">
-            <a:extLst>
-              <a:ext uri="{FF2B5EF4-FFF2-40B4-BE49-F238E27FC236}">
-                <a16:creationId xmlns:a16="http://schemas.microsoft.com/office/drawing/2014/main" id="{CE1432C9-CB2C-40A1-8170-B8B800E599CD}"/>
-              </a:ext>
-            </a:extLst>
-          </p:cNvPr>
-          <p:cNvSpPr txBox="1">
-            <a:spLocks/>
-          </p:cNvSpPr>
-          <p:nvPr/>
-        </p:nvSpPr>
-        <p:spPr>
-          <a:xfrm>
-            <a:off x="7499928" y="6407294"/>
-            <a:ext cx="2193636" cy="219798"/>
-          </a:xfrm>
-          <a:prstGeom prst="rect">
-            <a:avLst/>
-          </a:prstGeom>
-          <a:noFill/>
-          <a:ln>
-            <a:noFill/>
-          </a:ln>
-        </p:spPr>
-        <p:txBody>
-          <a:bodyPr spcFirstLastPara="1" wrap="square" lIns="91425" tIns="45700" rIns="91425" bIns="45700" anchor="ctr" anchorCtr="0">
-            <a:noAutofit/>
-          </a:bodyPr>
-          <a:lstStyle>
-            <a:defPPr>
-              <a:defRPr lang="de-DE"/>
-            </a:defPPr>
-            <a:lvl1pPr algn="l" defTabSz="457200" rtl="0" fontAlgn="base">
-              <a:spcBef>
-                <a:spcPct val="0"/>
-              </a:spcBef>
-              <a:spcAft>
-                <a:spcPct val="0"/>
-              </a:spcAft>
-              <a:defRPr kern="1200">
-                <a:solidFill>
-                  <a:schemeClr val="tx1"/>
-                </a:solidFill>
-                <a:latin typeface="Arial" pitchFamily="34" charset="0"/>
-                <a:ea typeface="+mn-ea"/>
-                <a:cs typeface="Arial" pitchFamily="34" charset="0"/>
-              </a:defRPr>
-            </a:lvl1pPr>
-            <a:lvl2pPr marL="457200" algn="l" defTabSz="457200" rtl="0" fontAlgn="base">
-              <a:spcBef>
-                <a:spcPct val="0"/>
-              </a:spcBef>
-              <a:spcAft>
-                <a:spcPct val="0"/>
-              </a:spcAft>
-              <a:defRPr kern="1200">
-                <a:solidFill>
-                  <a:schemeClr val="tx1"/>
-                </a:solidFill>
-                <a:latin typeface="Arial" pitchFamily="34" charset="0"/>
-                <a:ea typeface="+mn-ea"/>
-                <a:cs typeface="Arial" pitchFamily="34" charset="0"/>
-              </a:defRPr>
-            </a:lvl2pPr>
-            <a:lvl3pPr marL="914400" algn="l" defTabSz="457200" rtl="0" fontAlgn="base">
-              <a:spcBef>
-                <a:spcPct val="0"/>
-              </a:spcBef>
-              <a:spcAft>
-                <a:spcPct val="0"/>
-              </a:spcAft>
-              <a:defRPr kern="1200">
-                <a:solidFill>
-                  <a:schemeClr val="tx1"/>
-                </a:solidFill>
-                <a:latin typeface="Arial" pitchFamily="34" charset="0"/>
-                <a:ea typeface="+mn-ea"/>
-                <a:cs typeface="Arial" pitchFamily="34" charset="0"/>
-              </a:defRPr>
-            </a:lvl3pPr>
-            <a:lvl4pPr marL="1371600" algn="l" defTabSz="457200" rtl="0" fontAlgn="base">
-              <a:spcBef>
-                <a:spcPct val="0"/>
-              </a:spcBef>
-              <a:spcAft>
-                <a:spcPct val="0"/>
-              </a:spcAft>
-              <a:defRPr kern="1200">
-                <a:solidFill>
-                  <a:schemeClr val="tx1"/>
-                </a:solidFill>
-                <a:latin typeface="Arial" pitchFamily="34" charset="0"/>
-                <a:ea typeface="+mn-ea"/>
-                <a:cs typeface="Arial" pitchFamily="34" charset="0"/>
-              </a:defRPr>
-            </a:lvl4pPr>
-            <a:lvl5pPr marL="1828800" algn="l" defTabSz="457200" rtl="0" fontAlgn="base">
-              <a:spcBef>
-                <a:spcPct val="0"/>
-              </a:spcBef>
-              <a:spcAft>
-                <a:spcPct val="0"/>
-              </a:spcAft>
-              <a:defRPr kern="1200">
-                <a:solidFill>
-                  <a:schemeClr val="tx1"/>
-                </a:solidFill>
-                <a:latin typeface="Arial" pitchFamily="34" charset="0"/>
-                <a:ea typeface="+mn-ea"/>
-                <a:cs typeface="Arial" pitchFamily="34" charset="0"/>
-              </a:defRPr>
-            </a:lvl5pPr>
-            <a:lvl6pPr marL="2286000" algn="l" defTabSz="914400" rtl="0" eaLnBrk="1" latinLnBrk="0" hangingPunct="1">
-              <a:defRPr kern="1200">
-                <a:solidFill>
-                  <a:schemeClr val="tx1"/>
-                </a:solidFill>
-                <a:latin typeface="Arial" pitchFamily="34" charset="0"/>
-                <a:ea typeface="+mn-ea"/>
-                <a:cs typeface="Arial" pitchFamily="34" charset="0"/>
-              </a:defRPr>
-            </a:lvl6pPr>
-            <a:lvl7pPr marL="2743200" algn="l" defTabSz="914400" rtl="0" eaLnBrk="1" latinLnBrk="0" hangingPunct="1">
-              <a:defRPr kern="1200">
-                <a:solidFill>
-                  <a:schemeClr val="tx1"/>
-                </a:solidFill>
-                <a:latin typeface="Arial" pitchFamily="34" charset="0"/>
-                <a:ea typeface="+mn-ea"/>
-                <a:cs typeface="Arial" pitchFamily="34" charset="0"/>
-              </a:defRPr>
-            </a:lvl7pPr>
-            <a:lvl8pPr marL="3200400" algn="l" defTabSz="914400" rtl="0" eaLnBrk="1" latinLnBrk="0" hangingPunct="1">
-              <a:defRPr kern="1200">
-                <a:solidFill>
-                  <a:schemeClr val="tx1"/>
-                </a:solidFill>
-                <a:latin typeface="Arial" pitchFamily="34" charset="0"/>
-                <a:ea typeface="+mn-ea"/>
-                <a:cs typeface="Arial" pitchFamily="34" charset="0"/>
-              </a:defRPr>
-            </a:lvl8pPr>
-            <a:lvl9pPr marL="3657600" algn="l" defTabSz="914400" rtl="0" eaLnBrk="1" latinLnBrk="0" hangingPunct="1">
-              <a:defRPr kern="1200">
-                <a:solidFill>
-                  <a:schemeClr val="tx1"/>
-                </a:solidFill>
-                <a:latin typeface="Arial" pitchFamily="34" charset="0"/>
-                <a:ea typeface="+mn-ea"/>
-                <a:cs typeface="Arial" pitchFamily="34" charset="0"/>
-              </a:defRPr>
-            </a:lvl9pPr>
-          </a:lstStyle>
-          <a:p>
-            <a:pPr algn="r">
-              <a:spcBef>
-                <a:spcPts val="0"/>
-              </a:spcBef>
-              <a:spcAft>
-                <a:spcPts val="0"/>
-              </a:spcAft>
-            </a:pPr>
-            <a:r>
-              <a:rPr lang="fr-FR" sz="800" dirty="0">
-                <a:hlinkClick r:id="rId4"/>
-              </a:rPr>
-              <a:t>https://www.bigocheatsheet.com/</a:t>
-            </a:r>
-            <a:endParaRPr lang="fr-FR" sz="800" dirty="0"/>
-          </a:p>
-        </p:txBody>
-      </p:sp>
-      <p:sp>
-        <p:nvSpPr>
-          <p:cNvPr id="15" name="Google Shape;257;p13">
-            <a:extLst>
-              <a:ext uri="{FF2B5EF4-FFF2-40B4-BE49-F238E27FC236}">
-                <a16:creationId xmlns:a16="http://schemas.microsoft.com/office/drawing/2014/main" id="{23459359-D54E-428A-A915-A5906FE83C94}"/>
-              </a:ext>
-            </a:extLst>
-          </p:cNvPr>
-          <p:cNvSpPr txBox="1">
-            <a:spLocks/>
-          </p:cNvSpPr>
-          <p:nvPr/>
-        </p:nvSpPr>
-        <p:spPr>
-          <a:xfrm>
-            <a:off x="6881091" y="6150552"/>
-            <a:ext cx="2812473" cy="219798"/>
-          </a:xfrm>
-          <a:prstGeom prst="rect">
-            <a:avLst/>
-          </a:prstGeom>
-          <a:noFill/>
-          <a:ln>
-            <a:noFill/>
-          </a:ln>
-        </p:spPr>
-        <p:txBody>
-          <a:bodyPr spcFirstLastPara="1" wrap="square" lIns="91425" tIns="45700" rIns="91425" bIns="45700" anchor="ctr" anchorCtr="0">
-            <a:noAutofit/>
-          </a:bodyPr>
-          <a:lstStyle>
-            <a:defPPr>
-              <a:defRPr lang="de-DE"/>
-            </a:defPPr>
-            <a:lvl1pPr algn="l" defTabSz="457200" rtl="0" fontAlgn="base">
-              <a:spcBef>
-                <a:spcPct val="0"/>
-              </a:spcBef>
-              <a:spcAft>
-                <a:spcPct val="0"/>
-              </a:spcAft>
-              <a:defRPr kern="1200">
-                <a:solidFill>
-                  <a:schemeClr val="tx1"/>
-                </a:solidFill>
-                <a:latin typeface="Arial" pitchFamily="34" charset="0"/>
-                <a:ea typeface="+mn-ea"/>
-                <a:cs typeface="Arial" pitchFamily="34" charset="0"/>
-              </a:defRPr>
-            </a:lvl1pPr>
-            <a:lvl2pPr marL="457200" algn="l" defTabSz="457200" rtl="0" fontAlgn="base">
-              <a:spcBef>
-                <a:spcPct val="0"/>
-              </a:spcBef>
-              <a:spcAft>
-                <a:spcPct val="0"/>
-              </a:spcAft>
-              <a:defRPr kern="1200">
-                <a:solidFill>
-                  <a:schemeClr val="tx1"/>
-                </a:solidFill>
-                <a:latin typeface="Arial" pitchFamily="34" charset="0"/>
-                <a:ea typeface="+mn-ea"/>
-                <a:cs typeface="Arial" pitchFamily="34" charset="0"/>
-              </a:defRPr>
-            </a:lvl2pPr>
-            <a:lvl3pPr marL="914400" algn="l" defTabSz="457200" rtl="0" fontAlgn="base">
-              <a:spcBef>
-                <a:spcPct val="0"/>
-              </a:spcBef>
-              <a:spcAft>
-                <a:spcPct val="0"/>
-              </a:spcAft>
-              <a:defRPr kern="1200">
-                <a:solidFill>
-                  <a:schemeClr val="tx1"/>
-                </a:solidFill>
-                <a:latin typeface="Arial" pitchFamily="34" charset="0"/>
-                <a:ea typeface="+mn-ea"/>
-                <a:cs typeface="Arial" pitchFamily="34" charset="0"/>
-              </a:defRPr>
-            </a:lvl3pPr>
-            <a:lvl4pPr marL="1371600" algn="l" defTabSz="457200" rtl="0" fontAlgn="base">
-              <a:spcBef>
-                <a:spcPct val="0"/>
-              </a:spcBef>
-              <a:spcAft>
-                <a:spcPct val="0"/>
-              </a:spcAft>
-              <a:defRPr kern="1200">
-                <a:solidFill>
-                  <a:schemeClr val="tx1"/>
-                </a:solidFill>
-                <a:latin typeface="Arial" pitchFamily="34" charset="0"/>
-                <a:ea typeface="+mn-ea"/>
-                <a:cs typeface="Arial" pitchFamily="34" charset="0"/>
-              </a:defRPr>
-            </a:lvl4pPr>
-            <a:lvl5pPr marL="1828800" algn="l" defTabSz="457200" rtl="0" fontAlgn="base">
-              <a:spcBef>
-                <a:spcPct val="0"/>
-              </a:spcBef>
-              <a:spcAft>
-                <a:spcPct val="0"/>
-              </a:spcAft>
-              <a:defRPr kern="1200">
-                <a:solidFill>
-                  <a:schemeClr val="tx1"/>
-                </a:solidFill>
-                <a:latin typeface="Arial" pitchFamily="34" charset="0"/>
-                <a:ea typeface="+mn-ea"/>
-                <a:cs typeface="Arial" pitchFamily="34" charset="0"/>
-              </a:defRPr>
-            </a:lvl5pPr>
-            <a:lvl6pPr marL="2286000" algn="l" defTabSz="914400" rtl="0" eaLnBrk="1" latinLnBrk="0" hangingPunct="1">
-              <a:defRPr kern="1200">
-                <a:solidFill>
-                  <a:schemeClr val="tx1"/>
-                </a:solidFill>
-                <a:latin typeface="Arial" pitchFamily="34" charset="0"/>
-                <a:ea typeface="+mn-ea"/>
-                <a:cs typeface="Arial" pitchFamily="34" charset="0"/>
-              </a:defRPr>
-            </a:lvl6pPr>
-            <a:lvl7pPr marL="2743200" algn="l" defTabSz="914400" rtl="0" eaLnBrk="1" latinLnBrk="0" hangingPunct="1">
-              <a:defRPr kern="1200">
-                <a:solidFill>
-                  <a:schemeClr val="tx1"/>
-                </a:solidFill>
-                <a:latin typeface="Arial" pitchFamily="34" charset="0"/>
-                <a:ea typeface="+mn-ea"/>
-                <a:cs typeface="Arial" pitchFamily="34" charset="0"/>
-              </a:defRPr>
-            </a:lvl7pPr>
-            <a:lvl8pPr marL="3200400" algn="l" defTabSz="914400" rtl="0" eaLnBrk="1" latinLnBrk="0" hangingPunct="1">
-              <a:defRPr kern="1200">
-                <a:solidFill>
-                  <a:schemeClr val="tx1"/>
-                </a:solidFill>
-                <a:latin typeface="Arial" pitchFamily="34" charset="0"/>
-                <a:ea typeface="+mn-ea"/>
-                <a:cs typeface="Arial" pitchFamily="34" charset="0"/>
-              </a:defRPr>
-            </a:lvl8pPr>
-            <a:lvl9pPr marL="3657600" algn="l" defTabSz="914400" rtl="0" eaLnBrk="1" latinLnBrk="0" hangingPunct="1">
-              <a:defRPr kern="1200">
-                <a:solidFill>
-                  <a:schemeClr val="tx1"/>
-                </a:solidFill>
-                <a:latin typeface="Arial" pitchFamily="34" charset="0"/>
-                <a:ea typeface="+mn-ea"/>
-                <a:cs typeface="Arial" pitchFamily="34" charset="0"/>
-              </a:defRPr>
-            </a:lvl9pPr>
-          </a:lstStyle>
-          <a:p>
-            <a:pPr algn="r">
-              <a:spcBef>
-                <a:spcPts val="0"/>
-              </a:spcBef>
-              <a:spcAft>
-                <a:spcPts val="0"/>
-              </a:spcAft>
-            </a:pPr>
-            <a:r>
-              <a:rPr lang="fr-FR" sz="800" dirty="0"/>
-              <a:t>Quelle: Data Structures and </a:t>
-            </a:r>
-            <a:r>
-              <a:rPr lang="fr-FR" sz="800" dirty="0" err="1"/>
-              <a:t>Algorithms</a:t>
-            </a:r>
-            <a:r>
-              <a:rPr lang="fr-FR" sz="800" dirty="0"/>
-              <a:t> (CSE 373), University of Washington, Spring 2022</a:t>
-            </a:r>
-          </a:p>
-        </p:txBody>
-      </p:sp>
-    </p:spTree>
-  </p:cSld>
-  <p:clrMapOvr>
-    <a:masterClrMapping/>
-  </p:clrMapOvr>
-</p:sld>
-</file>
-
-<file path=ppt/slides/slide3.xml><?xml version="1.0" encoding="utf-8"?>
-<p:sld xmlns:a="http://schemas.openxmlformats.org/drawingml/2006/main" xmlns:r="http://schemas.openxmlformats.org/officeDocument/2006/relationships" xmlns:p="http://schemas.openxmlformats.org/presentationml/2006/main">
-  <p:cSld>
-    <p:spTree>
-      <p:nvGrpSpPr>
-        <p:cNvPr id="1" name="Shape 753"/>
-        <p:cNvGrpSpPr/>
-        <p:nvPr/>
-      </p:nvGrpSpPr>
-      <p:grpSpPr>
-        <a:xfrm>
-          <a:off x="0" y="0"/>
-          <a:ext cx="0" cy="0"/>
-          <a:chOff x="0" y="0"/>
-          <a:chExt cx="0" cy="0"/>
-        </a:xfrm>
-      </p:grpSpPr>
-      <p:sp>
-        <p:nvSpPr>
-          <p:cNvPr id="2" name="Inhaltsplatzhalter 1">
-            <a:extLst>
-              <a:ext uri="{FF2B5EF4-FFF2-40B4-BE49-F238E27FC236}">
-                <a16:creationId xmlns:a16="http://schemas.microsoft.com/office/drawing/2014/main" id="{E4E14EAE-F586-4704-B989-CB89828251C6}"/>
-              </a:ext>
-            </a:extLst>
-          </p:cNvPr>
-          <p:cNvSpPr>
-            <a:spLocks noGrp="1"/>
-          </p:cNvSpPr>
-          <p:nvPr>
-            <p:ph sz="quarter" idx="12"/>
-          </p:nvPr>
-        </p:nvSpPr>
-        <p:spPr/>
-        <p:txBody>
-          <a:bodyPr/>
-          <a:lstStyle/>
-          <a:p>
-            <a:pPr lvl="0">
-              <a:spcBef>
-                <a:spcPts val="0"/>
-              </a:spcBef>
-              <a:spcAft>
-                <a:spcPts val="0"/>
-              </a:spcAft>
-            </a:pPr>
-            <a:r>
-              <a:rPr lang="de-DE" noProof="0" dirty="0" err="1">
-                <a:solidFill>
-                  <a:schemeClr val="dk1"/>
-                </a:solidFill>
-                <a:latin typeface="Courier New" panose="02070309020205020404" pitchFamily="49" charset="0"/>
-                <a:ea typeface="Consolas"/>
-                <a:cs typeface="Courier New" panose="02070309020205020404" pitchFamily="49" charset="0"/>
-                <a:sym typeface="Consolas"/>
-              </a:rPr>
-              <a:t>public</a:t>
-            </a:r>
-            <a:r>
-              <a:rPr lang="de-DE" noProof="0" dirty="0">
-                <a:solidFill>
-                  <a:schemeClr val="dk1"/>
-                </a:solidFill>
-                <a:latin typeface="Courier New" panose="02070309020205020404" pitchFamily="49" charset="0"/>
-                <a:ea typeface="Consolas"/>
-                <a:cs typeface="Courier New" panose="02070309020205020404" pitchFamily="49" charset="0"/>
-                <a:sym typeface="Consolas"/>
-              </a:rPr>
-              <a:t> </a:t>
-            </a:r>
-            <a:r>
-              <a:rPr lang="de-DE" noProof="0" dirty="0" err="1">
-                <a:solidFill>
-                  <a:schemeClr val="dk1"/>
-                </a:solidFill>
-                <a:latin typeface="Courier New" panose="02070309020205020404" pitchFamily="49" charset="0"/>
-                <a:ea typeface="Consolas"/>
-                <a:cs typeface="Courier New" panose="02070309020205020404" pitchFamily="49" charset="0"/>
-                <a:sym typeface="Consolas"/>
-              </a:rPr>
-              <a:t>int</a:t>
-            </a:r>
-            <a:r>
-              <a:rPr lang="de-DE" noProof="0" dirty="0">
-                <a:solidFill>
-                  <a:schemeClr val="dk1"/>
-                </a:solidFill>
-                <a:latin typeface="Courier New" panose="02070309020205020404" pitchFamily="49" charset="0"/>
-                <a:ea typeface="Consolas"/>
-                <a:cs typeface="Courier New" panose="02070309020205020404" pitchFamily="49" charset="0"/>
-                <a:sym typeface="Consolas"/>
-              </a:rPr>
-              <a:t> method2(</a:t>
-            </a:r>
-            <a:r>
-              <a:rPr lang="de-DE" noProof="0" dirty="0" err="1">
-                <a:solidFill>
-                  <a:schemeClr val="dk1"/>
-                </a:solidFill>
-                <a:latin typeface="Courier New" panose="02070309020205020404" pitchFamily="49" charset="0"/>
-                <a:ea typeface="Consolas"/>
-                <a:cs typeface="Courier New" panose="02070309020205020404" pitchFamily="49" charset="0"/>
-                <a:sym typeface="Consolas"/>
-              </a:rPr>
-              <a:t>int</a:t>
-            </a:r>
-            <a:r>
-              <a:rPr lang="de-DE" noProof="0" dirty="0">
-                <a:solidFill>
-                  <a:schemeClr val="dk1"/>
-                </a:solidFill>
-                <a:latin typeface="Courier New" panose="02070309020205020404" pitchFamily="49" charset="0"/>
-                <a:ea typeface="Consolas"/>
-                <a:cs typeface="Courier New" panose="02070309020205020404" pitchFamily="49" charset="0"/>
-                <a:sym typeface="Consolas"/>
-              </a:rPr>
-              <a:t> n) {</a:t>
-            </a:r>
-            <a:endParaRPr lang="de-DE" noProof="0" dirty="0">
-              <a:latin typeface="Courier New" panose="02070309020205020404" pitchFamily="49" charset="0"/>
-              <a:cs typeface="Courier New" panose="02070309020205020404" pitchFamily="49" charset="0"/>
-            </a:endParaRPr>
-          </a:p>
-          <a:p>
-            <a:pPr lvl="0">
-              <a:spcBef>
-                <a:spcPts val="0"/>
-              </a:spcBef>
-              <a:spcAft>
-                <a:spcPts val="0"/>
-              </a:spcAft>
-            </a:pPr>
-            <a:r>
-              <a:rPr lang="de-DE" noProof="0" dirty="0">
-                <a:solidFill>
-                  <a:schemeClr val="dk1"/>
-                </a:solidFill>
-                <a:latin typeface="Courier New" panose="02070309020205020404" pitchFamily="49" charset="0"/>
-                <a:ea typeface="Consolas"/>
-                <a:cs typeface="Courier New" panose="02070309020205020404" pitchFamily="49" charset="0"/>
-                <a:sym typeface="Consolas"/>
-              </a:rPr>
-              <a:t>    </a:t>
-            </a:r>
-            <a:r>
-              <a:rPr lang="de-DE" noProof="0" dirty="0" err="1">
-                <a:solidFill>
-                  <a:schemeClr val="dk1"/>
-                </a:solidFill>
-                <a:latin typeface="Courier New" panose="02070309020205020404" pitchFamily="49" charset="0"/>
-                <a:ea typeface="Consolas"/>
-                <a:cs typeface="Courier New" panose="02070309020205020404" pitchFamily="49" charset="0"/>
-                <a:sym typeface="Consolas"/>
-              </a:rPr>
-              <a:t>int</a:t>
-            </a:r>
-            <a:r>
-              <a:rPr lang="de-DE" noProof="0" dirty="0">
-                <a:solidFill>
-                  <a:schemeClr val="dk1"/>
-                </a:solidFill>
-                <a:latin typeface="Courier New" panose="02070309020205020404" pitchFamily="49" charset="0"/>
-                <a:ea typeface="Consolas"/>
-                <a:cs typeface="Courier New" panose="02070309020205020404" pitchFamily="49" charset="0"/>
-                <a:sym typeface="Consolas"/>
-              </a:rPr>
-              <a:t> </a:t>
-            </a:r>
-            <a:r>
-              <a:rPr lang="de-DE" noProof="0" dirty="0" err="1">
-                <a:solidFill>
-                  <a:schemeClr val="dk1"/>
-                </a:solidFill>
-                <a:latin typeface="Courier New" panose="02070309020205020404" pitchFamily="49" charset="0"/>
-                <a:ea typeface="Consolas"/>
-                <a:cs typeface="Courier New" panose="02070309020205020404" pitchFamily="49" charset="0"/>
-                <a:sym typeface="Consolas"/>
-              </a:rPr>
-              <a:t>sum</a:t>
-            </a:r>
-            <a:r>
-              <a:rPr lang="de-DE" noProof="0" dirty="0">
-                <a:solidFill>
-                  <a:schemeClr val="dk1"/>
-                </a:solidFill>
-                <a:latin typeface="Courier New" panose="02070309020205020404" pitchFamily="49" charset="0"/>
-                <a:ea typeface="Consolas"/>
-                <a:cs typeface="Courier New" panose="02070309020205020404" pitchFamily="49" charset="0"/>
-                <a:sym typeface="Consolas"/>
-              </a:rPr>
-              <a:t> = 0;</a:t>
-            </a:r>
-            <a:endParaRPr lang="de-DE" noProof="0" dirty="0">
-              <a:latin typeface="Courier New" panose="02070309020205020404" pitchFamily="49" charset="0"/>
-              <a:cs typeface="Courier New" panose="02070309020205020404" pitchFamily="49" charset="0"/>
-            </a:endParaRPr>
-          </a:p>
-          <a:p>
-            <a:pPr lvl="0">
-              <a:spcBef>
-                <a:spcPts val="0"/>
-              </a:spcBef>
-              <a:spcAft>
-                <a:spcPts val="0"/>
-              </a:spcAft>
-            </a:pPr>
-            <a:r>
-              <a:rPr lang="de-DE" noProof="0" dirty="0">
-                <a:solidFill>
-                  <a:schemeClr val="dk1"/>
-                </a:solidFill>
-                <a:latin typeface="Courier New" panose="02070309020205020404" pitchFamily="49" charset="0"/>
-                <a:ea typeface="Consolas"/>
-                <a:cs typeface="Courier New" panose="02070309020205020404" pitchFamily="49" charset="0"/>
-                <a:sym typeface="Consolas"/>
-              </a:rPr>
-              <a:t>    </a:t>
-            </a:r>
-            <a:r>
-              <a:rPr lang="de-DE" noProof="0" dirty="0" err="1">
-                <a:solidFill>
-                  <a:schemeClr val="dk1"/>
-                </a:solidFill>
-                <a:latin typeface="Courier New" panose="02070309020205020404" pitchFamily="49" charset="0"/>
-                <a:ea typeface="Consolas"/>
-                <a:cs typeface="Courier New" panose="02070309020205020404" pitchFamily="49" charset="0"/>
-                <a:sym typeface="Consolas"/>
-              </a:rPr>
-              <a:t>int</a:t>
-            </a:r>
-            <a:r>
-              <a:rPr lang="de-DE" noProof="0" dirty="0">
-                <a:solidFill>
-                  <a:schemeClr val="dk1"/>
-                </a:solidFill>
-                <a:latin typeface="Courier New" panose="02070309020205020404" pitchFamily="49" charset="0"/>
-                <a:ea typeface="Consolas"/>
-                <a:cs typeface="Courier New" panose="02070309020205020404" pitchFamily="49" charset="0"/>
-                <a:sym typeface="Consolas"/>
-              </a:rPr>
-              <a:t> i = 0;</a:t>
-            </a:r>
-            <a:endParaRPr lang="de-DE" noProof="0" dirty="0">
-              <a:latin typeface="Courier New" panose="02070309020205020404" pitchFamily="49" charset="0"/>
-              <a:cs typeface="Courier New" panose="02070309020205020404" pitchFamily="49" charset="0"/>
-            </a:endParaRPr>
-          </a:p>
-          <a:p>
-            <a:pPr lvl="0">
-              <a:spcBef>
-                <a:spcPts val="0"/>
-              </a:spcBef>
-              <a:spcAft>
-                <a:spcPts val="0"/>
-              </a:spcAft>
-            </a:pPr>
-            <a:r>
-              <a:rPr lang="de-DE" noProof="0" dirty="0">
-                <a:solidFill>
-                  <a:schemeClr val="dk1"/>
-                </a:solidFill>
-                <a:latin typeface="Courier New" panose="02070309020205020404" pitchFamily="49" charset="0"/>
-                <a:ea typeface="Consolas"/>
-                <a:cs typeface="Courier New" panose="02070309020205020404" pitchFamily="49" charset="0"/>
-                <a:sym typeface="Consolas"/>
-              </a:rPr>
-              <a:t>    </a:t>
-            </a:r>
-            <a:r>
-              <a:rPr lang="de-DE" noProof="0" dirty="0" err="1">
-                <a:solidFill>
-                  <a:schemeClr val="dk1"/>
-                </a:solidFill>
-                <a:latin typeface="Courier New" panose="02070309020205020404" pitchFamily="49" charset="0"/>
-                <a:ea typeface="Consolas"/>
-                <a:cs typeface="Courier New" panose="02070309020205020404" pitchFamily="49" charset="0"/>
-                <a:sym typeface="Consolas"/>
-              </a:rPr>
-              <a:t>while</a:t>
-            </a:r>
-            <a:r>
-              <a:rPr lang="de-DE" noProof="0" dirty="0">
-                <a:solidFill>
-                  <a:schemeClr val="dk1"/>
-                </a:solidFill>
-                <a:latin typeface="Courier New" panose="02070309020205020404" pitchFamily="49" charset="0"/>
-                <a:ea typeface="Consolas"/>
-                <a:cs typeface="Courier New" panose="02070309020205020404" pitchFamily="49" charset="0"/>
-                <a:sym typeface="Consolas"/>
-              </a:rPr>
-              <a:t> (i &lt; n) {</a:t>
-            </a:r>
-            <a:endParaRPr lang="de-DE" noProof="0" dirty="0">
-              <a:latin typeface="Courier New" panose="02070309020205020404" pitchFamily="49" charset="0"/>
-              <a:cs typeface="Courier New" panose="02070309020205020404" pitchFamily="49" charset="0"/>
-            </a:endParaRPr>
-          </a:p>
-          <a:p>
-            <a:pPr lvl="0">
-              <a:spcBef>
-                <a:spcPts val="0"/>
-              </a:spcBef>
-              <a:spcAft>
-                <a:spcPts val="0"/>
-              </a:spcAft>
-            </a:pPr>
-            <a:r>
-              <a:rPr lang="de-DE" noProof="0" dirty="0">
-                <a:solidFill>
-                  <a:schemeClr val="dk1"/>
-                </a:solidFill>
-                <a:latin typeface="Courier New" panose="02070309020205020404" pitchFamily="49" charset="0"/>
-                <a:ea typeface="Consolas"/>
-                <a:cs typeface="Courier New" panose="02070309020205020404" pitchFamily="49" charset="0"/>
-                <a:sym typeface="Consolas"/>
-              </a:rPr>
-              <a:t>        </a:t>
-            </a:r>
-            <a:r>
-              <a:rPr lang="de-DE" noProof="0" dirty="0" err="1">
-                <a:solidFill>
-                  <a:schemeClr val="dk1"/>
-                </a:solidFill>
-                <a:latin typeface="Courier New" panose="02070309020205020404" pitchFamily="49" charset="0"/>
-                <a:ea typeface="Consolas"/>
-                <a:cs typeface="Courier New" panose="02070309020205020404" pitchFamily="49" charset="0"/>
-                <a:sym typeface="Consolas"/>
-              </a:rPr>
-              <a:t>int</a:t>
-            </a:r>
-            <a:r>
-              <a:rPr lang="de-DE" noProof="0" dirty="0">
-                <a:solidFill>
-                  <a:schemeClr val="dk1"/>
-                </a:solidFill>
-                <a:latin typeface="Courier New" panose="02070309020205020404" pitchFamily="49" charset="0"/>
-                <a:ea typeface="Consolas"/>
-                <a:cs typeface="Courier New" panose="02070309020205020404" pitchFamily="49" charset="0"/>
-                <a:sym typeface="Consolas"/>
-              </a:rPr>
-              <a:t> j = 0;    </a:t>
-            </a:r>
-            <a:endParaRPr lang="de-DE" noProof="0" dirty="0">
-              <a:latin typeface="Courier New" panose="02070309020205020404" pitchFamily="49" charset="0"/>
-              <a:cs typeface="Courier New" panose="02070309020205020404" pitchFamily="49" charset="0"/>
-            </a:endParaRPr>
-          </a:p>
-          <a:p>
-            <a:pPr lvl="0">
-              <a:spcBef>
-                <a:spcPts val="0"/>
-              </a:spcBef>
-              <a:spcAft>
-                <a:spcPts val="0"/>
-              </a:spcAft>
-            </a:pPr>
-            <a:r>
-              <a:rPr lang="de-DE" noProof="0" dirty="0">
-                <a:solidFill>
-                  <a:schemeClr val="dk1"/>
-                </a:solidFill>
-                <a:latin typeface="Courier New" panose="02070309020205020404" pitchFamily="49" charset="0"/>
-                <a:ea typeface="Consolas"/>
-                <a:cs typeface="Courier New" panose="02070309020205020404" pitchFamily="49" charset="0"/>
-                <a:sym typeface="Consolas"/>
-              </a:rPr>
-              <a:t>        </a:t>
-            </a:r>
-            <a:r>
-              <a:rPr lang="de-DE" noProof="0" dirty="0" err="1">
-                <a:solidFill>
-                  <a:schemeClr val="dk1"/>
-                </a:solidFill>
-                <a:latin typeface="Courier New" panose="02070309020205020404" pitchFamily="49" charset="0"/>
-                <a:ea typeface="Consolas"/>
-                <a:cs typeface="Courier New" panose="02070309020205020404" pitchFamily="49" charset="0"/>
-                <a:sym typeface="Consolas"/>
-              </a:rPr>
-              <a:t>while</a:t>
-            </a:r>
-            <a:r>
-              <a:rPr lang="de-DE" noProof="0" dirty="0">
-                <a:solidFill>
-                  <a:schemeClr val="dk1"/>
-                </a:solidFill>
-                <a:latin typeface="Courier New" panose="02070309020205020404" pitchFamily="49" charset="0"/>
-                <a:ea typeface="Consolas"/>
-                <a:cs typeface="Courier New" panose="02070309020205020404" pitchFamily="49" charset="0"/>
-                <a:sym typeface="Consolas"/>
-              </a:rPr>
-              <a:t> (j &lt; n) {</a:t>
-            </a:r>
-            <a:endParaRPr lang="de-DE" noProof="0" dirty="0">
-              <a:latin typeface="Courier New" panose="02070309020205020404" pitchFamily="49" charset="0"/>
-              <a:cs typeface="Courier New" panose="02070309020205020404" pitchFamily="49" charset="0"/>
-            </a:endParaRPr>
-          </a:p>
-          <a:p>
-            <a:pPr lvl="0">
-              <a:spcBef>
-                <a:spcPts val="0"/>
-              </a:spcBef>
-              <a:spcAft>
-                <a:spcPts val="0"/>
-              </a:spcAft>
-            </a:pPr>
-            <a:r>
-              <a:rPr lang="de-DE" noProof="0" dirty="0">
-                <a:solidFill>
-                  <a:schemeClr val="dk1"/>
-                </a:solidFill>
-                <a:latin typeface="Courier New" panose="02070309020205020404" pitchFamily="49" charset="0"/>
-                <a:ea typeface="Consolas"/>
-                <a:cs typeface="Courier New" panose="02070309020205020404" pitchFamily="49" charset="0"/>
-                <a:sym typeface="Consolas"/>
-              </a:rPr>
-              <a:t>            </a:t>
-            </a:r>
-            <a:r>
-              <a:rPr lang="de-DE" noProof="0" dirty="0" err="1">
-                <a:solidFill>
-                  <a:schemeClr val="dk1"/>
-                </a:solidFill>
-                <a:latin typeface="Courier New" panose="02070309020205020404" pitchFamily="49" charset="0"/>
-                <a:ea typeface="Consolas"/>
-                <a:cs typeface="Courier New" panose="02070309020205020404" pitchFamily="49" charset="0"/>
-                <a:sym typeface="Consolas"/>
-              </a:rPr>
-              <a:t>if</a:t>
-            </a:r>
-            <a:r>
-              <a:rPr lang="de-DE" noProof="0" dirty="0">
-                <a:solidFill>
-                  <a:schemeClr val="dk1"/>
-                </a:solidFill>
-                <a:latin typeface="Courier New" panose="02070309020205020404" pitchFamily="49" charset="0"/>
-                <a:ea typeface="Consolas"/>
-                <a:cs typeface="Courier New" panose="02070309020205020404" pitchFamily="49" charset="0"/>
-                <a:sym typeface="Consolas"/>
-              </a:rPr>
-              <a:t> (j % 2 == 0) {</a:t>
-            </a:r>
-            <a:endParaRPr lang="de-DE" noProof="0" dirty="0">
-              <a:latin typeface="Courier New" panose="02070309020205020404" pitchFamily="49" charset="0"/>
-              <a:cs typeface="Courier New" panose="02070309020205020404" pitchFamily="49" charset="0"/>
-            </a:endParaRPr>
-          </a:p>
-          <a:p>
-            <a:pPr lvl="0">
-              <a:spcBef>
-                <a:spcPts val="0"/>
-              </a:spcBef>
-              <a:spcAft>
-                <a:spcPts val="0"/>
-              </a:spcAft>
-            </a:pPr>
-            <a:r>
-              <a:rPr lang="de-DE" noProof="0" dirty="0">
-                <a:solidFill>
-                  <a:schemeClr val="dk1"/>
-                </a:solidFill>
-                <a:latin typeface="Courier New" panose="02070309020205020404" pitchFamily="49" charset="0"/>
-                <a:ea typeface="Consolas"/>
-                <a:cs typeface="Courier New" panose="02070309020205020404" pitchFamily="49" charset="0"/>
-                <a:sym typeface="Consolas"/>
-              </a:rPr>
-              <a:t>                // do </a:t>
-            </a:r>
-            <a:r>
-              <a:rPr lang="de-DE" noProof="0" dirty="0" err="1">
-                <a:solidFill>
-                  <a:schemeClr val="dk1"/>
-                </a:solidFill>
-                <a:latin typeface="Courier New" panose="02070309020205020404" pitchFamily="49" charset="0"/>
-                <a:ea typeface="Consolas"/>
-                <a:cs typeface="Courier New" panose="02070309020205020404" pitchFamily="49" charset="0"/>
-                <a:sym typeface="Consolas"/>
-              </a:rPr>
-              <a:t>nothing</a:t>
-            </a:r>
-            <a:endParaRPr lang="de-DE" noProof="0" dirty="0">
-              <a:latin typeface="Courier New" panose="02070309020205020404" pitchFamily="49" charset="0"/>
-              <a:cs typeface="Courier New" panose="02070309020205020404" pitchFamily="49" charset="0"/>
-            </a:endParaRPr>
-          </a:p>
-          <a:p>
-            <a:pPr lvl="0">
-              <a:spcBef>
-                <a:spcPts val="0"/>
-              </a:spcBef>
-              <a:spcAft>
-                <a:spcPts val="0"/>
-              </a:spcAft>
-            </a:pPr>
-            <a:r>
-              <a:rPr lang="de-DE" noProof="0" dirty="0">
-                <a:solidFill>
-                  <a:schemeClr val="dk1"/>
-                </a:solidFill>
-                <a:latin typeface="Courier New" panose="02070309020205020404" pitchFamily="49" charset="0"/>
-                <a:ea typeface="Consolas"/>
-                <a:cs typeface="Courier New" panose="02070309020205020404" pitchFamily="49" charset="0"/>
-                <a:sym typeface="Consolas"/>
-              </a:rPr>
-              <a:t>            }</a:t>
-            </a:r>
-            <a:endParaRPr lang="de-DE" noProof="0" dirty="0">
-              <a:latin typeface="Courier New" panose="02070309020205020404" pitchFamily="49" charset="0"/>
-              <a:cs typeface="Courier New" panose="02070309020205020404" pitchFamily="49" charset="0"/>
-            </a:endParaRPr>
-          </a:p>
-          <a:p>
-            <a:pPr lvl="0">
-              <a:spcBef>
-                <a:spcPts val="0"/>
-              </a:spcBef>
-              <a:spcAft>
-                <a:spcPts val="0"/>
-              </a:spcAft>
-            </a:pPr>
-            <a:r>
-              <a:rPr lang="de-DE" noProof="0" dirty="0">
-                <a:solidFill>
-                  <a:schemeClr val="dk1"/>
-                </a:solidFill>
-                <a:latin typeface="Courier New" panose="02070309020205020404" pitchFamily="49" charset="0"/>
-                <a:ea typeface="Consolas"/>
-                <a:cs typeface="Courier New" panose="02070309020205020404" pitchFamily="49" charset="0"/>
-                <a:sym typeface="Consolas"/>
-              </a:rPr>
-              <a:t>            </a:t>
-            </a:r>
-            <a:r>
-              <a:rPr lang="de-DE" noProof="0" dirty="0" err="1">
-                <a:solidFill>
-                  <a:schemeClr val="dk1"/>
-                </a:solidFill>
-                <a:latin typeface="Courier New" panose="02070309020205020404" pitchFamily="49" charset="0"/>
-                <a:ea typeface="Consolas"/>
-                <a:cs typeface="Courier New" panose="02070309020205020404" pitchFamily="49" charset="0"/>
-                <a:sym typeface="Consolas"/>
-              </a:rPr>
-              <a:t>sum</a:t>
-            </a:r>
-            <a:r>
-              <a:rPr lang="de-DE" noProof="0" dirty="0">
-                <a:solidFill>
-                  <a:schemeClr val="dk1"/>
-                </a:solidFill>
-                <a:latin typeface="Courier New" panose="02070309020205020404" pitchFamily="49" charset="0"/>
-                <a:ea typeface="Consolas"/>
-                <a:cs typeface="Courier New" panose="02070309020205020404" pitchFamily="49" charset="0"/>
-                <a:sym typeface="Consolas"/>
-              </a:rPr>
-              <a:t> = </a:t>
-            </a:r>
-            <a:r>
-              <a:rPr lang="de-DE" noProof="0" dirty="0" err="1">
-                <a:solidFill>
-                  <a:schemeClr val="dk1"/>
-                </a:solidFill>
-                <a:latin typeface="Courier New" panose="02070309020205020404" pitchFamily="49" charset="0"/>
-                <a:ea typeface="Consolas"/>
-                <a:cs typeface="Courier New" panose="02070309020205020404" pitchFamily="49" charset="0"/>
-                <a:sym typeface="Consolas"/>
-              </a:rPr>
-              <a:t>sum</a:t>
-            </a:r>
-            <a:r>
-              <a:rPr lang="de-DE" noProof="0" dirty="0">
-                <a:solidFill>
-                  <a:schemeClr val="dk1"/>
-                </a:solidFill>
-                <a:latin typeface="Courier New" panose="02070309020205020404" pitchFamily="49" charset="0"/>
-                <a:ea typeface="Consolas"/>
-                <a:cs typeface="Courier New" panose="02070309020205020404" pitchFamily="49" charset="0"/>
-                <a:sym typeface="Consolas"/>
-              </a:rPr>
-              <a:t> + (i * 3) + j;</a:t>
-            </a:r>
-            <a:endParaRPr lang="de-DE" noProof="0" dirty="0">
-              <a:latin typeface="Courier New" panose="02070309020205020404" pitchFamily="49" charset="0"/>
-              <a:cs typeface="Courier New" panose="02070309020205020404" pitchFamily="49" charset="0"/>
-            </a:endParaRPr>
-          </a:p>
-          <a:p>
-            <a:pPr lvl="0">
-              <a:spcBef>
-                <a:spcPts val="0"/>
-              </a:spcBef>
-              <a:spcAft>
-                <a:spcPts val="0"/>
-              </a:spcAft>
-            </a:pPr>
-            <a:r>
-              <a:rPr lang="de-DE" noProof="0" dirty="0">
-                <a:solidFill>
-                  <a:schemeClr val="dk1"/>
-                </a:solidFill>
-                <a:latin typeface="Courier New" panose="02070309020205020404" pitchFamily="49" charset="0"/>
-                <a:ea typeface="Consolas"/>
-                <a:cs typeface="Courier New" panose="02070309020205020404" pitchFamily="49" charset="0"/>
-                <a:sym typeface="Consolas"/>
-              </a:rPr>
-              <a:t>            j = j + 1;</a:t>
-            </a:r>
-            <a:endParaRPr lang="de-DE" noProof="0" dirty="0">
-              <a:latin typeface="Courier New" panose="02070309020205020404" pitchFamily="49" charset="0"/>
-              <a:cs typeface="Courier New" panose="02070309020205020404" pitchFamily="49" charset="0"/>
-            </a:endParaRPr>
-          </a:p>
-          <a:p>
-            <a:pPr lvl="0">
-              <a:spcBef>
-                <a:spcPts val="0"/>
-              </a:spcBef>
-              <a:spcAft>
-                <a:spcPts val="0"/>
-              </a:spcAft>
-            </a:pPr>
-            <a:r>
-              <a:rPr lang="de-DE" noProof="0" dirty="0">
-                <a:solidFill>
-                  <a:schemeClr val="dk1"/>
-                </a:solidFill>
-                <a:latin typeface="Courier New" panose="02070309020205020404" pitchFamily="49" charset="0"/>
-                <a:ea typeface="Consolas"/>
-                <a:cs typeface="Courier New" panose="02070309020205020404" pitchFamily="49" charset="0"/>
-                <a:sym typeface="Consolas"/>
-              </a:rPr>
-              <a:t>        }</a:t>
-            </a:r>
-            <a:endParaRPr lang="de-DE" noProof="0" dirty="0">
-              <a:latin typeface="Courier New" panose="02070309020205020404" pitchFamily="49" charset="0"/>
-              <a:cs typeface="Courier New" panose="02070309020205020404" pitchFamily="49" charset="0"/>
-            </a:endParaRPr>
-          </a:p>
-          <a:p>
-            <a:pPr lvl="0">
-              <a:spcBef>
-                <a:spcPts val="0"/>
-              </a:spcBef>
-              <a:spcAft>
-                <a:spcPts val="0"/>
-              </a:spcAft>
-            </a:pPr>
-            <a:r>
-              <a:rPr lang="de-DE" noProof="0" dirty="0">
-                <a:solidFill>
-                  <a:schemeClr val="dk1"/>
-                </a:solidFill>
-                <a:latin typeface="Courier New" panose="02070309020205020404" pitchFamily="49" charset="0"/>
-                <a:ea typeface="Consolas"/>
-                <a:cs typeface="Courier New" panose="02070309020205020404" pitchFamily="49" charset="0"/>
-                <a:sym typeface="Consolas"/>
-              </a:rPr>
-              <a:t>        i = i + 1;</a:t>
-            </a:r>
-            <a:endParaRPr lang="de-DE" noProof="0" dirty="0">
-              <a:latin typeface="Courier New" panose="02070309020205020404" pitchFamily="49" charset="0"/>
-              <a:cs typeface="Courier New" panose="02070309020205020404" pitchFamily="49" charset="0"/>
-            </a:endParaRPr>
-          </a:p>
-          <a:p>
-            <a:pPr lvl="0">
-              <a:spcBef>
-                <a:spcPts val="0"/>
-              </a:spcBef>
-              <a:spcAft>
-                <a:spcPts val="0"/>
-              </a:spcAft>
-            </a:pPr>
-            <a:r>
-              <a:rPr lang="de-DE" noProof="0" dirty="0">
-                <a:solidFill>
-                  <a:schemeClr val="dk1"/>
-                </a:solidFill>
-                <a:latin typeface="Courier New" panose="02070309020205020404" pitchFamily="49" charset="0"/>
-                <a:ea typeface="Consolas"/>
-                <a:cs typeface="Courier New" panose="02070309020205020404" pitchFamily="49" charset="0"/>
-                <a:sym typeface="Consolas"/>
-              </a:rPr>
-              <a:t>    } </a:t>
-            </a:r>
-            <a:r>
-              <a:rPr lang="de-DE" noProof="0" dirty="0" err="1">
-                <a:solidFill>
-                  <a:schemeClr val="dk1"/>
-                </a:solidFill>
-                <a:latin typeface="Courier New" panose="02070309020205020404" pitchFamily="49" charset="0"/>
-                <a:ea typeface="Consolas"/>
-                <a:cs typeface="Courier New" panose="02070309020205020404" pitchFamily="49" charset="0"/>
-                <a:sym typeface="Consolas"/>
-              </a:rPr>
-              <a:t>return</a:t>
-            </a:r>
-            <a:r>
-              <a:rPr lang="de-DE" noProof="0" dirty="0">
-                <a:solidFill>
-                  <a:schemeClr val="dk1"/>
-                </a:solidFill>
-                <a:latin typeface="Courier New" panose="02070309020205020404" pitchFamily="49" charset="0"/>
-                <a:ea typeface="Consolas"/>
-                <a:cs typeface="Courier New" panose="02070309020205020404" pitchFamily="49" charset="0"/>
-                <a:sym typeface="Consolas"/>
-              </a:rPr>
-              <a:t> </a:t>
-            </a:r>
-            <a:r>
-              <a:rPr lang="de-DE" noProof="0" dirty="0" err="1">
-                <a:solidFill>
-                  <a:schemeClr val="dk1"/>
-                </a:solidFill>
-                <a:latin typeface="Courier New" panose="02070309020205020404" pitchFamily="49" charset="0"/>
-                <a:ea typeface="Consolas"/>
-                <a:cs typeface="Courier New" panose="02070309020205020404" pitchFamily="49" charset="0"/>
-                <a:sym typeface="Consolas"/>
-              </a:rPr>
-              <a:t>sum</a:t>
-            </a:r>
-            <a:r>
-              <a:rPr lang="de-DE" noProof="0" dirty="0">
-                <a:solidFill>
-                  <a:schemeClr val="dk1"/>
-                </a:solidFill>
-                <a:latin typeface="Courier New" panose="02070309020205020404" pitchFamily="49" charset="0"/>
-                <a:ea typeface="Consolas"/>
-                <a:cs typeface="Courier New" panose="02070309020205020404" pitchFamily="49" charset="0"/>
-                <a:sym typeface="Consolas"/>
-              </a:rPr>
-              <a:t>;</a:t>
-            </a:r>
-            <a:endParaRPr lang="de-DE" noProof="0" dirty="0">
-              <a:latin typeface="Courier New" panose="02070309020205020404" pitchFamily="49" charset="0"/>
-              <a:cs typeface="Courier New" panose="02070309020205020404" pitchFamily="49" charset="0"/>
-            </a:endParaRPr>
-          </a:p>
-          <a:p>
-            <a:pPr lvl="0">
-              <a:spcBef>
-                <a:spcPts val="0"/>
-              </a:spcBef>
-              <a:spcAft>
-                <a:spcPts val="0"/>
-              </a:spcAft>
-            </a:pPr>
-            <a:r>
-              <a:rPr lang="de-DE" noProof="0" dirty="0">
-                <a:solidFill>
-                  <a:schemeClr val="dk1"/>
-                </a:solidFill>
-                <a:latin typeface="Courier New" panose="02070309020205020404" pitchFamily="49" charset="0"/>
-                <a:ea typeface="Consolas"/>
-                <a:cs typeface="Courier New" panose="02070309020205020404" pitchFamily="49" charset="0"/>
-                <a:sym typeface="Consolas"/>
-              </a:rPr>
-              <a:t>}</a:t>
-            </a:r>
-            <a:endParaRPr lang="de-DE" noProof="0" dirty="0">
-              <a:latin typeface="Courier New" panose="02070309020205020404" pitchFamily="49" charset="0"/>
-              <a:cs typeface="Courier New" panose="02070309020205020404" pitchFamily="49" charset="0"/>
-            </a:endParaRPr>
-          </a:p>
-        </p:txBody>
-      </p:sp>
-      <p:sp>
-        <p:nvSpPr>
-          <p:cNvPr id="3" name="Textplatzhalter 2">
-            <a:extLst>
-              <a:ext uri="{FF2B5EF4-FFF2-40B4-BE49-F238E27FC236}">
-                <a16:creationId xmlns:a16="http://schemas.microsoft.com/office/drawing/2014/main" id="{1B4C0F9B-36CF-439E-9A1D-0BBFBE886D37}"/>
-              </a:ext>
-            </a:extLst>
-          </p:cNvPr>
-          <p:cNvSpPr>
-            <a:spLocks noGrp="1"/>
-          </p:cNvSpPr>
-          <p:nvPr>
-            <p:ph type="body" idx="13"/>
-          </p:nvPr>
-        </p:nvSpPr>
-        <p:spPr/>
-        <p:txBody>
-          <a:bodyPr/>
-          <a:lstStyle/>
-          <a:p>
-            <a:r>
-              <a:rPr lang="de-DE" noProof="0" dirty="0"/>
-              <a:t>Algorithmik – Laufzeitanalyse von Algorithmen durch Asymptotische Notation</a:t>
-            </a:r>
-          </a:p>
-        </p:txBody>
-      </p:sp>
-      <p:sp>
-        <p:nvSpPr>
-          <p:cNvPr id="758" name="Google Shape;758;p22"/>
-          <p:cNvSpPr/>
-          <p:nvPr/>
-        </p:nvSpPr>
-        <p:spPr>
-          <a:xfrm>
-            <a:off x="3764501" y="1852223"/>
-            <a:ext cx="513777" cy="304046"/>
-          </a:xfrm>
-          <a:prstGeom prst="roundRect">
-            <a:avLst>
-              <a:gd name="adj" fmla="val 16667"/>
-            </a:avLst>
-          </a:prstGeom>
-          <a:solidFill>
-            <a:srgbClr val="9B8ABE"/>
-          </a:solidFill>
-          <a:ln>
-            <a:noFill/>
-          </a:ln>
-        </p:spPr>
-        <p:txBody>
-          <a:bodyPr spcFirstLastPara="1" wrap="square" lIns="91425" tIns="45700" rIns="91425" bIns="45700" anchor="ctr" anchorCtr="0">
-            <a:noAutofit/>
-          </a:bodyPr>
-          <a:lstStyle/>
-          <a:p>
-            <a:pPr marL="0" marR="0" lvl="0" indent="0" algn="ctr" rtl="0">
-              <a:spcBef>
-                <a:spcPts val="0"/>
-              </a:spcBef>
-              <a:spcAft>
-                <a:spcPts val="0"/>
-              </a:spcAft>
-              <a:buNone/>
-            </a:pPr>
-            <a:r>
-              <a:rPr lang="en-US" sz="2000" b="1" dirty="0">
-                <a:solidFill>
-                  <a:schemeClr val="lt1"/>
-                </a:solidFill>
-                <a:latin typeface="Calibri"/>
-                <a:ea typeface="Calibri"/>
-                <a:cs typeface="Calibri"/>
-                <a:sym typeface="Calibri"/>
-              </a:rPr>
-              <a:t>+1</a:t>
-            </a:r>
-            <a:endParaRPr dirty="0"/>
-          </a:p>
-        </p:txBody>
-      </p:sp>
-      <p:sp>
-        <p:nvSpPr>
-          <p:cNvPr id="759" name="Google Shape;759;p22"/>
-          <p:cNvSpPr/>
-          <p:nvPr/>
-        </p:nvSpPr>
-        <p:spPr>
-          <a:xfrm>
-            <a:off x="3507612" y="2177350"/>
-            <a:ext cx="513777" cy="304046"/>
-          </a:xfrm>
-          <a:prstGeom prst="roundRect">
-            <a:avLst>
-              <a:gd name="adj" fmla="val 16667"/>
-            </a:avLst>
-          </a:prstGeom>
-          <a:solidFill>
-            <a:srgbClr val="9B8ABE"/>
-          </a:solidFill>
-          <a:ln>
-            <a:noFill/>
-          </a:ln>
-        </p:spPr>
-        <p:txBody>
-          <a:bodyPr spcFirstLastPara="1" wrap="square" lIns="91425" tIns="45700" rIns="91425" bIns="45700" anchor="ctr" anchorCtr="0">
-            <a:noAutofit/>
-          </a:bodyPr>
-          <a:lstStyle/>
-          <a:p>
-            <a:pPr marL="0" marR="0" lvl="0" indent="0" algn="ctr" rtl="0">
-              <a:spcBef>
-                <a:spcPts val="0"/>
-              </a:spcBef>
-              <a:spcAft>
-                <a:spcPts val="0"/>
-              </a:spcAft>
-              <a:buNone/>
-            </a:pPr>
-            <a:r>
-              <a:rPr lang="en-US" sz="2000" b="1">
-                <a:solidFill>
-                  <a:schemeClr val="lt1"/>
-                </a:solidFill>
-                <a:latin typeface="Calibri"/>
-                <a:ea typeface="Calibri"/>
-                <a:cs typeface="Calibri"/>
-                <a:sym typeface="Calibri"/>
-              </a:rPr>
-              <a:t>+1</a:t>
-            </a:r>
-            <a:endParaRPr/>
-          </a:p>
-        </p:txBody>
-      </p:sp>
-      <p:sp>
-        <p:nvSpPr>
-          <p:cNvPr id="760" name="Google Shape;760;p22"/>
-          <p:cNvSpPr/>
-          <p:nvPr/>
-        </p:nvSpPr>
-        <p:spPr>
-          <a:xfrm>
-            <a:off x="4278278" y="2475261"/>
-            <a:ext cx="513777" cy="304046"/>
-          </a:xfrm>
-          <a:prstGeom prst="roundRect">
-            <a:avLst>
-              <a:gd name="adj" fmla="val 16667"/>
-            </a:avLst>
-          </a:prstGeom>
-          <a:solidFill>
-            <a:srgbClr val="9B8ABE"/>
-          </a:solidFill>
-          <a:ln>
-            <a:noFill/>
-          </a:ln>
-        </p:spPr>
-        <p:txBody>
-          <a:bodyPr spcFirstLastPara="1" wrap="square" lIns="91425" tIns="45700" rIns="91425" bIns="45700" anchor="ctr" anchorCtr="0">
-            <a:noAutofit/>
-          </a:bodyPr>
-          <a:lstStyle/>
-          <a:p>
-            <a:pPr marL="0" marR="0" lvl="0" indent="0" algn="ctr" rtl="0">
-              <a:spcBef>
-                <a:spcPts val="0"/>
-              </a:spcBef>
-              <a:spcAft>
-                <a:spcPts val="0"/>
-              </a:spcAft>
-              <a:buNone/>
-            </a:pPr>
-            <a:r>
-              <a:rPr lang="en-US" sz="2000" b="1" dirty="0">
-                <a:solidFill>
-                  <a:schemeClr val="lt1"/>
-                </a:solidFill>
-                <a:latin typeface="Calibri"/>
-                <a:ea typeface="Calibri"/>
-                <a:cs typeface="Calibri"/>
-                <a:sym typeface="Calibri"/>
-              </a:rPr>
-              <a:t>+1</a:t>
-            </a:r>
-            <a:endParaRPr dirty="0"/>
-          </a:p>
-        </p:txBody>
-      </p:sp>
-      <p:sp>
-        <p:nvSpPr>
-          <p:cNvPr id="761" name="Google Shape;761;p22"/>
-          <p:cNvSpPr/>
-          <p:nvPr/>
-        </p:nvSpPr>
-        <p:spPr>
-          <a:xfrm>
-            <a:off x="5892432" y="3406728"/>
-            <a:ext cx="513777" cy="304046"/>
-          </a:xfrm>
-          <a:prstGeom prst="roundRect">
-            <a:avLst>
-              <a:gd name="adj" fmla="val 16667"/>
-            </a:avLst>
-          </a:prstGeom>
-          <a:solidFill>
-            <a:srgbClr val="9B8ABE"/>
-          </a:solidFill>
-          <a:ln>
-            <a:noFill/>
-          </a:ln>
-        </p:spPr>
-        <p:txBody>
-          <a:bodyPr spcFirstLastPara="1" wrap="square" lIns="91425" tIns="45700" rIns="91425" bIns="45700" anchor="ctr" anchorCtr="0">
-            <a:noAutofit/>
-          </a:bodyPr>
-          <a:lstStyle/>
-          <a:p>
-            <a:pPr marL="0" marR="0" lvl="0" indent="0" algn="ctr" rtl="0">
-              <a:spcBef>
-                <a:spcPts val="0"/>
-              </a:spcBef>
-              <a:spcAft>
-                <a:spcPts val="0"/>
-              </a:spcAft>
-              <a:buNone/>
-            </a:pPr>
-            <a:r>
-              <a:rPr lang="en-US" sz="2000" b="1" dirty="0">
-                <a:solidFill>
-                  <a:schemeClr val="lt1"/>
-                </a:solidFill>
-                <a:latin typeface="Calibri"/>
-                <a:ea typeface="Calibri"/>
-                <a:cs typeface="Calibri"/>
-                <a:sym typeface="Calibri"/>
-              </a:rPr>
-              <a:t>+2</a:t>
-            </a:r>
-            <a:endParaRPr dirty="0"/>
-          </a:p>
-        </p:txBody>
-      </p:sp>
-      <p:sp>
-        <p:nvSpPr>
-          <p:cNvPr id="762" name="Google Shape;762;p22"/>
-          <p:cNvSpPr/>
-          <p:nvPr/>
-        </p:nvSpPr>
-        <p:spPr>
-          <a:xfrm>
-            <a:off x="3889192" y="5576698"/>
-            <a:ext cx="513777" cy="304046"/>
-          </a:xfrm>
-          <a:prstGeom prst="roundRect">
-            <a:avLst>
-              <a:gd name="adj" fmla="val 16667"/>
-            </a:avLst>
-          </a:prstGeom>
-          <a:solidFill>
-            <a:srgbClr val="9B8ABE"/>
-          </a:solidFill>
-          <a:ln>
-            <a:noFill/>
-          </a:ln>
-        </p:spPr>
-        <p:txBody>
-          <a:bodyPr spcFirstLastPara="1" wrap="square" lIns="91425" tIns="45700" rIns="91425" bIns="45700" anchor="ctr" anchorCtr="0">
-            <a:noAutofit/>
-          </a:bodyPr>
-          <a:lstStyle/>
-          <a:p>
-            <a:pPr marL="0" marR="0" lvl="0" indent="0" algn="ctr" rtl="0">
-              <a:spcBef>
-                <a:spcPts val="0"/>
-              </a:spcBef>
-              <a:spcAft>
-                <a:spcPts val="0"/>
-              </a:spcAft>
-              <a:buNone/>
-            </a:pPr>
-            <a:r>
-              <a:rPr lang="en-US" sz="2000" b="1">
-                <a:solidFill>
-                  <a:schemeClr val="lt1"/>
-                </a:solidFill>
-                <a:latin typeface="Calibri"/>
-                <a:ea typeface="Calibri"/>
-                <a:cs typeface="Calibri"/>
-                <a:sym typeface="Calibri"/>
-              </a:rPr>
-              <a:t>+1</a:t>
-            </a:r>
-            <a:endParaRPr/>
-          </a:p>
-        </p:txBody>
-      </p:sp>
-      <p:sp>
-        <p:nvSpPr>
-          <p:cNvPr id="763" name="Google Shape;763;p22"/>
-          <p:cNvSpPr/>
-          <p:nvPr/>
-        </p:nvSpPr>
-        <p:spPr>
-          <a:xfrm>
-            <a:off x="7241599" y="3105834"/>
-            <a:ext cx="296533" cy="1992639"/>
-          </a:xfrm>
-          <a:prstGeom prst="rightBrace">
-            <a:avLst>
-              <a:gd name="adj1" fmla="val 56789"/>
-              <a:gd name="adj2" fmla="val 50000"/>
-            </a:avLst>
-          </a:prstGeom>
-          <a:noFill/>
-          <a:ln w="38100" cap="flat" cmpd="sng">
-            <a:solidFill>
-              <a:srgbClr val="B6A479"/>
-            </a:solidFill>
-            <a:prstDash val="solid"/>
-            <a:round/>
-            <a:headEnd type="none" w="sm" len="sm"/>
-            <a:tailEnd type="none" w="sm" len="sm"/>
-          </a:ln>
-        </p:spPr>
-        <p:txBody>
-          <a:bodyPr spcFirstLastPara="1" wrap="square" lIns="91425" tIns="45700" rIns="91425" bIns="45700" anchor="ctr" anchorCtr="0">
-            <a:noAutofit/>
-          </a:bodyPr>
-          <a:lstStyle/>
-          <a:p>
-            <a:pPr marL="0" marR="0" lvl="0" indent="0" algn="ctr" rtl="0">
-              <a:spcBef>
-                <a:spcPts val="0"/>
-              </a:spcBef>
-              <a:spcAft>
-                <a:spcPts val="0"/>
-              </a:spcAft>
-              <a:buNone/>
-            </a:pPr>
-            <a:endParaRPr sz="1800">
-              <a:solidFill>
-                <a:schemeClr val="dk1"/>
-              </a:solidFill>
-              <a:latin typeface="Twentieth Century"/>
-              <a:ea typeface="Twentieth Century"/>
-              <a:cs typeface="Twentieth Century"/>
-              <a:sym typeface="Twentieth Century"/>
-            </a:endParaRPr>
-          </a:p>
-        </p:txBody>
-      </p:sp>
-      <p:sp>
-        <p:nvSpPr>
-          <p:cNvPr id="764" name="Google Shape;764;p22"/>
-          <p:cNvSpPr/>
-          <p:nvPr/>
-        </p:nvSpPr>
-        <p:spPr>
-          <a:xfrm>
-            <a:off x="7690095" y="3945937"/>
-            <a:ext cx="513777" cy="304046"/>
-          </a:xfrm>
-          <a:prstGeom prst="roundRect">
-            <a:avLst>
-              <a:gd name="adj" fmla="val 16667"/>
-            </a:avLst>
-          </a:prstGeom>
-          <a:solidFill>
-            <a:srgbClr val="9B8ABE"/>
-          </a:solidFill>
-          <a:ln>
-            <a:noFill/>
-          </a:ln>
-        </p:spPr>
-        <p:txBody>
-          <a:bodyPr spcFirstLastPara="1" wrap="square" lIns="91425" tIns="45700" rIns="91425" bIns="45700" anchor="ctr" anchorCtr="0">
-            <a:noAutofit/>
-          </a:bodyPr>
-          <a:lstStyle/>
-          <a:p>
-            <a:pPr marL="0" marR="0" lvl="0" indent="0" algn="ctr" rtl="0">
-              <a:spcBef>
-                <a:spcPts val="0"/>
-              </a:spcBef>
-              <a:spcAft>
-                <a:spcPts val="0"/>
-              </a:spcAft>
-              <a:buNone/>
-            </a:pPr>
-            <a:r>
-              <a:rPr lang="en-US" sz="2000" b="1" dirty="0">
-                <a:solidFill>
-                  <a:schemeClr val="lt1"/>
-                </a:solidFill>
-                <a:latin typeface="Calibri"/>
-                <a:ea typeface="Calibri"/>
-                <a:cs typeface="Calibri"/>
-                <a:sym typeface="Calibri"/>
-              </a:rPr>
-              <a:t>+9</a:t>
-            </a:r>
-            <a:endParaRPr dirty="0"/>
-          </a:p>
-        </p:txBody>
-      </p:sp>
-      <p:grpSp>
-        <p:nvGrpSpPr>
-          <p:cNvPr id="765" name="Google Shape;765;p22"/>
-          <p:cNvGrpSpPr/>
+          <p:cNvGrpSpPr>
+            <a:grpSpLocks noChangeAspect="1"/>
+          </p:cNvGrpSpPr>
           <p:nvPr/>
         </p:nvGrpSpPr>
         <p:grpSpPr>
           <a:xfrm>
-            <a:off x="8438680" y="3821525"/>
-            <a:ext cx="552870" cy="552870"/>
-            <a:chOff x="7574669" y="3536256"/>
-            <a:chExt cx="552870" cy="552870"/>
+            <a:off x="5766996" y="4028691"/>
+            <a:ext cx="6238094" cy="1872049"/>
+            <a:chOff x="5281611" y="520700"/>
+            <a:chExt cx="6723479" cy="2017713"/>
           </a:xfrm>
         </p:grpSpPr>
+        <p:pic>
+          <p:nvPicPr>
+            <p:cNvPr id="39" name="Grafik 38">
+              <a:extLst>
+                <a:ext uri="{FF2B5EF4-FFF2-40B4-BE49-F238E27FC236}">
+                  <a16:creationId xmlns:a16="http://schemas.microsoft.com/office/drawing/2014/main" id="{E9773847-59E5-4A70-94A9-D503A9497FE0}"/>
+                </a:ext>
+              </a:extLst>
+            </p:cNvPr>
+            <p:cNvPicPr>
+              <a:picLocks noChangeAspect="1"/>
+            </p:cNvPicPr>
+            <p:nvPr/>
+          </p:nvPicPr>
+          <p:blipFill rotWithShape="1">
+            <a:blip r:embed="rId3"/>
+            <a:srcRect l="1289" r="768" b="4434"/>
+            <a:stretch/>
+          </p:blipFill>
+          <p:spPr>
+            <a:xfrm>
+              <a:off x="5281613" y="996950"/>
+              <a:ext cx="6723477" cy="1541463"/>
+            </a:xfrm>
+            <a:prstGeom prst="rect">
+              <a:avLst/>
+            </a:prstGeom>
+          </p:spPr>
+        </p:pic>
         <p:sp>
           <p:nvSpPr>
-            <p:cNvPr id="766" name="Google Shape;766;p22"/>
+            <p:cNvPr id="40" name="Google Shape;921;p27">
+              <a:extLst>
+                <a:ext uri="{FF2B5EF4-FFF2-40B4-BE49-F238E27FC236}">
+                  <a16:creationId xmlns:a16="http://schemas.microsoft.com/office/drawing/2014/main" id="{3CE34F02-980A-4D8E-8EB6-8116A1140FFC}"/>
+                </a:ext>
+              </a:extLst>
+            </p:cNvPr>
             <p:cNvSpPr/>
             <p:nvPr/>
           </p:nvSpPr>
           <p:spPr>
             <a:xfrm>
-              <a:off x="7574669" y="3536256"/>
-              <a:ext cx="552870" cy="552870"/>
+              <a:off x="5281611" y="520700"/>
+              <a:ext cx="6723479" cy="476250"/>
             </a:xfrm>
-            <a:prstGeom prst="ellipse">
+            <a:prstGeom prst="rect">
               <a:avLst/>
             </a:prstGeom>
             <a:solidFill>
-              <a:srgbClr val="B6A479"/>
+              <a:srgbClr val="4C3282"/>
             </a:solidFill>
             <a:ln>
               <a:noFill/>
@@ -14788,54 +9498,6 @@
           <p:txBody>
             <a:bodyPr spcFirstLastPara="1" wrap="square" lIns="91425" tIns="45700" rIns="91425" bIns="45700" anchor="ctr" anchorCtr="0">
               <a:noAutofit/>
-            </a:bodyPr>
-            <a:lstStyle/>
-            <a:p>
-              <a:pPr marL="0" marR="0" lvl="0" indent="0" algn="ctr" rtl="0">
-                <a:spcBef>
-                  <a:spcPts val="0"/>
-                </a:spcBef>
-                <a:spcAft>
-                  <a:spcPts val="0"/>
-                </a:spcAft>
-                <a:buNone/>
-              </a:pPr>
-              <a:endParaRPr sz="1800">
-                <a:solidFill>
-                  <a:schemeClr val="lt1"/>
-                </a:solidFill>
-                <a:latin typeface="Calibri"/>
-                <a:ea typeface="Calibri"/>
-                <a:cs typeface="Calibri"/>
-                <a:sym typeface="Calibri"/>
-              </a:endParaRPr>
-            </a:p>
-          </p:txBody>
-        </p:sp>
-        <p:sp>
-          <p:nvSpPr>
-            <p:cNvPr id="767" name="Google Shape;767;p22"/>
-            <p:cNvSpPr txBox="1"/>
-            <p:nvPr/>
-          </p:nvSpPr>
-          <p:spPr>
-            <a:xfrm>
-              <a:off x="7639474" y="3628025"/>
-              <a:ext cx="423261" cy="369332"/>
-            </a:xfrm>
-            <a:prstGeom prst="rect">
-              <a:avLst/>
-            </a:prstGeom>
-            <a:solidFill>
-              <a:srgbClr val="B6A479"/>
-            </a:solidFill>
-            <a:ln>
-              <a:noFill/>
-            </a:ln>
-          </p:spPr>
-          <p:txBody>
-            <a:bodyPr spcFirstLastPara="1" wrap="square" lIns="91425" tIns="45700" rIns="91425" bIns="45700" anchor="t" anchorCtr="0">
-              <a:spAutoFit/>
             </a:bodyPr>
             <a:lstStyle/>
             <a:p>
@@ -14849,2070 +9511,32 @@
                 <a:buNone/>
               </a:pPr>
               <a:r>
-                <a:rPr lang="en-US" sz="1800" b="1" dirty="0">
+                <a:rPr lang="el-GR" sz="2400" dirty="0">
                   <a:solidFill>
                     <a:schemeClr val="lt1"/>
                   </a:solidFill>
-                  <a:latin typeface="Calibri"/>
-                  <a:ea typeface="Calibri"/>
-                  <a:cs typeface="Calibri"/>
-                  <a:sym typeface="Calibri"/>
+                  <a:ea typeface="Quattrocento Sans"/>
+                  <a:sym typeface="Quattrocento Sans"/>
                 </a:rPr>
-                <a:t>*n</a:t>
+                <a:t>Θ</a:t>
+              </a:r>
+              <a:r>
+                <a:rPr lang="en-US" sz="2400" dirty="0">
+                  <a:solidFill>
+                    <a:schemeClr val="lt1"/>
+                  </a:solidFill>
+                  <a:latin typeface="Quattrocento Sans"/>
+                  <a:ea typeface="Quattrocento Sans"/>
+                  <a:cs typeface="Quattrocento Sans"/>
+                  <a:sym typeface="Quattrocento Sans"/>
+                </a:rPr>
+                <a:t>-Notation</a:t>
               </a:r>
               <a:endParaRPr dirty="0"/>
             </a:p>
           </p:txBody>
         </p:sp>
       </p:grpSp>
-      <p:sp>
-        <p:nvSpPr>
-          <p:cNvPr id="768" name="Google Shape;768;p22"/>
-          <p:cNvSpPr txBox="1"/>
-          <p:nvPr/>
-        </p:nvSpPr>
-        <p:spPr>
-          <a:xfrm>
-            <a:off x="7602938" y="3129309"/>
-            <a:ext cx="1832008" cy="646290"/>
-          </a:xfrm>
-          <a:prstGeom prst="rect">
-            <a:avLst/>
-          </a:prstGeom>
-          <a:noFill/>
-          <a:ln>
-            <a:noFill/>
-          </a:ln>
-        </p:spPr>
-        <p:txBody>
-          <a:bodyPr spcFirstLastPara="1" wrap="square" lIns="91425" tIns="45700" rIns="91425" bIns="45700" anchor="t" anchorCtr="0">
-            <a:spAutoFit/>
-          </a:bodyPr>
-          <a:lstStyle/>
-          <a:p>
-            <a:pPr lvl="0">
-              <a:spcBef>
-                <a:spcPts val="0"/>
-              </a:spcBef>
-              <a:spcAft>
-                <a:spcPts val="0"/>
-              </a:spcAft>
-            </a:pPr>
-            <a:r>
-              <a:rPr lang="de-DE" dirty="0">
-                <a:solidFill>
-                  <a:schemeClr val="dk1"/>
-                </a:solidFill>
-                <a:latin typeface="Calibri"/>
-                <a:ea typeface="Calibri"/>
-                <a:cs typeface="Calibri"/>
-                <a:sym typeface="Calibri"/>
-              </a:rPr>
-              <a:t>Innere Schleife läuft n-mal</a:t>
-            </a:r>
-            <a:endParaRPr dirty="0"/>
-          </a:p>
-        </p:txBody>
-      </p:sp>
-      <p:sp>
-        <p:nvSpPr>
-          <p:cNvPr id="769" name="Google Shape;769;p22"/>
-          <p:cNvSpPr/>
-          <p:nvPr/>
-        </p:nvSpPr>
-        <p:spPr>
-          <a:xfrm>
-            <a:off x="8586634" y="971774"/>
-            <a:ext cx="2898900" cy="1150800"/>
-          </a:xfrm>
-          <a:prstGeom prst="rect">
-            <a:avLst/>
-          </a:prstGeom>
-          <a:solidFill>
-            <a:srgbClr val="4C3282"/>
-          </a:solidFill>
-          <a:ln>
-            <a:noFill/>
-          </a:ln>
-        </p:spPr>
-        <p:txBody>
-          <a:bodyPr spcFirstLastPara="1" wrap="square" lIns="91425" tIns="45700" rIns="91425" bIns="45700" anchor="ctr" anchorCtr="0">
-            <a:noAutofit/>
-          </a:bodyPr>
-          <a:lstStyle/>
-          <a:p>
-            <a:pPr marL="0" marR="0" lvl="0" indent="0" algn="ctr" rtl="0">
-              <a:spcBef>
-                <a:spcPts val="0"/>
-              </a:spcBef>
-              <a:spcAft>
-                <a:spcPts val="0"/>
-              </a:spcAft>
-              <a:buNone/>
-            </a:pPr>
-            <a:r>
-              <a:rPr lang="en-US" sz="2400">
-                <a:solidFill>
-                  <a:schemeClr val="lt1"/>
-                </a:solidFill>
-                <a:latin typeface="Calibri"/>
-                <a:ea typeface="Calibri"/>
-                <a:cs typeface="Calibri"/>
-                <a:sym typeface="Calibri"/>
-              </a:rPr>
-              <a:t>f(n) = (9n+4)n + 3</a:t>
-            </a:r>
-            <a:endParaRPr/>
-          </a:p>
-        </p:txBody>
-      </p:sp>
-      <p:sp>
-        <p:nvSpPr>
-          <p:cNvPr id="770" name="Google Shape;770;p22"/>
-          <p:cNvSpPr/>
-          <p:nvPr/>
-        </p:nvSpPr>
-        <p:spPr>
-          <a:xfrm>
-            <a:off x="4137357" y="2803857"/>
-            <a:ext cx="513777" cy="304046"/>
-          </a:xfrm>
-          <a:prstGeom prst="roundRect">
-            <a:avLst>
-              <a:gd name="adj" fmla="val 16667"/>
-            </a:avLst>
-          </a:prstGeom>
-          <a:solidFill>
-            <a:srgbClr val="9B8ABE"/>
-          </a:solidFill>
-          <a:ln>
-            <a:noFill/>
-          </a:ln>
-        </p:spPr>
-        <p:txBody>
-          <a:bodyPr spcFirstLastPara="1" wrap="square" lIns="91425" tIns="45700" rIns="91425" bIns="45700" anchor="ctr" anchorCtr="0">
-            <a:noAutofit/>
-          </a:bodyPr>
-          <a:lstStyle/>
-          <a:p>
-            <a:pPr marL="0" marR="0" lvl="0" indent="0" algn="ctr" rtl="0">
-              <a:spcBef>
-                <a:spcPts val="0"/>
-              </a:spcBef>
-              <a:spcAft>
-                <a:spcPts val="0"/>
-              </a:spcAft>
-              <a:buNone/>
-            </a:pPr>
-            <a:r>
-              <a:rPr lang="en-US" sz="2000" b="1" dirty="0">
-                <a:solidFill>
-                  <a:schemeClr val="lt1"/>
-                </a:solidFill>
-                <a:latin typeface="Calibri"/>
-                <a:ea typeface="Calibri"/>
-                <a:cs typeface="Calibri"/>
-                <a:sym typeface="Calibri"/>
-              </a:rPr>
-              <a:t>+1</a:t>
-            </a:r>
-            <a:endParaRPr dirty="0"/>
-          </a:p>
-        </p:txBody>
-      </p:sp>
-      <p:sp>
-        <p:nvSpPr>
-          <p:cNvPr id="771" name="Google Shape;771;p22"/>
-          <p:cNvSpPr/>
-          <p:nvPr/>
-        </p:nvSpPr>
-        <p:spPr>
-          <a:xfrm>
-            <a:off x="4940327" y="3092516"/>
-            <a:ext cx="513777" cy="304046"/>
-          </a:xfrm>
-          <a:prstGeom prst="roundRect">
-            <a:avLst>
-              <a:gd name="adj" fmla="val 16667"/>
-            </a:avLst>
-          </a:prstGeom>
-          <a:solidFill>
-            <a:srgbClr val="9B8ABE"/>
-          </a:solidFill>
-          <a:ln>
-            <a:noFill/>
-          </a:ln>
-        </p:spPr>
-        <p:txBody>
-          <a:bodyPr spcFirstLastPara="1" wrap="square" lIns="91425" tIns="45700" rIns="91425" bIns="45700" anchor="ctr" anchorCtr="0">
-            <a:noAutofit/>
-          </a:bodyPr>
-          <a:lstStyle/>
-          <a:p>
-            <a:pPr marL="0" marR="0" lvl="0" indent="0" algn="ctr" rtl="0">
-              <a:spcBef>
-                <a:spcPts val="0"/>
-              </a:spcBef>
-              <a:spcAft>
-                <a:spcPts val="0"/>
-              </a:spcAft>
-              <a:buNone/>
-            </a:pPr>
-            <a:r>
-              <a:rPr lang="en-US" sz="2000" b="1" dirty="0">
-                <a:solidFill>
-                  <a:schemeClr val="lt1"/>
-                </a:solidFill>
-                <a:latin typeface="Calibri"/>
-                <a:ea typeface="Calibri"/>
-                <a:cs typeface="Calibri"/>
-                <a:sym typeface="Calibri"/>
-              </a:rPr>
-              <a:t>+1</a:t>
-            </a:r>
-            <a:endParaRPr dirty="0"/>
-          </a:p>
-        </p:txBody>
-      </p:sp>
-      <p:sp>
-        <p:nvSpPr>
-          <p:cNvPr id="772" name="Google Shape;772;p22"/>
-          <p:cNvSpPr/>
-          <p:nvPr/>
-        </p:nvSpPr>
-        <p:spPr>
-          <a:xfrm>
-            <a:off x="4788532" y="4641895"/>
-            <a:ext cx="513777" cy="304046"/>
-          </a:xfrm>
-          <a:prstGeom prst="roundRect">
-            <a:avLst>
-              <a:gd name="adj" fmla="val 16667"/>
-            </a:avLst>
-          </a:prstGeom>
-          <a:solidFill>
-            <a:srgbClr val="9B8ABE"/>
-          </a:solidFill>
-          <a:ln>
-            <a:noFill/>
-          </a:ln>
-        </p:spPr>
-        <p:txBody>
-          <a:bodyPr spcFirstLastPara="1" wrap="square" lIns="91425" tIns="45700" rIns="91425" bIns="45700" anchor="ctr" anchorCtr="0">
-            <a:noAutofit/>
-          </a:bodyPr>
-          <a:lstStyle/>
-          <a:p>
-            <a:pPr marL="0" marR="0" lvl="0" indent="0" algn="ctr" rtl="0">
-              <a:spcBef>
-                <a:spcPts val="0"/>
-              </a:spcBef>
-              <a:spcAft>
-                <a:spcPts val="0"/>
-              </a:spcAft>
-              <a:buNone/>
-            </a:pPr>
-            <a:r>
-              <a:rPr lang="en-US" sz="2000" b="1">
-                <a:solidFill>
-                  <a:schemeClr val="lt1"/>
-                </a:solidFill>
-                <a:latin typeface="Calibri"/>
-                <a:ea typeface="Calibri"/>
-                <a:cs typeface="Calibri"/>
-                <a:sym typeface="Calibri"/>
-              </a:rPr>
-              <a:t>+2</a:t>
-            </a:r>
-            <a:endParaRPr/>
-          </a:p>
-        </p:txBody>
-      </p:sp>
-      <p:sp>
-        <p:nvSpPr>
-          <p:cNvPr id="773" name="Google Shape;773;p22"/>
-          <p:cNvSpPr/>
-          <p:nvPr/>
-        </p:nvSpPr>
-        <p:spPr>
-          <a:xfrm>
-            <a:off x="4040904" y="5249482"/>
-            <a:ext cx="513777" cy="304046"/>
-          </a:xfrm>
-          <a:prstGeom prst="roundRect">
-            <a:avLst>
-              <a:gd name="adj" fmla="val 16667"/>
-            </a:avLst>
-          </a:prstGeom>
-          <a:solidFill>
-            <a:srgbClr val="9B8ABE"/>
-          </a:solidFill>
-          <a:ln>
-            <a:noFill/>
-          </a:ln>
-        </p:spPr>
-        <p:txBody>
-          <a:bodyPr spcFirstLastPara="1" wrap="square" lIns="91425" tIns="45700" rIns="91425" bIns="45700" anchor="ctr" anchorCtr="0">
-            <a:noAutofit/>
-          </a:bodyPr>
-          <a:lstStyle/>
-          <a:p>
-            <a:pPr marL="0" marR="0" lvl="0" indent="0" algn="ctr" rtl="0">
-              <a:spcBef>
-                <a:spcPts val="0"/>
-              </a:spcBef>
-              <a:spcAft>
-                <a:spcPts val="0"/>
-              </a:spcAft>
-              <a:buNone/>
-            </a:pPr>
-            <a:r>
-              <a:rPr lang="en-US" sz="2000" b="1" dirty="0">
-                <a:solidFill>
-                  <a:schemeClr val="lt1"/>
-                </a:solidFill>
-                <a:latin typeface="Calibri"/>
-                <a:ea typeface="Calibri"/>
-                <a:cs typeface="Calibri"/>
-                <a:sym typeface="Calibri"/>
-              </a:rPr>
-              <a:t>+2</a:t>
-            </a:r>
-            <a:endParaRPr dirty="0"/>
-          </a:p>
-        </p:txBody>
-      </p:sp>
-      <p:sp>
-        <p:nvSpPr>
-          <p:cNvPr id="774" name="Google Shape;774;p22"/>
-          <p:cNvSpPr/>
-          <p:nvPr/>
-        </p:nvSpPr>
-        <p:spPr>
-          <a:xfrm>
-            <a:off x="6575859" y="4328129"/>
-            <a:ext cx="513777" cy="304046"/>
-          </a:xfrm>
-          <a:prstGeom prst="roundRect">
-            <a:avLst>
-              <a:gd name="adj" fmla="val 16667"/>
-            </a:avLst>
-          </a:prstGeom>
-          <a:solidFill>
-            <a:srgbClr val="9B8ABE"/>
-          </a:solidFill>
-          <a:ln>
-            <a:noFill/>
-          </a:ln>
-        </p:spPr>
-        <p:txBody>
-          <a:bodyPr spcFirstLastPara="1" wrap="square" lIns="91425" tIns="45700" rIns="91425" bIns="45700" anchor="ctr" anchorCtr="0">
-            <a:noAutofit/>
-          </a:bodyPr>
-          <a:lstStyle/>
-          <a:p>
-            <a:pPr marL="0" marR="0" lvl="0" indent="0" algn="ctr" rtl="0">
-              <a:spcBef>
-                <a:spcPts val="0"/>
-              </a:spcBef>
-              <a:spcAft>
-                <a:spcPts val="0"/>
-              </a:spcAft>
-              <a:buNone/>
-            </a:pPr>
-            <a:r>
-              <a:rPr lang="en-US" sz="2000" b="1">
-                <a:solidFill>
-                  <a:schemeClr val="lt1"/>
-                </a:solidFill>
-                <a:latin typeface="Calibri"/>
-                <a:ea typeface="Calibri"/>
-                <a:cs typeface="Calibri"/>
-                <a:sym typeface="Calibri"/>
-              </a:rPr>
-              <a:t>+4</a:t>
-            </a:r>
-            <a:endParaRPr/>
-          </a:p>
-        </p:txBody>
-      </p:sp>
-      <p:sp>
-        <p:nvSpPr>
-          <p:cNvPr id="775" name="Google Shape;775;p22"/>
-          <p:cNvSpPr/>
-          <p:nvPr/>
-        </p:nvSpPr>
-        <p:spPr>
-          <a:xfrm>
-            <a:off x="9544475" y="2481396"/>
-            <a:ext cx="296533" cy="3072132"/>
-          </a:xfrm>
-          <a:prstGeom prst="rightBrace">
-            <a:avLst>
-              <a:gd name="adj1" fmla="val 56789"/>
-              <a:gd name="adj2" fmla="val 50000"/>
-            </a:avLst>
-          </a:prstGeom>
-          <a:noFill/>
-          <a:ln w="38100" cap="flat" cmpd="sng">
-            <a:solidFill>
-              <a:srgbClr val="B6A479"/>
-            </a:solidFill>
-            <a:prstDash val="solid"/>
-            <a:round/>
-            <a:headEnd type="none" w="sm" len="sm"/>
-            <a:tailEnd type="none" w="sm" len="sm"/>
-          </a:ln>
-        </p:spPr>
-        <p:txBody>
-          <a:bodyPr spcFirstLastPara="1" wrap="square" lIns="91425" tIns="45700" rIns="91425" bIns="45700" anchor="ctr" anchorCtr="0">
-            <a:noAutofit/>
-          </a:bodyPr>
-          <a:lstStyle/>
-          <a:p>
-            <a:pPr marL="0" marR="0" lvl="0" indent="0" algn="ctr" rtl="0">
-              <a:spcBef>
-                <a:spcPts val="0"/>
-              </a:spcBef>
-              <a:spcAft>
-                <a:spcPts val="0"/>
-              </a:spcAft>
-              <a:buNone/>
-            </a:pPr>
-            <a:endParaRPr sz="1800">
-              <a:solidFill>
-                <a:schemeClr val="dk1"/>
-              </a:solidFill>
-              <a:latin typeface="Twentieth Century"/>
-              <a:ea typeface="Twentieth Century"/>
-              <a:cs typeface="Twentieth Century"/>
-              <a:sym typeface="Twentieth Century"/>
-            </a:endParaRPr>
-          </a:p>
-        </p:txBody>
-      </p:sp>
-      <p:sp>
-        <p:nvSpPr>
-          <p:cNvPr id="776" name="Google Shape;776;p22"/>
-          <p:cNvSpPr/>
-          <p:nvPr/>
-        </p:nvSpPr>
-        <p:spPr>
-          <a:xfrm>
-            <a:off x="9986157" y="3857166"/>
-            <a:ext cx="1005867" cy="304046"/>
-          </a:xfrm>
-          <a:prstGeom prst="roundRect">
-            <a:avLst>
-              <a:gd name="adj" fmla="val 16667"/>
-            </a:avLst>
-          </a:prstGeom>
-          <a:solidFill>
-            <a:srgbClr val="9B8ABE"/>
-          </a:solidFill>
-          <a:ln>
-            <a:noFill/>
-          </a:ln>
-        </p:spPr>
-        <p:txBody>
-          <a:bodyPr spcFirstLastPara="1" wrap="square" lIns="91425" tIns="45700" rIns="91425" bIns="45700" anchor="ctr" anchorCtr="0">
-            <a:noAutofit/>
-          </a:bodyPr>
-          <a:lstStyle/>
-          <a:p>
-            <a:pPr marL="0" marR="0" lvl="0" indent="0" algn="ctr" rtl="0">
-              <a:spcBef>
-                <a:spcPts val="0"/>
-              </a:spcBef>
-              <a:spcAft>
-                <a:spcPts val="0"/>
-              </a:spcAft>
-              <a:buNone/>
-            </a:pPr>
-            <a:r>
-              <a:rPr lang="en-US" sz="2000" b="1" dirty="0">
-                <a:solidFill>
-                  <a:schemeClr val="lt1"/>
-                </a:solidFill>
-                <a:latin typeface="Calibri"/>
-                <a:ea typeface="Calibri"/>
-                <a:cs typeface="Calibri"/>
-                <a:sym typeface="Calibri"/>
-              </a:rPr>
-              <a:t>9n + 4</a:t>
-            </a:r>
-            <a:endParaRPr dirty="0"/>
-          </a:p>
-        </p:txBody>
-      </p:sp>
-      <p:grpSp>
-        <p:nvGrpSpPr>
-          <p:cNvPr id="777" name="Google Shape;777;p22"/>
-          <p:cNvGrpSpPr/>
-          <p:nvPr/>
-        </p:nvGrpSpPr>
-        <p:grpSpPr>
-          <a:xfrm>
-            <a:off x="11219403" y="3736518"/>
-            <a:ext cx="552870" cy="552870"/>
-            <a:chOff x="7574669" y="3536256"/>
-            <a:chExt cx="552870" cy="552870"/>
-          </a:xfrm>
-        </p:grpSpPr>
-        <p:sp>
-          <p:nvSpPr>
-            <p:cNvPr id="778" name="Google Shape;778;p22"/>
-            <p:cNvSpPr/>
-            <p:nvPr/>
-          </p:nvSpPr>
-          <p:spPr>
-            <a:xfrm>
-              <a:off x="7574669" y="3536256"/>
-              <a:ext cx="552870" cy="552870"/>
-            </a:xfrm>
-            <a:prstGeom prst="ellipse">
-              <a:avLst/>
-            </a:prstGeom>
-            <a:solidFill>
-              <a:srgbClr val="B6A479"/>
-            </a:solidFill>
-            <a:ln>
-              <a:noFill/>
-            </a:ln>
-          </p:spPr>
-          <p:txBody>
-            <a:bodyPr spcFirstLastPara="1" wrap="square" lIns="91425" tIns="45700" rIns="91425" bIns="45700" anchor="ctr" anchorCtr="0">
-              <a:noAutofit/>
-            </a:bodyPr>
-            <a:lstStyle/>
-            <a:p>
-              <a:pPr marL="0" marR="0" lvl="0" indent="0" algn="ctr" rtl="0">
-                <a:spcBef>
-                  <a:spcPts val="0"/>
-                </a:spcBef>
-                <a:spcAft>
-                  <a:spcPts val="0"/>
-                </a:spcAft>
-                <a:buNone/>
-              </a:pPr>
-              <a:endParaRPr sz="1800">
-                <a:solidFill>
-                  <a:schemeClr val="lt1"/>
-                </a:solidFill>
-                <a:latin typeface="Calibri"/>
-                <a:ea typeface="Calibri"/>
-                <a:cs typeface="Calibri"/>
-                <a:sym typeface="Calibri"/>
-              </a:endParaRPr>
-            </a:p>
-          </p:txBody>
-        </p:sp>
-        <p:sp>
-          <p:nvSpPr>
-            <p:cNvPr id="779" name="Google Shape;779;p22"/>
-            <p:cNvSpPr txBox="1"/>
-            <p:nvPr/>
-          </p:nvSpPr>
-          <p:spPr>
-            <a:xfrm>
-              <a:off x="7639474" y="3628025"/>
-              <a:ext cx="423261" cy="369332"/>
-            </a:xfrm>
-            <a:prstGeom prst="rect">
-              <a:avLst/>
-            </a:prstGeom>
-            <a:solidFill>
-              <a:srgbClr val="B6A479"/>
-            </a:solidFill>
-            <a:ln>
-              <a:noFill/>
-            </a:ln>
-          </p:spPr>
-          <p:txBody>
-            <a:bodyPr spcFirstLastPara="1" wrap="square" lIns="91425" tIns="45700" rIns="91425" bIns="45700" anchor="t" anchorCtr="0">
-              <a:spAutoFit/>
-            </a:bodyPr>
-            <a:lstStyle/>
-            <a:p>
-              <a:pPr marL="0" marR="0" lvl="0" indent="0" algn="l" rtl="0">
-                <a:spcBef>
-                  <a:spcPts val="0"/>
-                </a:spcBef>
-                <a:spcAft>
-                  <a:spcPts val="0"/>
-                </a:spcAft>
-                <a:buNone/>
-              </a:pPr>
-              <a:r>
-                <a:rPr lang="en-US" sz="1800" b="1">
-                  <a:solidFill>
-                    <a:schemeClr val="lt1"/>
-                  </a:solidFill>
-                  <a:latin typeface="Calibri"/>
-                  <a:ea typeface="Calibri"/>
-                  <a:cs typeface="Calibri"/>
-                  <a:sym typeface="Calibri"/>
-                </a:rPr>
-                <a:t>*n</a:t>
-              </a:r>
-              <a:endParaRPr/>
-            </a:p>
-          </p:txBody>
-        </p:sp>
-      </p:grpSp>
-      <p:sp>
-        <p:nvSpPr>
-          <p:cNvPr id="780" name="Google Shape;780;p22"/>
-          <p:cNvSpPr txBox="1"/>
-          <p:nvPr/>
-        </p:nvSpPr>
-        <p:spPr>
-          <a:xfrm>
-            <a:off x="10275455" y="3059653"/>
-            <a:ext cx="1743558" cy="646290"/>
-          </a:xfrm>
-          <a:prstGeom prst="rect">
-            <a:avLst/>
-          </a:prstGeom>
-          <a:noFill/>
-          <a:ln>
-            <a:noFill/>
-          </a:ln>
-        </p:spPr>
-        <p:txBody>
-          <a:bodyPr spcFirstLastPara="1" wrap="square" lIns="91425" tIns="45700" rIns="91425" bIns="45700" anchor="t" anchorCtr="0">
-            <a:spAutoFit/>
-          </a:bodyPr>
-          <a:lstStyle/>
-          <a:p>
-            <a:pPr lvl="0">
-              <a:spcBef>
-                <a:spcPts val="0"/>
-              </a:spcBef>
-              <a:spcAft>
-                <a:spcPts val="0"/>
-              </a:spcAft>
-            </a:pPr>
-            <a:r>
-              <a:rPr lang="de-DE" dirty="0">
-                <a:solidFill>
-                  <a:schemeClr val="dk1"/>
-                </a:solidFill>
-                <a:latin typeface="Calibri"/>
-                <a:ea typeface="Calibri"/>
-                <a:cs typeface="Calibri"/>
-                <a:sym typeface="Calibri"/>
-              </a:rPr>
-              <a:t>Äußere Schleife läuft n-mal</a:t>
-            </a:r>
-            <a:endParaRPr lang="de-DE" dirty="0"/>
-          </a:p>
-        </p:txBody>
-      </p:sp>
-      <p:sp>
-        <p:nvSpPr>
-          <p:cNvPr id="5" name="Titel 4">
-            <a:extLst>
-              <a:ext uri="{FF2B5EF4-FFF2-40B4-BE49-F238E27FC236}">
-                <a16:creationId xmlns:a16="http://schemas.microsoft.com/office/drawing/2014/main" id="{26A02B41-9DB1-4C6D-AAD3-ECD4AEA2E217}"/>
-              </a:ext>
-            </a:extLst>
-          </p:cNvPr>
-          <p:cNvSpPr>
-            <a:spLocks noGrp="1"/>
-          </p:cNvSpPr>
-          <p:nvPr>
-            <p:ph type="title"/>
-          </p:nvPr>
-        </p:nvSpPr>
-        <p:spPr/>
-        <p:txBody>
-          <a:bodyPr/>
-          <a:lstStyle/>
-          <a:p>
-            <a:r>
-              <a:rPr lang="de-DE" noProof="0" dirty="0"/>
-              <a:t>Code Modellierung </a:t>
-            </a:r>
-            <a:br>
-              <a:rPr lang="de-DE" noProof="0" dirty="0"/>
-            </a:br>
-            <a:r>
-              <a:rPr lang="de-DE" sz="2000" noProof="0" dirty="0"/>
-              <a:t>Beispiel 2</a:t>
-            </a:r>
-            <a:endParaRPr lang="de-DE" noProof="0" dirty="0"/>
-          </a:p>
-        </p:txBody>
-      </p:sp>
-      <p:sp>
-        <p:nvSpPr>
-          <p:cNvPr id="32" name="Google Shape;257;p13">
-            <a:extLst>
-              <a:ext uri="{FF2B5EF4-FFF2-40B4-BE49-F238E27FC236}">
-                <a16:creationId xmlns:a16="http://schemas.microsoft.com/office/drawing/2014/main" id="{0A68E42F-6C45-447E-9231-FB8F810495F8}"/>
-              </a:ext>
-            </a:extLst>
-          </p:cNvPr>
-          <p:cNvSpPr txBox="1">
-            <a:spLocks/>
-          </p:cNvSpPr>
-          <p:nvPr/>
-        </p:nvSpPr>
-        <p:spPr>
-          <a:xfrm>
-            <a:off x="7499928" y="6407294"/>
-            <a:ext cx="2193636" cy="219798"/>
-          </a:xfrm>
-          <a:prstGeom prst="rect">
-            <a:avLst/>
-          </a:prstGeom>
-          <a:noFill/>
-          <a:ln>
-            <a:noFill/>
-          </a:ln>
-        </p:spPr>
-        <p:txBody>
-          <a:bodyPr spcFirstLastPara="1" wrap="square" lIns="91425" tIns="45700" rIns="91425" bIns="45700" anchor="ctr" anchorCtr="0">
-            <a:noAutofit/>
-          </a:bodyPr>
-          <a:lstStyle>
-            <a:defPPr>
-              <a:defRPr lang="de-DE"/>
-            </a:defPPr>
-            <a:lvl1pPr algn="l" defTabSz="457200" rtl="0" fontAlgn="base">
-              <a:spcBef>
-                <a:spcPct val="0"/>
-              </a:spcBef>
-              <a:spcAft>
-                <a:spcPct val="0"/>
-              </a:spcAft>
-              <a:defRPr kern="1200">
-                <a:solidFill>
-                  <a:schemeClr val="tx1"/>
-                </a:solidFill>
-                <a:latin typeface="Arial" pitchFamily="34" charset="0"/>
-                <a:ea typeface="+mn-ea"/>
-                <a:cs typeface="Arial" pitchFamily="34" charset="0"/>
-              </a:defRPr>
-            </a:lvl1pPr>
-            <a:lvl2pPr marL="457200" algn="l" defTabSz="457200" rtl="0" fontAlgn="base">
-              <a:spcBef>
-                <a:spcPct val="0"/>
-              </a:spcBef>
-              <a:spcAft>
-                <a:spcPct val="0"/>
-              </a:spcAft>
-              <a:defRPr kern="1200">
-                <a:solidFill>
-                  <a:schemeClr val="tx1"/>
-                </a:solidFill>
-                <a:latin typeface="Arial" pitchFamily="34" charset="0"/>
-                <a:ea typeface="+mn-ea"/>
-                <a:cs typeface="Arial" pitchFamily="34" charset="0"/>
-              </a:defRPr>
-            </a:lvl2pPr>
-            <a:lvl3pPr marL="914400" algn="l" defTabSz="457200" rtl="0" fontAlgn="base">
-              <a:spcBef>
-                <a:spcPct val="0"/>
-              </a:spcBef>
-              <a:spcAft>
-                <a:spcPct val="0"/>
-              </a:spcAft>
-              <a:defRPr kern="1200">
-                <a:solidFill>
-                  <a:schemeClr val="tx1"/>
-                </a:solidFill>
-                <a:latin typeface="Arial" pitchFamily="34" charset="0"/>
-                <a:ea typeface="+mn-ea"/>
-                <a:cs typeface="Arial" pitchFamily="34" charset="0"/>
-              </a:defRPr>
-            </a:lvl3pPr>
-            <a:lvl4pPr marL="1371600" algn="l" defTabSz="457200" rtl="0" fontAlgn="base">
-              <a:spcBef>
-                <a:spcPct val="0"/>
-              </a:spcBef>
-              <a:spcAft>
-                <a:spcPct val="0"/>
-              </a:spcAft>
-              <a:defRPr kern="1200">
-                <a:solidFill>
-                  <a:schemeClr val="tx1"/>
-                </a:solidFill>
-                <a:latin typeface="Arial" pitchFamily="34" charset="0"/>
-                <a:ea typeface="+mn-ea"/>
-                <a:cs typeface="Arial" pitchFamily="34" charset="0"/>
-              </a:defRPr>
-            </a:lvl4pPr>
-            <a:lvl5pPr marL="1828800" algn="l" defTabSz="457200" rtl="0" fontAlgn="base">
-              <a:spcBef>
-                <a:spcPct val="0"/>
-              </a:spcBef>
-              <a:spcAft>
-                <a:spcPct val="0"/>
-              </a:spcAft>
-              <a:defRPr kern="1200">
-                <a:solidFill>
-                  <a:schemeClr val="tx1"/>
-                </a:solidFill>
-                <a:latin typeface="Arial" pitchFamily="34" charset="0"/>
-                <a:ea typeface="+mn-ea"/>
-                <a:cs typeface="Arial" pitchFamily="34" charset="0"/>
-              </a:defRPr>
-            </a:lvl5pPr>
-            <a:lvl6pPr marL="2286000" algn="l" defTabSz="914400" rtl="0" eaLnBrk="1" latinLnBrk="0" hangingPunct="1">
-              <a:defRPr kern="1200">
-                <a:solidFill>
-                  <a:schemeClr val="tx1"/>
-                </a:solidFill>
-                <a:latin typeface="Arial" pitchFamily="34" charset="0"/>
-                <a:ea typeface="+mn-ea"/>
-                <a:cs typeface="Arial" pitchFamily="34" charset="0"/>
-              </a:defRPr>
-            </a:lvl6pPr>
-            <a:lvl7pPr marL="2743200" algn="l" defTabSz="914400" rtl="0" eaLnBrk="1" latinLnBrk="0" hangingPunct="1">
-              <a:defRPr kern="1200">
-                <a:solidFill>
-                  <a:schemeClr val="tx1"/>
-                </a:solidFill>
-                <a:latin typeface="Arial" pitchFamily="34" charset="0"/>
-                <a:ea typeface="+mn-ea"/>
-                <a:cs typeface="Arial" pitchFamily="34" charset="0"/>
-              </a:defRPr>
-            </a:lvl7pPr>
-            <a:lvl8pPr marL="3200400" algn="l" defTabSz="914400" rtl="0" eaLnBrk="1" latinLnBrk="0" hangingPunct="1">
-              <a:defRPr kern="1200">
-                <a:solidFill>
-                  <a:schemeClr val="tx1"/>
-                </a:solidFill>
-                <a:latin typeface="Arial" pitchFamily="34" charset="0"/>
-                <a:ea typeface="+mn-ea"/>
-                <a:cs typeface="Arial" pitchFamily="34" charset="0"/>
-              </a:defRPr>
-            </a:lvl8pPr>
-            <a:lvl9pPr marL="3657600" algn="l" defTabSz="914400" rtl="0" eaLnBrk="1" latinLnBrk="0" hangingPunct="1">
-              <a:defRPr kern="1200">
-                <a:solidFill>
-                  <a:schemeClr val="tx1"/>
-                </a:solidFill>
-                <a:latin typeface="Arial" pitchFamily="34" charset="0"/>
-                <a:ea typeface="+mn-ea"/>
-                <a:cs typeface="Arial" pitchFamily="34" charset="0"/>
-              </a:defRPr>
-            </a:lvl9pPr>
-          </a:lstStyle>
-          <a:p>
-            <a:pPr algn="r">
-              <a:spcBef>
-                <a:spcPts val="0"/>
-              </a:spcBef>
-              <a:spcAft>
-                <a:spcPts val="0"/>
-              </a:spcAft>
-            </a:pPr>
-            <a:r>
-              <a:rPr lang="fr-FR" sz="800" dirty="0"/>
-              <a:t>CSE 373 20 AU – SCHAFER</a:t>
-            </a:r>
-          </a:p>
-        </p:txBody>
-      </p:sp>
-      <p:sp>
-        <p:nvSpPr>
-          <p:cNvPr id="33" name="Google Shape;257;p13">
-            <a:extLst>
-              <a:ext uri="{FF2B5EF4-FFF2-40B4-BE49-F238E27FC236}">
-                <a16:creationId xmlns:a16="http://schemas.microsoft.com/office/drawing/2014/main" id="{9C3AAB72-B8FE-4AF4-8E54-FB17F40605FF}"/>
-              </a:ext>
-            </a:extLst>
-          </p:cNvPr>
-          <p:cNvSpPr txBox="1">
-            <a:spLocks/>
-          </p:cNvSpPr>
-          <p:nvPr/>
-        </p:nvSpPr>
-        <p:spPr>
-          <a:xfrm>
-            <a:off x="6881091" y="6150552"/>
-            <a:ext cx="2812473" cy="219798"/>
-          </a:xfrm>
-          <a:prstGeom prst="rect">
-            <a:avLst/>
-          </a:prstGeom>
-          <a:noFill/>
-          <a:ln>
-            <a:noFill/>
-          </a:ln>
-        </p:spPr>
-        <p:txBody>
-          <a:bodyPr spcFirstLastPara="1" wrap="square" lIns="91425" tIns="45700" rIns="91425" bIns="45700" anchor="ctr" anchorCtr="0">
-            <a:noAutofit/>
-          </a:bodyPr>
-          <a:lstStyle>
-            <a:defPPr>
-              <a:defRPr lang="de-DE"/>
-            </a:defPPr>
-            <a:lvl1pPr algn="l" defTabSz="457200" rtl="0" fontAlgn="base">
-              <a:spcBef>
-                <a:spcPct val="0"/>
-              </a:spcBef>
-              <a:spcAft>
-                <a:spcPct val="0"/>
-              </a:spcAft>
-              <a:defRPr kern="1200">
-                <a:solidFill>
-                  <a:schemeClr val="tx1"/>
-                </a:solidFill>
-                <a:latin typeface="Arial" pitchFamily="34" charset="0"/>
-                <a:ea typeface="+mn-ea"/>
-                <a:cs typeface="Arial" pitchFamily="34" charset="0"/>
-              </a:defRPr>
-            </a:lvl1pPr>
-            <a:lvl2pPr marL="457200" algn="l" defTabSz="457200" rtl="0" fontAlgn="base">
-              <a:spcBef>
-                <a:spcPct val="0"/>
-              </a:spcBef>
-              <a:spcAft>
-                <a:spcPct val="0"/>
-              </a:spcAft>
-              <a:defRPr kern="1200">
-                <a:solidFill>
-                  <a:schemeClr val="tx1"/>
-                </a:solidFill>
-                <a:latin typeface="Arial" pitchFamily="34" charset="0"/>
-                <a:ea typeface="+mn-ea"/>
-                <a:cs typeface="Arial" pitchFamily="34" charset="0"/>
-              </a:defRPr>
-            </a:lvl2pPr>
-            <a:lvl3pPr marL="914400" algn="l" defTabSz="457200" rtl="0" fontAlgn="base">
-              <a:spcBef>
-                <a:spcPct val="0"/>
-              </a:spcBef>
-              <a:spcAft>
-                <a:spcPct val="0"/>
-              </a:spcAft>
-              <a:defRPr kern="1200">
-                <a:solidFill>
-                  <a:schemeClr val="tx1"/>
-                </a:solidFill>
-                <a:latin typeface="Arial" pitchFamily="34" charset="0"/>
-                <a:ea typeface="+mn-ea"/>
-                <a:cs typeface="Arial" pitchFamily="34" charset="0"/>
-              </a:defRPr>
-            </a:lvl3pPr>
-            <a:lvl4pPr marL="1371600" algn="l" defTabSz="457200" rtl="0" fontAlgn="base">
-              <a:spcBef>
-                <a:spcPct val="0"/>
-              </a:spcBef>
-              <a:spcAft>
-                <a:spcPct val="0"/>
-              </a:spcAft>
-              <a:defRPr kern="1200">
-                <a:solidFill>
-                  <a:schemeClr val="tx1"/>
-                </a:solidFill>
-                <a:latin typeface="Arial" pitchFamily="34" charset="0"/>
-                <a:ea typeface="+mn-ea"/>
-                <a:cs typeface="Arial" pitchFamily="34" charset="0"/>
-              </a:defRPr>
-            </a:lvl4pPr>
-            <a:lvl5pPr marL="1828800" algn="l" defTabSz="457200" rtl="0" fontAlgn="base">
-              <a:spcBef>
-                <a:spcPct val="0"/>
-              </a:spcBef>
-              <a:spcAft>
-                <a:spcPct val="0"/>
-              </a:spcAft>
-              <a:defRPr kern="1200">
-                <a:solidFill>
-                  <a:schemeClr val="tx1"/>
-                </a:solidFill>
-                <a:latin typeface="Arial" pitchFamily="34" charset="0"/>
-                <a:ea typeface="+mn-ea"/>
-                <a:cs typeface="Arial" pitchFamily="34" charset="0"/>
-              </a:defRPr>
-            </a:lvl5pPr>
-            <a:lvl6pPr marL="2286000" algn="l" defTabSz="914400" rtl="0" eaLnBrk="1" latinLnBrk="0" hangingPunct="1">
-              <a:defRPr kern="1200">
-                <a:solidFill>
-                  <a:schemeClr val="tx1"/>
-                </a:solidFill>
-                <a:latin typeface="Arial" pitchFamily="34" charset="0"/>
-                <a:ea typeface="+mn-ea"/>
-                <a:cs typeface="Arial" pitchFamily="34" charset="0"/>
-              </a:defRPr>
-            </a:lvl6pPr>
-            <a:lvl7pPr marL="2743200" algn="l" defTabSz="914400" rtl="0" eaLnBrk="1" latinLnBrk="0" hangingPunct="1">
-              <a:defRPr kern="1200">
-                <a:solidFill>
-                  <a:schemeClr val="tx1"/>
-                </a:solidFill>
-                <a:latin typeface="Arial" pitchFamily="34" charset="0"/>
-                <a:ea typeface="+mn-ea"/>
-                <a:cs typeface="Arial" pitchFamily="34" charset="0"/>
-              </a:defRPr>
-            </a:lvl7pPr>
-            <a:lvl8pPr marL="3200400" algn="l" defTabSz="914400" rtl="0" eaLnBrk="1" latinLnBrk="0" hangingPunct="1">
-              <a:defRPr kern="1200">
-                <a:solidFill>
-                  <a:schemeClr val="tx1"/>
-                </a:solidFill>
-                <a:latin typeface="Arial" pitchFamily="34" charset="0"/>
-                <a:ea typeface="+mn-ea"/>
-                <a:cs typeface="Arial" pitchFamily="34" charset="0"/>
-              </a:defRPr>
-            </a:lvl8pPr>
-            <a:lvl9pPr marL="3657600" algn="l" defTabSz="914400" rtl="0" eaLnBrk="1" latinLnBrk="0" hangingPunct="1">
-              <a:defRPr kern="1200">
-                <a:solidFill>
-                  <a:schemeClr val="tx1"/>
-                </a:solidFill>
-                <a:latin typeface="Arial" pitchFamily="34" charset="0"/>
-                <a:ea typeface="+mn-ea"/>
-                <a:cs typeface="Arial" pitchFamily="34" charset="0"/>
-              </a:defRPr>
-            </a:lvl9pPr>
-          </a:lstStyle>
-          <a:p>
-            <a:pPr algn="r">
-              <a:spcBef>
-                <a:spcPts val="0"/>
-              </a:spcBef>
-              <a:spcAft>
-                <a:spcPts val="0"/>
-              </a:spcAft>
-            </a:pPr>
-            <a:r>
-              <a:rPr lang="fr-FR" sz="800" dirty="0"/>
-              <a:t>Quelle: Data Structures and </a:t>
-            </a:r>
-            <a:r>
-              <a:rPr lang="fr-FR" sz="800" dirty="0" err="1"/>
-              <a:t>Algorithms</a:t>
-            </a:r>
-            <a:r>
-              <a:rPr lang="fr-FR" sz="800" dirty="0"/>
-              <a:t> (CSE 373), University of Washington, Spring 2022</a:t>
-            </a:r>
-          </a:p>
-        </p:txBody>
-      </p:sp>
-      <p:sp>
-        <p:nvSpPr>
-          <p:cNvPr id="31" name="Datumsplatzhalter 4">
-            <a:extLst>
-              <a:ext uri="{FF2B5EF4-FFF2-40B4-BE49-F238E27FC236}">
-                <a16:creationId xmlns:a16="http://schemas.microsoft.com/office/drawing/2014/main" id="{1D3BAF9C-2C3C-4DE9-95B8-EF12E0F9544A}"/>
-              </a:ext>
-            </a:extLst>
-          </p:cNvPr>
-          <p:cNvSpPr>
-            <a:spLocks noGrp="1"/>
-          </p:cNvSpPr>
-          <p:nvPr>
-            <p:ph type="dt" sz="half" idx="14"/>
-          </p:nvPr>
-        </p:nvSpPr>
-        <p:spPr>
-          <a:xfrm>
-            <a:off x="1206500" y="6011863"/>
-            <a:ext cx="1295400" cy="179387"/>
-          </a:xfrm>
-        </p:spPr>
-        <p:txBody>
-          <a:bodyPr/>
-          <a:lstStyle/>
-          <a:p>
-            <a:fld id="{97C55095-590B-4AAB-8606-0F86796D070A}" type="datetime1">
-              <a:rPr lang="de-DE" smtClean="0"/>
-              <a:pPr/>
-              <a:t>06.03.2026</a:t>
-            </a:fld>
-            <a:endParaRPr lang="de-DE" dirty="0"/>
-          </a:p>
-        </p:txBody>
-      </p:sp>
-      <p:sp>
-        <p:nvSpPr>
-          <p:cNvPr id="34" name="Foliennummernplatzhalter 5">
-            <a:extLst>
-              <a:ext uri="{FF2B5EF4-FFF2-40B4-BE49-F238E27FC236}">
-                <a16:creationId xmlns:a16="http://schemas.microsoft.com/office/drawing/2014/main" id="{1C577E6E-BCBF-4C5E-800A-8C6E8A3293ED}"/>
-              </a:ext>
-            </a:extLst>
-          </p:cNvPr>
-          <p:cNvSpPr>
-            <a:spLocks noGrp="1"/>
-          </p:cNvSpPr>
-          <p:nvPr>
-            <p:ph type="sldNum" sz="quarter" idx="15"/>
-          </p:nvPr>
-        </p:nvSpPr>
-        <p:spPr>
-          <a:xfrm>
-            <a:off x="1206500" y="6361113"/>
-            <a:ext cx="1295400" cy="214312"/>
-          </a:xfrm>
-        </p:spPr>
-        <p:txBody>
-          <a:bodyPr/>
-          <a:lstStyle/>
-          <a:p>
-            <a:r>
-              <a:rPr lang="de-DE"/>
-              <a:t>Seite </a:t>
-            </a:r>
-            <a:fld id="{43310F81-32EE-4F95-9E9C-0BDC6AD52EEC}" type="slidenum">
-              <a:rPr lang="de-DE" smtClean="0"/>
-              <a:pPr/>
-              <a:t>3</a:t>
-            </a:fld>
-            <a:endParaRPr lang="de-DE"/>
-          </a:p>
-        </p:txBody>
-      </p:sp>
-    </p:spTree>
-  </p:cSld>
-  <p:clrMapOvr>
-    <a:masterClrMapping/>
-  </p:clrMapOvr>
-  <p:timing>
-    <p:tnLst>
-      <p:par>
-        <p:cTn id="1" dur="indefinite" restart="never" nodeType="tmRoot">
-          <p:childTnLst>
-            <p:seq concurrent="1" nextAc="seek">
-              <p:cTn id="2" dur="indefinite" nodeType="mainSeq">
-                <p:childTnLst>
-                  <p:par>
-                    <p:cTn id="3" fill="hold">
-                      <p:stCondLst>
-                        <p:cond delay="indefinite"/>
-                      </p:stCondLst>
-                      <p:childTnLst>
-                        <p:par>
-                          <p:cTn id="4" fill="hold">
-                            <p:stCondLst>
-                              <p:cond delay="0"/>
-                            </p:stCondLst>
-                            <p:childTnLst>
-                              <p:par>
-                                <p:cTn id="5" presetID="1" presetClass="entr" presetSubtype="0" fill="hold" nodeType="clickEffect">
-                                  <p:stCondLst>
-                                    <p:cond delay="0"/>
-                                  </p:stCondLst>
-                                  <p:childTnLst>
-                                    <p:set>
-                                      <p:cBhvr>
-                                        <p:cTn id="6" dur="1" fill="hold">
-                                          <p:stCondLst>
-                                            <p:cond delay="0"/>
-                                          </p:stCondLst>
-                                        </p:cTn>
-                                        <p:tgtEl>
-                                          <p:spTgt spid="758"/>
-                                        </p:tgtEl>
-                                        <p:attrNameLst>
-                                          <p:attrName>style.visibility</p:attrName>
-                                        </p:attrNameLst>
-                                      </p:cBhvr>
-                                      <p:to>
-                                        <p:strVal val="visible"/>
-                                      </p:to>
-                                    </p:set>
-                                  </p:childTnLst>
-                                </p:cTn>
-                              </p:par>
-                            </p:childTnLst>
-                          </p:cTn>
-                        </p:par>
-                      </p:childTnLst>
-                    </p:cTn>
-                  </p:par>
-                  <p:par>
-                    <p:cTn id="7" fill="hold">
-                      <p:stCondLst>
-                        <p:cond delay="indefinite"/>
-                      </p:stCondLst>
-                      <p:childTnLst>
-                        <p:par>
-                          <p:cTn id="8" fill="hold">
-                            <p:stCondLst>
-                              <p:cond delay="0"/>
-                            </p:stCondLst>
-                            <p:childTnLst>
-                              <p:par>
-                                <p:cTn id="9" presetID="1" presetClass="entr" presetSubtype="0" fill="hold" nodeType="clickEffect">
-                                  <p:stCondLst>
-                                    <p:cond delay="0"/>
-                                  </p:stCondLst>
-                                  <p:childTnLst>
-                                    <p:set>
-                                      <p:cBhvr>
-                                        <p:cTn id="10" dur="1" fill="hold">
-                                          <p:stCondLst>
-                                            <p:cond delay="0"/>
-                                          </p:stCondLst>
-                                        </p:cTn>
-                                        <p:tgtEl>
-                                          <p:spTgt spid="759"/>
-                                        </p:tgtEl>
-                                        <p:attrNameLst>
-                                          <p:attrName>style.visibility</p:attrName>
-                                        </p:attrNameLst>
-                                      </p:cBhvr>
-                                      <p:to>
-                                        <p:strVal val="visible"/>
-                                      </p:to>
-                                    </p:set>
-                                  </p:childTnLst>
-                                </p:cTn>
-                              </p:par>
-                            </p:childTnLst>
-                          </p:cTn>
-                        </p:par>
-                      </p:childTnLst>
-                    </p:cTn>
-                  </p:par>
-                  <p:par>
-                    <p:cTn id="11" fill="hold">
-                      <p:stCondLst>
-                        <p:cond delay="indefinite"/>
-                      </p:stCondLst>
-                      <p:childTnLst>
-                        <p:par>
-                          <p:cTn id="12" fill="hold">
-                            <p:stCondLst>
-                              <p:cond delay="0"/>
-                            </p:stCondLst>
-                            <p:childTnLst>
-                              <p:par>
-                                <p:cTn id="13" presetID="1" presetClass="entr" presetSubtype="0" fill="hold" nodeType="clickEffect">
-                                  <p:stCondLst>
-                                    <p:cond delay="0"/>
-                                  </p:stCondLst>
-                                  <p:childTnLst>
-                                    <p:set>
-                                      <p:cBhvr>
-                                        <p:cTn id="14" dur="1" fill="hold">
-                                          <p:stCondLst>
-                                            <p:cond delay="0"/>
-                                          </p:stCondLst>
-                                        </p:cTn>
-                                        <p:tgtEl>
-                                          <p:spTgt spid="760"/>
-                                        </p:tgtEl>
-                                        <p:attrNameLst>
-                                          <p:attrName>style.visibility</p:attrName>
-                                        </p:attrNameLst>
-                                      </p:cBhvr>
-                                      <p:to>
-                                        <p:strVal val="visible"/>
-                                      </p:to>
-                                    </p:set>
-                                  </p:childTnLst>
-                                </p:cTn>
-                              </p:par>
-                            </p:childTnLst>
-                          </p:cTn>
-                        </p:par>
-                      </p:childTnLst>
-                    </p:cTn>
-                  </p:par>
-                  <p:par>
-                    <p:cTn id="15" fill="hold">
-                      <p:stCondLst>
-                        <p:cond delay="indefinite"/>
-                      </p:stCondLst>
-                      <p:childTnLst>
-                        <p:par>
-                          <p:cTn id="16" fill="hold">
-                            <p:stCondLst>
-                              <p:cond delay="0"/>
-                            </p:stCondLst>
-                            <p:childTnLst>
-                              <p:par>
-                                <p:cTn id="17" presetID="1" presetClass="entr" presetSubtype="0" fill="hold" nodeType="clickEffect">
-                                  <p:stCondLst>
-                                    <p:cond delay="0"/>
-                                  </p:stCondLst>
-                                  <p:childTnLst>
-                                    <p:set>
-                                      <p:cBhvr>
-                                        <p:cTn id="18" dur="1" fill="hold">
-                                          <p:stCondLst>
-                                            <p:cond delay="0"/>
-                                          </p:stCondLst>
-                                        </p:cTn>
-                                        <p:tgtEl>
-                                          <p:spTgt spid="770"/>
-                                        </p:tgtEl>
-                                        <p:attrNameLst>
-                                          <p:attrName>style.visibility</p:attrName>
-                                        </p:attrNameLst>
-                                      </p:cBhvr>
-                                      <p:to>
-                                        <p:strVal val="visible"/>
-                                      </p:to>
-                                    </p:set>
-                                  </p:childTnLst>
-                                </p:cTn>
-                              </p:par>
-                            </p:childTnLst>
-                          </p:cTn>
-                        </p:par>
-                      </p:childTnLst>
-                    </p:cTn>
-                  </p:par>
-                  <p:par>
-                    <p:cTn id="19" fill="hold">
-                      <p:stCondLst>
-                        <p:cond delay="indefinite"/>
-                      </p:stCondLst>
-                      <p:childTnLst>
-                        <p:par>
-                          <p:cTn id="20" fill="hold">
-                            <p:stCondLst>
-                              <p:cond delay="0"/>
-                            </p:stCondLst>
-                            <p:childTnLst>
-                              <p:par>
-                                <p:cTn id="21" presetID="1" presetClass="entr" presetSubtype="0" fill="hold" nodeType="clickEffect">
-                                  <p:stCondLst>
-                                    <p:cond delay="0"/>
-                                  </p:stCondLst>
-                                  <p:childTnLst>
-                                    <p:set>
-                                      <p:cBhvr>
-                                        <p:cTn id="22" dur="1" fill="hold">
-                                          <p:stCondLst>
-                                            <p:cond delay="0"/>
-                                          </p:stCondLst>
-                                        </p:cTn>
-                                        <p:tgtEl>
-                                          <p:spTgt spid="771"/>
-                                        </p:tgtEl>
-                                        <p:attrNameLst>
-                                          <p:attrName>style.visibility</p:attrName>
-                                        </p:attrNameLst>
-                                      </p:cBhvr>
-                                      <p:to>
-                                        <p:strVal val="visible"/>
-                                      </p:to>
-                                    </p:set>
-                                  </p:childTnLst>
-                                </p:cTn>
-                              </p:par>
-                            </p:childTnLst>
-                          </p:cTn>
-                        </p:par>
-                      </p:childTnLst>
-                    </p:cTn>
-                  </p:par>
-                  <p:par>
-                    <p:cTn id="23" fill="hold">
-                      <p:stCondLst>
-                        <p:cond delay="indefinite"/>
-                      </p:stCondLst>
-                      <p:childTnLst>
-                        <p:par>
-                          <p:cTn id="24" fill="hold">
-                            <p:stCondLst>
-                              <p:cond delay="0"/>
-                            </p:stCondLst>
-                            <p:childTnLst>
-                              <p:par>
-                                <p:cTn id="25" presetID="1" presetClass="entr" presetSubtype="0" fill="hold" nodeType="clickEffect">
-                                  <p:stCondLst>
-                                    <p:cond delay="0"/>
-                                  </p:stCondLst>
-                                  <p:childTnLst>
-                                    <p:set>
-                                      <p:cBhvr>
-                                        <p:cTn id="26" dur="1" fill="hold">
-                                          <p:stCondLst>
-                                            <p:cond delay="0"/>
-                                          </p:stCondLst>
-                                        </p:cTn>
-                                        <p:tgtEl>
-                                          <p:spTgt spid="761"/>
-                                        </p:tgtEl>
-                                        <p:attrNameLst>
-                                          <p:attrName>style.visibility</p:attrName>
-                                        </p:attrNameLst>
-                                      </p:cBhvr>
-                                      <p:to>
-                                        <p:strVal val="visible"/>
-                                      </p:to>
-                                    </p:set>
-                                  </p:childTnLst>
-                                </p:cTn>
-                              </p:par>
-                            </p:childTnLst>
-                          </p:cTn>
-                        </p:par>
-                      </p:childTnLst>
-                    </p:cTn>
-                  </p:par>
-                  <p:par>
-                    <p:cTn id="27" fill="hold">
-                      <p:stCondLst>
-                        <p:cond delay="indefinite"/>
-                      </p:stCondLst>
-                      <p:childTnLst>
-                        <p:par>
-                          <p:cTn id="28" fill="hold">
-                            <p:stCondLst>
-                              <p:cond delay="0"/>
-                            </p:stCondLst>
-                            <p:childTnLst>
-                              <p:par>
-                                <p:cTn id="29" presetID="1" presetClass="entr" presetSubtype="0" fill="hold" nodeType="clickEffect">
-                                  <p:stCondLst>
-                                    <p:cond delay="0"/>
-                                  </p:stCondLst>
-                                  <p:childTnLst>
-                                    <p:set>
-                                      <p:cBhvr>
-                                        <p:cTn id="30" dur="1" fill="hold">
-                                          <p:stCondLst>
-                                            <p:cond delay="0"/>
-                                          </p:stCondLst>
-                                        </p:cTn>
-                                        <p:tgtEl>
-                                          <p:spTgt spid="774"/>
-                                        </p:tgtEl>
-                                        <p:attrNameLst>
-                                          <p:attrName>style.visibility</p:attrName>
-                                        </p:attrNameLst>
-                                      </p:cBhvr>
-                                      <p:to>
-                                        <p:strVal val="visible"/>
-                                      </p:to>
-                                    </p:set>
-                                  </p:childTnLst>
-                                </p:cTn>
-                              </p:par>
-                            </p:childTnLst>
-                          </p:cTn>
-                        </p:par>
-                      </p:childTnLst>
-                    </p:cTn>
-                  </p:par>
-                  <p:par>
-                    <p:cTn id="31" fill="hold">
-                      <p:stCondLst>
-                        <p:cond delay="indefinite"/>
-                      </p:stCondLst>
-                      <p:childTnLst>
-                        <p:par>
-                          <p:cTn id="32" fill="hold">
-                            <p:stCondLst>
-                              <p:cond delay="0"/>
-                            </p:stCondLst>
-                            <p:childTnLst>
-                              <p:par>
-                                <p:cTn id="33" presetID="1" presetClass="entr" presetSubtype="0" fill="hold" nodeType="clickEffect">
-                                  <p:stCondLst>
-                                    <p:cond delay="0"/>
-                                  </p:stCondLst>
-                                  <p:childTnLst>
-                                    <p:set>
-                                      <p:cBhvr>
-                                        <p:cTn id="34" dur="1" fill="hold">
-                                          <p:stCondLst>
-                                            <p:cond delay="0"/>
-                                          </p:stCondLst>
-                                        </p:cTn>
-                                        <p:tgtEl>
-                                          <p:spTgt spid="772"/>
-                                        </p:tgtEl>
-                                        <p:attrNameLst>
-                                          <p:attrName>style.visibility</p:attrName>
-                                        </p:attrNameLst>
-                                      </p:cBhvr>
-                                      <p:to>
-                                        <p:strVal val="visible"/>
-                                      </p:to>
-                                    </p:set>
-                                  </p:childTnLst>
-                                </p:cTn>
-                              </p:par>
-                            </p:childTnLst>
-                          </p:cTn>
-                        </p:par>
-                      </p:childTnLst>
-                    </p:cTn>
-                  </p:par>
-                  <p:par>
-                    <p:cTn id="35" fill="hold">
-                      <p:stCondLst>
-                        <p:cond delay="indefinite"/>
-                      </p:stCondLst>
-                      <p:childTnLst>
-                        <p:par>
-                          <p:cTn id="36" fill="hold">
-                            <p:stCondLst>
-                              <p:cond delay="0"/>
-                            </p:stCondLst>
-                            <p:childTnLst>
-                              <p:par>
-                                <p:cTn id="37" presetID="1" presetClass="entr" presetSubtype="0" fill="hold" nodeType="clickEffect">
-                                  <p:stCondLst>
-                                    <p:cond delay="0"/>
-                                  </p:stCondLst>
-                                  <p:childTnLst>
-                                    <p:set>
-                                      <p:cBhvr>
-                                        <p:cTn id="38" dur="1" fill="hold">
-                                          <p:stCondLst>
-                                            <p:cond delay="0"/>
-                                          </p:stCondLst>
-                                        </p:cTn>
-                                        <p:tgtEl>
-                                          <p:spTgt spid="773"/>
-                                        </p:tgtEl>
-                                        <p:attrNameLst>
-                                          <p:attrName>style.visibility</p:attrName>
-                                        </p:attrNameLst>
-                                      </p:cBhvr>
-                                      <p:to>
-                                        <p:strVal val="visible"/>
-                                      </p:to>
-                                    </p:set>
-                                  </p:childTnLst>
-                                </p:cTn>
-                              </p:par>
-                            </p:childTnLst>
-                          </p:cTn>
-                        </p:par>
-                      </p:childTnLst>
-                    </p:cTn>
-                  </p:par>
-                  <p:par>
-                    <p:cTn id="39" fill="hold">
-                      <p:stCondLst>
-                        <p:cond delay="indefinite"/>
-                      </p:stCondLst>
-                      <p:childTnLst>
-                        <p:par>
-                          <p:cTn id="40" fill="hold">
-                            <p:stCondLst>
-                              <p:cond delay="0"/>
-                            </p:stCondLst>
-                            <p:childTnLst>
-                              <p:par>
-                                <p:cTn id="41" presetID="1" presetClass="entr" presetSubtype="0" fill="hold" nodeType="clickEffect">
-                                  <p:stCondLst>
-                                    <p:cond delay="0"/>
-                                  </p:stCondLst>
-                                  <p:childTnLst>
-                                    <p:set>
-                                      <p:cBhvr>
-                                        <p:cTn id="42" dur="1" fill="hold">
-                                          <p:stCondLst>
-                                            <p:cond delay="0"/>
-                                          </p:stCondLst>
-                                        </p:cTn>
-                                        <p:tgtEl>
-                                          <p:spTgt spid="762"/>
-                                        </p:tgtEl>
-                                        <p:attrNameLst>
-                                          <p:attrName>style.visibility</p:attrName>
-                                        </p:attrNameLst>
-                                      </p:cBhvr>
-                                      <p:to>
-                                        <p:strVal val="visible"/>
-                                      </p:to>
-                                    </p:set>
-                                  </p:childTnLst>
-                                </p:cTn>
-                              </p:par>
-                            </p:childTnLst>
-                          </p:cTn>
-                        </p:par>
-                      </p:childTnLst>
-                    </p:cTn>
-                  </p:par>
-                  <p:par>
-                    <p:cTn id="43" fill="hold">
-                      <p:stCondLst>
-                        <p:cond delay="indefinite"/>
-                      </p:stCondLst>
-                      <p:childTnLst>
-                        <p:par>
-                          <p:cTn id="44" fill="hold">
-                            <p:stCondLst>
-                              <p:cond delay="0"/>
-                            </p:stCondLst>
-                            <p:childTnLst>
-                              <p:par>
-                                <p:cTn id="45" presetID="1" presetClass="entr" presetSubtype="0" fill="hold" nodeType="clickEffect">
-                                  <p:stCondLst>
-                                    <p:cond delay="0"/>
-                                  </p:stCondLst>
-                                  <p:childTnLst>
-                                    <p:set>
-                                      <p:cBhvr>
-                                        <p:cTn id="46" dur="1" fill="hold">
-                                          <p:stCondLst>
-                                            <p:cond delay="0"/>
-                                          </p:stCondLst>
-                                        </p:cTn>
-                                        <p:tgtEl>
-                                          <p:spTgt spid="763"/>
-                                        </p:tgtEl>
-                                        <p:attrNameLst>
-                                          <p:attrName>style.visibility</p:attrName>
-                                        </p:attrNameLst>
-                                      </p:cBhvr>
-                                      <p:to>
-                                        <p:strVal val="visible"/>
-                                      </p:to>
-                                    </p:set>
-                                  </p:childTnLst>
-                                </p:cTn>
-                              </p:par>
-                            </p:childTnLst>
-                          </p:cTn>
-                        </p:par>
-                      </p:childTnLst>
-                    </p:cTn>
-                  </p:par>
-                  <p:par>
-                    <p:cTn id="47" fill="hold">
-                      <p:stCondLst>
-                        <p:cond delay="indefinite"/>
-                      </p:stCondLst>
-                      <p:childTnLst>
-                        <p:par>
-                          <p:cTn id="48" fill="hold">
-                            <p:stCondLst>
-                              <p:cond delay="0"/>
-                            </p:stCondLst>
-                            <p:childTnLst>
-                              <p:par>
-                                <p:cTn id="49" presetID="1" presetClass="entr" presetSubtype="0" fill="hold" nodeType="clickEffect">
-                                  <p:stCondLst>
-                                    <p:cond delay="0"/>
-                                  </p:stCondLst>
-                                  <p:childTnLst>
-                                    <p:set>
-                                      <p:cBhvr>
-                                        <p:cTn id="50" dur="1" fill="hold">
-                                          <p:stCondLst>
-                                            <p:cond delay="0"/>
-                                          </p:stCondLst>
-                                        </p:cTn>
-                                        <p:tgtEl>
-                                          <p:spTgt spid="764"/>
-                                        </p:tgtEl>
-                                        <p:attrNameLst>
-                                          <p:attrName>style.visibility</p:attrName>
-                                        </p:attrNameLst>
-                                      </p:cBhvr>
-                                      <p:to>
-                                        <p:strVal val="visible"/>
-                                      </p:to>
-                                    </p:set>
-                                  </p:childTnLst>
-                                </p:cTn>
-                              </p:par>
-                            </p:childTnLst>
-                          </p:cTn>
-                        </p:par>
-                      </p:childTnLst>
-                    </p:cTn>
-                  </p:par>
-                  <p:par>
-                    <p:cTn id="51" fill="hold">
-                      <p:stCondLst>
-                        <p:cond delay="indefinite"/>
-                      </p:stCondLst>
-                      <p:childTnLst>
-                        <p:par>
-                          <p:cTn id="52" fill="hold">
-                            <p:stCondLst>
-                              <p:cond delay="0"/>
-                            </p:stCondLst>
-                            <p:childTnLst>
-                              <p:par>
-                                <p:cTn id="53" presetID="1" presetClass="entr" presetSubtype="0" fill="hold" nodeType="clickEffect">
-                                  <p:stCondLst>
-                                    <p:cond delay="0"/>
-                                  </p:stCondLst>
-                                  <p:childTnLst>
-                                    <p:set>
-                                      <p:cBhvr>
-                                        <p:cTn id="54" dur="1" fill="hold">
-                                          <p:stCondLst>
-                                            <p:cond delay="0"/>
-                                          </p:stCondLst>
-                                        </p:cTn>
-                                        <p:tgtEl>
-                                          <p:spTgt spid="765"/>
-                                        </p:tgtEl>
-                                        <p:attrNameLst>
-                                          <p:attrName>style.visibility</p:attrName>
-                                        </p:attrNameLst>
-                                      </p:cBhvr>
-                                      <p:to>
-                                        <p:strVal val="visible"/>
-                                      </p:to>
-                                    </p:set>
-                                  </p:childTnLst>
-                                </p:cTn>
-                              </p:par>
-                              <p:par>
-                                <p:cTn id="55" presetID="1" presetClass="entr" presetSubtype="0" fill="hold" nodeType="withEffect">
-                                  <p:stCondLst>
-                                    <p:cond delay="0"/>
-                                  </p:stCondLst>
-                                  <p:childTnLst>
-                                    <p:set>
-                                      <p:cBhvr>
-                                        <p:cTn id="56" dur="1" fill="hold">
-                                          <p:stCondLst>
-                                            <p:cond delay="0"/>
-                                          </p:stCondLst>
-                                        </p:cTn>
-                                        <p:tgtEl>
-                                          <p:spTgt spid="768"/>
-                                        </p:tgtEl>
-                                        <p:attrNameLst>
-                                          <p:attrName>style.visibility</p:attrName>
-                                        </p:attrNameLst>
-                                      </p:cBhvr>
-                                      <p:to>
-                                        <p:strVal val="visible"/>
-                                      </p:to>
-                                    </p:set>
-                                  </p:childTnLst>
-                                </p:cTn>
-                              </p:par>
-                            </p:childTnLst>
-                          </p:cTn>
-                        </p:par>
-                      </p:childTnLst>
-                    </p:cTn>
-                  </p:par>
-                  <p:par>
-                    <p:cTn id="57" fill="hold">
-                      <p:stCondLst>
-                        <p:cond delay="indefinite"/>
-                      </p:stCondLst>
-                      <p:childTnLst>
-                        <p:par>
-                          <p:cTn id="58" fill="hold">
-                            <p:stCondLst>
-                              <p:cond delay="0"/>
-                            </p:stCondLst>
-                            <p:childTnLst>
-                              <p:par>
-                                <p:cTn id="59" presetID="1" presetClass="entr" presetSubtype="0" fill="hold" nodeType="clickEffect">
-                                  <p:stCondLst>
-                                    <p:cond delay="0"/>
-                                  </p:stCondLst>
-                                  <p:childTnLst>
-                                    <p:set>
-                                      <p:cBhvr>
-                                        <p:cTn id="60" dur="1" fill="hold">
-                                          <p:stCondLst>
-                                            <p:cond delay="0"/>
-                                          </p:stCondLst>
-                                        </p:cTn>
-                                        <p:tgtEl>
-                                          <p:spTgt spid="775"/>
-                                        </p:tgtEl>
-                                        <p:attrNameLst>
-                                          <p:attrName>style.visibility</p:attrName>
-                                        </p:attrNameLst>
-                                      </p:cBhvr>
-                                      <p:to>
-                                        <p:strVal val="visible"/>
-                                      </p:to>
-                                    </p:set>
-                                  </p:childTnLst>
-                                </p:cTn>
-                              </p:par>
-                            </p:childTnLst>
-                          </p:cTn>
-                        </p:par>
-                      </p:childTnLst>
-                    </p:cTn>
-                  </p:par>
-                  <p:par>
-                    <p:cTn id="61" fill="hold">
-                      <p:stCondLst>
-                        <p:cond delay="indefinite"/>
-                      </p:stCondLst>
-                      <p:childTnLst>
-                        <p:par>
-                          <p:cTn id="62" fill="hold">
-                            <p:stCondLst>
-                              <p:cond delay="0"/>
-                            </p:stCondLst>
-                            <p:childTnLst>
-                              <p:par>
-                                <p:cTn id="63" presetID="1" presetClass="entr" presetSubtype="0" fill="hold" nodeType="clickEffect">
-                                  <p:stCondLst>
-                                    <p:cond delay="0"/>
-                                  </p:stCondLst>
-                                  <p:childTnLst>
-                                    <p:set>
-                                      <p:cBhvr>
-                                        <p:cTn id="64" dur="1" fill="hold">
-                                          <p:stCondLst>
-                                            <p:cond delay="0"/>
-                                          </p:stCondLst>
-                                        </p:cTn>
-                                        <p:tgtEl>
-                                          <p:spTgt spid="776"/>
-                                        </p:tgtEl>
-                                        <p:attrNameLst>
-                                          <p:attrName>style.visibility</p:attrName>
-                                        </p:attrNameLst>
-                                      </p:cBhvr>
-                                      <p:to>
-                                        <p:strVal val="visible"/>
-                                      </p:to>
-                                    </p:set>
-                                  </p:childTnLst>
-                                </p:cTn>
-                              </p:par>
-                            </p:childTnLst>
-                          </p:cTn>
-                        </p:par>
-                      </p:childTnLst>
-                    </p:cTn>
-                  </p:par>
-                  <p:par>
-                    <p:cTn id="65" fill="hold">
-                      <p:stCondLst>
-                        <p:cond delay="indefinite"/>
-                      </p:stCondLst>
-                      <p:childTnLst>
-                        <p:par>
-                          <p:cTn id="66" fill="hold">
-                            <p:stCondLst>
-                              <p:cond delay="0"/>
-                            </p:stCondLst>
-                            <p:childTnLst>
-                              <p:par>
-                                <p:cTn id="67" presetID="1" presetClass="entr" presetSubtype="0" fill="hold" nodeType="clickEffect">
-                                  <p:stCondLst>
-                                    <p:cond delay="0"/>
-                                  </p:stCondLst>
-                                  <p:childTnLst>
-                                    <p:set>
-                                      <p:cBhvr>
-                                        <p:cTn id="68" dur="1" fill="hold">
-                                          <p:stCondLst>
-                                            <p:cond delay="0"/>
-                                          </p:stCondLst>
-                                        </p:cTn>
-                                        <p:tgtEl>
-                                          <p:spTgt spid="780"/>
-                                        </p:tgtEl>
-                                        <p:attrNameLst>
-                                          <p:attrName>style.visibility</p:attrName>
-                                        </p:attrNameLst>
-                                      </p:cBhvr>
-                                      <p:to>
-                                        <p:strVal val="visible"/>
-                                      </p:to>
-                                    </p:set>
-                                  </p:childTnLst>
-                                </p:cTn>
-                              </p:par>
-                              <p:par>
-                                <p:cTn id="69" presetID="1" presetClass="entr" presetSubtype="0" fill="hold" nodeType="withEffect">
-                                  <p:stCondLst>
-                                    <p:cond delay="0"/>
-                                  </p:stCondLst>
-                                  <p:childTnLst>
-                                    <p:set>
-                                      <p:cBhvr>
-                                        <p:cTn id="70" dur="1" fill="hold">
-                                          <p:stCondLst>
-                                            <p:cond delay="0"/>
-                                          </p:stCondLst>
-                                        </p:cTn>
-                                        <p:tgtEl>
-                                          <p:spTgt spid="777"/>
-                                        </p:tgtEl>
-                                        <p:attrNameLst>
-                                          <p:attrName>style.visibility</p:attrName>
-                                        </p:attrNameLst>
-                                      </p:cBhvr>
-                                      <p:to>
-                                        <p:strVal val="visible"/>
-                                      </p:to>
-                                    </p:set>
-                                  </p:childTnLst>
-                                </p:cTn>
-                              </p:par>
-                            </p:childTnLst>
-                          </p:cTn>
-                        </p:par>
-                      </p:childTnLst>
-                    </p:cTn>
-                  </p:par>
-                  <p:par>
-                    <p:cTn id="71" fill="hold">
-                      <p:stCondLst>
-                        <p:cond delay="indefinite"/>
-                      </p:stCondLst>
-                      <p:childTnLst>
-                        <p:par>
-                          <p:cTn id="72" fill="hold">
-                            <p:stCondLst>
-                              <p:cond delay="0"/>
-                            </p:stCondLst>
-                            <p:childTnLst>
-                              <p:par>
-                                <p:cTn id="73" presetID="1" presetClass="entr" presetSubtype="0" fill="hold" nodeType="clickEffect">
-                                  <p:stCondLst>
-                                    <p:cond delay="0"/>
-                                  </p:stCondLst>
-                                  <p:childTnLst>
-                                    <p:set>
-                                      <p:cBhvr>
-                                        <p:cTn id="74" dur="1" fill="hold">
-                                          <p:stCondLst>
-                                            <p:cond delay="0"/>
-                                          </p:stCondLst>
-                                        </p:cTn>
-                                        <p:tgtEl>
-                                          <p:spTgt spid="769"/>
-                                        </p:tgtEl>
-                                        <p:attrNameLst>
-                                          <p:attrName>style.visibility</p:attrName>
-                                        </p:attrNameLst>
-                                      </p:cBhvr>
-                                      <p:to>
-                                        <p:strVal val="visible"/>
-                                      </p:to>
-                                    </p:set>
-                                  </p:childTnLst>
-                                </p:cTn>
-                              </p:par>
-                            </p:childTnLst>
-                          </p:cTn>
-                        </p:par>
-                      </p:childTnLst>
-                    </p:cTn>
-                  </p:par>
-                </p:childTnLst>
-              </p:cTn>
-              <p:prevCondLst>
-                <p:cond evt="onPrev" delay="0">
-                  <p:tgtEl>
-                    <p:sldTgt/>
-                  </p:tgtEl>
-                </p:cond>
-              </p:prevCondLst>
-              <p:nextCondLst>
-                <p:cond evt="onNext" delay="0">
-                  <p:tgtEl>
-                    <p:sldTgt/>
-                  </p:tgtEl>
-                </p:cond>
-              </p:nextCondLst>
-            </p:seq>
-          </p:childTnLst>
-        </p:cTn>
-      </p:par>
-    </p:tnLst>
-  </p:timing>
-</p:sld>
-</file>
-
-<file path=ppt/slides/slide4.xml><?xml version="1.0" encoding="utf-8"?>
-<p:sld xmlns:a="http://schemas.openxmlformats.org/drawingml/2006/main" xmlns:r="http://schemas.openxmlformats.org/officeDocument/2006/relationships" xmlns:p="http://schemas.openxmlformats.org/presentationml/2006/main">
-  <p:cSld>
-    <p:spTree>
-      <p:nvGrpSpPr>
-        <p:cNvPr id="1" name="Shape 141"/>
-        <p:cNvGrpSpPr/>
-        <p:nvPr/>
-      </p:nvGrpSpPr>
-      <p:grpSpPr>
-        <a:xfrm>
-          <a:off x="0" y="0"/>
-          <a:ext cx="0" cy="0"/>
-          <a:chOff x="0" y="0"/>
-          <a:chExt cx="0" cy="0"/>
-        </a:xfrm>
-      </p:grpSpPr>
-      <p:sp>
-        <p:nvSpPr>
-          <p:cNvPr id="40" name="Google Shape;921;p27">
-            <a:extLst>
-              <a:ext uri="{FF2B5EF4-FFF2-40B4-BE49-F238E27FC236}">
-                <a16:creationId xmlns:a16="http://schemas.microsoft.com/office/drawing/2014/main" id="{3CE34F02-980A-4D8E-8EB6-8116A1140FFC}"/>
-              </a:ext>
-            </a:extLst>
-          </p:cNvPr>
-          <p:cNvSpPr/>
-          <p:nvPr/>
-        </p:nvSpPr>
-        <p:spPr>
-          <a:xfrm>
-            <a:off x="5766996" y="4028691"/>
-            <a:ext cx="6238094" cy="441868"/>
-          </a:xfrm>
-          <a:prstGeom prst="rect">
-            <a:avLst/>
-          </a:prstGeom>
-          <a:solidFill>
-            <a:srgbClr val="4C3282"/>
-          </a:solidFill>
-          <a:ln>
-            <a:noFill/>
-          </a:ln>
-        </p:spPr>
-        <p:txBody>
-          <a:bodyPr spcFirstLastPara="1" wrap="square" lIns="91425" tIns="45700" rIns="91425" bIns="45700" anchor="ctr" anchorCtr="0">
-            <a:noAutofit/>
-          </a:bodyPr>
-          <a:lstStyle/>
-          <a:p>
-            <a:pPr marL="0" marR="0" lvl="0" indent="0" algn="l" rtl="0">
-              <a:spcBef>
-                <a:spcPts val="0"/>
-              </a:spcBef>
-              <a:spcAft>
-                <a:spcPts val="0"/>
-              </a:spcAft>
-              <a:buNone/>
-            </a:pPr>
-            <a:r>
-              <a:rPr lang="el-GR" sz="2400" dirty="0">
-                <a:solidFill>
-                  <a:schemeClr val="lt1"/>
-                </a:solidFill>
-                <a:ea typeface="Quattrocento Sans"/>
-                <a:sym typeface="Quattrocento Sans"/>
-              </a:rPr>
-              <a:t>Θ</a:t>
-            </a:r>
-            <a:r>
-              <a:rPr lang="en-US" sz="2400" dirty="0">
-                <a:solidFill>
-                  <a:schemeClr val="lt1"/>
-                </a:solidFill>
-                <a:latin typeface="Quattrocento Sans"/>
-                <a:ea typeface="Quattrocento Sans"/>
-                <a:cs typeface="Quattrocento Sans"/>
-                <a:sym typeface="Quattrocento Sans"/>
-              </a:rPr>
-              <a:t>-Notation</a:t>
-            </a:r>
-            <a:endParaRPr dirty="0"/>
-          </a:p>
-        </p:txBody>
-      </p:sp>
       <p:sp>
         <p:nvSpPr>
           <p:cNvPr id="5" name="Titel 4">
@@ -17029,7 +9653,7 @@
             <a:avLst/>
           </a:prstGeom>
           <a:blipFill rotWithShape="1">
-            <a:blip r:embed="rId3">
+            <a:blip r:embed="rId4">
               <a:alphaModFix/>
             </a:blip>
             <a:stretch>
@@ -17102,7 +9726,7 @@
             <a:avLst/>
           </a:prstGeom>
           <a:blipFill rotWithShape="1">
-            <a:blip r:embed="rId4">
+            <a:blip r:embed="rId5">
               <a:alphaModFix/>
             </a:blip>
             <a:stretch>
@@ -17175,7 +9799,7 @@
             <a:avLst/>
           </a:prstGeom>
           <a:blipFill rotWithShape="1">
-            <a:blip r:embed="rId5">
+            <a:blip r:embed="rId6">
               <a:alphaModFix/>
             </a:blip>
             <a:stretch>
@@ -17248,7 +9872,7 @@
             <a:avLst/>
           </a:prstGeom>
           <a:blipFill rotWithShape="1">
-            <a:blip r:embed="rId6">
+            <a:blip r:embed="rId7">
               <a:alphaModFix/>
             </a:blip>
             <a:stretch>
@@ -17321,7 +9945,7 @@
             <a:avLst/>
           </a:prstGeom>
           <a:blipFill rotWithShape="1">
-            <a:blip r:embed="rId7">
+            <a:blip r:embed="rId8">
               <a:alphaModFix/>
             </a:blip>
             <a:stretch>
@@ -18692,134 +11316,240 @@
           </a:p>
         </p:txBody>
       </p:sp>
-      <p:sp>
-        <p:nvSpPr>
-          <p:cNvPr id="36" name="Google Shape;921;p27">
+      <p:grpSp>
+        <p:nvGrpSpPr>
+          <p:cNvPr id="35" name="Gruppieren 34">
             <a:extLst>
               <a:ext uri="{FF2B5EF4-FFF2-40B4-BE49-F238E27FC236}">
-                <a16:creationId xmlns:a16="http://schemas.microsoft.com/office/drawing/2014/main" id="{91FDE9D0-1D09-45E3-927C-0BE69EC5823B}"/>
+                <a16:creationId xmlns:a16="http://schemas.microsoft.com/office/drawing/2014/main" id="{F2260CFE-E139-45C1-A92C-17B8F5C84E3E}"/>
               </a:ext>
             </a:extLst>
           </p:cNvPr>
-          <p:cNvSpPr/>
+          <p:cNvGrpSpPr>
+            <a:grpSpLocks noChangeAspect="1"/>
+          </p:cNvGrpSpPr>
           <p:nvPr/>
-        </p:nvSpPr>
-        <p:spPr>
+        </p:nvGrpSpPr>
+        <p:grpSpPr>
           <a:xfrm>
             <a:off x="7426683" y="453359"/>
-            <a:ext cx="4577992" cy="441868"/>
+            <a:ext cx="4578455" cy="1579001"/>
+            <a:chOff x="1206001" y="3141826"/>
+            <a:chExt cx="4934703" cy="1701863"/>
           </a:xfrm>
-          <a:prstGeom prst="rect">
-            <a:avLst/>
-          </a:prstGeom>
-          <a:solidFill>
-            <a:srgbClr val="4C3282"/>
-          </a:solidFill>
-          <a:ln>
-            <a:noFill/>
-          </a:ln>
-        </p:spPr>
-        <p:txBody>
-          <a:bodyPr spcFirstLastPara="1" wrap="square" lIns="91425" tIns="45700" rIns="91425" bIns="45700" anchor="ctr" anchorCtr="0">
-            <a:noAutofit/>
-          </a:bodyPr>
-          <a:lstStyle/>
-          <a:p>
-            <a:pPr marL="0" marR="0" lvl="0" indent="0" algn="l" rtl="0">
-              <a:spcBef>
-                <a:spcPts val="0"/>
-              </a:spcBef>
-              <a:spcAft>
-                <a:spcPts val="0"/>
-              </a:spcAft>
-              <a:buNone/>
-            </a:pPr>
-            <a:r>
-              <a:rPr lang="en-US" sz="2400" dirty="0">
-                <a:solidFill>
-                  <a:schemeClr val="lt1"/>
-                </a:solidFill>
-                <a:latin typeface="Quattrocento Sans"/>
-                <a:ea typeface="Quattrocento Sans"/>
-                <a:cs typeface="Quattrocento Sans"/>
-                <a:sym typeface="Quattrocento Sans"/>
-              </a:rPr>
-              <a:t>O-Notation</a:t>
-            </a:r>
-            <a:endParaRPr dirty="0"/>
-          </a:p>
-        </p:txBody>
-      </p:sp>
-      <p:sp>
-        <p:nvSpPr>
-          <p:cNvPr id="43" name="Google Shape;921;p27">
+        </p:grpSpPr>
+        <p:sp>
+          <p:nvSpPr>
+            <p:cNvPr id="36" name="Google Shape;921;p27">
+              <a:extLst>
+                <a:ext uri="{FF2B5EF4-FFF2-40B4-BE49-F238E27FC236}">
+                  <a16:creationId xmlns:a16="http://schemas.microsoft.com/office/drawing/2014/main" id="{91FDE9D0-1D09-45E3-927C-0BE69EC5823B}"/>
+                </a:ext>
+              </a:extLst>
+            </p:cNvPr>
+            <p:cNvSpPr/>
+            <p:nvPr/>
+          </p:nvSpPr>
+          <p:spPr>
+            <a:xfrm>
+              <a:off x="1206001" y="3141826"/>
+              <a:ext cx="4934204" cy="476250"/>
+            </a:xfrm>
+            <a:prstGeom prst="rect">
+              <a:avLst/>
+            </a:prstGeom>
+            <a:solidFill>
+              <a:srgbClr val="4C3282"/>
+            </a:solidFill>
+            <a:ln>
+              <a:noFill/>
+            </a:ln>
+          </p:spPr>
+          <p:txBody>
+            <a:bodyPr spcFirstLastPara="1" wrap="square" lIns="91425" tIns="45700" rIns="91425" bIns="45700" anchor="ctr" anchorCtr="0">
+              <a:noAutofit/>
+            </a:bodyPr>
+            <a:lstStyle/>
+            <a:p>
+              <a:pPr marL="0" marR="0" lvl="0" indent="0" algn="l" rtl="0">
+                <a:spcBef>
+                  <a:spcPts val="0"/>
+                </a:spcBef>
+                <a:spcAft>
+                  <a:spcPts val="0"/>
+                </a:spcAft>
+                <a:buNone/>
+              </a:pPr>
+              <a:r>
+                <a:rPr lang="en-US" sz="2400" dirty="0">
+                  <a:solidFill>
+                    <a:schemeClr val="lt1"/>
+                  </a:solidFill>
+                  <a:latin typeface="Quattrocento Sans"/>
+                  <a:ea typeface="Quattrocento Sans"/>
+                  <a:cs typeface="Quattrocento Sans"/>
+                  <a:sym typeface="Quattrocento Sans"/>
+                </a:rPr>
+                <a:t>O-Notation</a:t>
+              </a:r>
+              <a:endParaRPr dirty="0"/>
+            </a:p>
+          </p:txBody>
+        </p:sp>
+        <p:pic>
+          <p:nvPicPr>
+            <p:cNvPr id="37" name="Grafik 36">
+              <a:extLst>
+                <a:ext uri="{FF2B5EF4-FFF2-40B4-BE49-F238E27FC236}">
+                  <a16:creationId xmlns:a16="http://schemas.microsoft.com/office/drawing/2014/main" id="{A7ED0E79-083D-43DE-BF6F-D2510335E980}"/>
+                </a:ext>
+              </a:extLst>
+            </p:cNvPr>
+            <p:cNvPicPr>
+              <a:picLocks noChangeAspect="1"/>
+            </p:cNvPicPr>
+            <p:nvPr/>
+          </p:nvPicPr>
+          <p:blipFill>
+            <a:blip r:embed="rId9"/>
+            <a:stretch>
+              <a:fillRect/>
+            </a:stretch>
+          </p:blipFill>
+          <p:spPr>
+            <a:xfrm>
+              <a:off x="1206500" y="3618076"/>
+              <a:ext cx="4934204" cy="1225613"/>
+            </a:xfrm>
+            <a:prstGeom prst="rect">
+              <a:avLst/>
+            </a:prstGeom>
+          </p:spPr>
+        </p:pic>
+      </p:grpSp>
+      <p:grpSp>
+        <p:nvGrpSpPr>
+          <p:cNvPr id="41" name="Gruppieren 40">
             <a:extLst>
               <a:ext uri="{FF2B5EF4-FFF2-40B4-BE49-F238E27FC236}">
-                <a16:creationId xmlns:a16="http://schemas.microsoft.com/office/drawing/2014/main" id="{6175ED36-3BA6-42D3-9AE7-600DB9E0CDE3}"/>
+                <a16:creationId xmlns:a16="http://schemas.microsoft.com/office/drawing/2014/main" id="{473FB23C-EE1B-490F-B7E1-8188A689BFA1}"/>
               </a:ext>
             </a:extLst>
           </p:cNvPr>
-          <p:cNvSpPr/>
+          <p:cNvGrpSpPr>
+            <a:grpSpLocks noChangeAspect="1"/>
+          </p:cNvGrpSpPr>
           <p:nvPr/>
-        </p:nvSpPr>
-        <p:spPr>
+        </p:nvGrpSpPr>
+        <p:grpSpPr>
           <a:xfrm>
             <a:off x="7426683" y="2256772"/>
-            <a:ext cx="4577992" cy="441868"/>
+            <a:ext cx="4577992" cy="1567217"/>
+            <a:chOff x="7056771" y="520700"/>
+            <a:chExt cx="4934204" cy="1689162"/>
           </a:xfrm>
-          <a:prstGeom prst="rect">
-            <a:avLst/>
-          </a:prstGeom>
-          <a:solidFill>
-            <a:srgbClr val="4C3282"/>
-          </a:solidFill>
-          <a:ln>
-            <a:noFill/>
-          </a:ln>
-        </p:spPr>
-        <p:txBody>
-          <a:bodyPr spcFirstLastPara="1" wrap="square" lIns="91425" tIns="45700" rIns="91425" bIns="45700" anchor="ctr" anchorCtr="0">
-            <a:noAutofit/>
-          </a:bodyPr>
-          <a:lstStyle/>
-          <a:p>
-            <a:pPr marL="0" marR="0" lvl="0" indent="0" algn="l" rtl="0">
-              <a:spcBef>
-                <a:spcPts val="0"/>
-              </a:spcBef>
-              <a:spcAft>
-                <a:spcPts val="0"/>
-              </a:spcAft>
-              <a:buNone/>
-            </a:pPr>
-            <a:r>
-              <a:rPr lang="el-GR" sz="2400" dirty="0">
-                <a:solidFill>
-                  <a:schemeClr val="lt1"/>
-                </a:solidFill>
-                <a:latin typeface="Quattrocento Sans"/>
-                <a:ea typeface="Quattrocento Sans"/>
-                <a:cs typeface="Quattrocento Sans"/>
-                <a:sym typeface="Quattrocento Sans"/>
-              </a:rPr>
-              <a:t>Ω</a:t>
-            </a:r>
-            <a:r>
-              <a:rPr lang="en-US" sz="2400" dirty="0">
-                <a:solidFill>
-                  <a:schemeClr val="lt1"/>
-                </a:solidFill>
-                <a:latin typeface="Quattrocento Sans"/>
-                <a:ea typeface="Quattrocento Sans"/>
-                <a:cs typeface="Quattrocento Sans"/>
-                <a:sym typeface="Quattrocento Sans"/>
-              </a:rPr>
-              <a:t>-Notation</a:t>
-            </a:r>
-            <a:endParaRPr dirty="0"/>
-          </a:p>
-        </p:txBody>
-      </p:sp>
+        </p:grpSpPr>
+        <p:pic>
+          <p:nvPicPr>
+            <p:cNvPr id="42" name="Grafik 41">
+              <a:extLst>
+                <a:ext uri="{FF2B5EF4-FFF2-40B4-BE49-F238E27FC236}">
+                  <a16:creationId xmlns:a16="http://schemas.microsoft.com/office/drawing/2014/main" id="{DCB8ECC9-E778-453F-96C0-40163BFBBE40}"/>
+                </a:ext>
+              </a:extLst>
+            </p:cNvPr>
+            <p:cNvPicPr>
+              <a:picLocks noChangeAspect="1"/>
+            </p:cNvPicPr>
+            <p:nvPr/>
+          </p:nvPicPr>
+          <p:blipFill>
+            <a:blip r:embed="rId10"/>
+            <a:stretch>
+              <a:fillRect/>
+            </a:stretch>
+          </p:blipFill>
+          <p:spPr>
+            <a:xfrm>
+              <a:off x="7104399" y="996950"/>
+              <a:ext cx="4838949" cy="1212912"/>
+            </a:xfrm>
+            <a:prstGeom prst="rect">
+              <a:avLst/>
+            </a:prstGeom>
+          </p:spPr>
+        </p:pic>
+        <p:sp>
+          <p:nvSpPr>
+            <p:cNvPr id="43" name="Google Shape;921;p27">
+              <a:extLst>
+                <a:ext uri="{FF2B5EF4-FFF2-40B4-BE49-F238E27FC236}">
+                  <a16:creationId xmlns:a16="http://schemas.microsoft.com/office/drawing/2014/main" id="{6175ED36-3BA6-42D3-9AE7-600DB9E0CDE3}"/>
+                </a:ext>
+              </a:extLst>
+            </p:cNvPr>
+            <p:cNvSpPr/>
+            <p:nvPr/>
+          </p:nvSpPr>
+          <p:spPr>
+            <a:xfrm>
+              <a:off x="7056771" y="520700"/>
+              <a:ext cx="4934204" cy="476250"/>
+            </a:xfrm>
+            <a:prstGeom prst="rect">
+              <a:avLst/>
+            </a:prstGeom>
+            <a:solidFill>
+              <a:srgbClr val="4C3282"/>
+            </a:solidFill>
+            <a:ln>
+              <a:noFill/>
+            </a:ln>
+          </p:spPr>
+          <p:txBody>
+            <a:bodyPr spcFirstLastPara="1" wrap="square" lIns="91425" tIns="45700" rIns="91425" bIns="45700" anchor="ctr" anchorCtr="0">
+              <a:noAutofit/>
+            </a:bodyPr>
+            <a:lstStyle/>
+            <a:p>
+              <a:pPr marL="0" marR="0" lvl="0" indent="0" algn="l" rtl="0">
+                <a:spcBef>
+                  <a:spcPts val="0"/>
+                </a:spcBef>
+                <a:spcAft>
+                  <a:spcPts val="0"/>
+                </a:spcAft>
+                <a:buNone/>
+              </a:pPr>
+              <a:r>
+                <a:rPr lang="el-GR" sz="2400" dirty="0">
+                  <a:solidFill>
+                    <a:schemeClr val="lt1"/>
+                  </a:solidFill>
+                  <a:latin typeface="Quattrocento Sans"/>
+                  <a:ea typeface="Quattrocento Sans"/>
+                  <a:cs typeface="Quattrocento Sans"/>
+                  <a:sym typeface="Quattrocento Sans"/>
+                </a:rPr>
+                <a:t>Ω</a:t>
+              </a:r>
+              <a:r>
+                <a:rPr lang="en-US" sz="2400" dirty="0">
+                  <a:solidFill>
+                    <a:schemeClr val="lt1"/>
+                  </a:solidFill>
+                  <a:latin typeface="Quattrocento Sans"/>
+                  <a:ea typeface="Quattrocento Sans"/>
+                  <a:cs typeface="Quattrocento Sans"/>
+                  <a:sym typeface="Quattrocento Sans"/>
+                </a:rPr>
+                <a:t>-Notation</a:t>
+              </a:r>
+              <a:endParaRPr dirty="0"/>
+            </a:p>
+          </p:txBody>
+        </p:sp>
+      </p:grpSp>
       <p:sp>
         <p:nvSpPr>
           <p:cNvPr id="46" name="Datumsplatzhalter 4">
@@ -18849,7 +11579,7 @@
             <a:fld id="{F2D06E3F-368B-43DC-96F3-4B8E65027050}" type="datetime1">
               <a:rPr lang="de-DE" smtClean="0"/>
               <a:pPr/>
-              <a:t>06.03.2026</a:t>
+              <a:t>12.03.2026</a:t>
             </a:fld>
             <a:endParaRPr lang="de-DE" dirty="0"/>
           </a:p>
@@ -18888,101 +11618,12 @@
             <a:fld id="{43310F81-32EE-4F95-9E9C-0BDC6AD52EEC}" type="slidenum">
               <a:rPr lang="de-DE" smtClean="0"/>
               <a:pPr/>
-              <a:t>4</a:t>
+              <a:t>1</a:t>
             </a:fld>
             <a:endParaRPr lang="de-DE" dirty="0"/>
           </a:p>
         </p:txBody>
       </p:sp>
-      <p:pic>
-        <p:nvPicPr>
-          <p:cNvPr id="2" name="Grafik 1">
-            <a:extLst>
-              <a:ext uri="{FF2B5EF4-FFF2-40B4-BE49-F238E27FC236}">
-                <a16:creationId xmlns:a16="http://schemas.microsoft.com/office/drawing/2014/main" id="{DCB8ECC9-E778-453F-96C0-40163BFBBE40}"/>
-              </a:ext>
-            </a:extLst>
-          </p:cNvPr>
-          <p:cNvPicPr>
-            <a:picLocks noChangeAspect="1"/>
-          </p:cNvPicPr>
-          <p:nvPr/>
-        </p:nvPicPr>
-        <p:blipFill>
-          <a:blip r:embed="rId8"/>
-          <a:stretch>
-            <a:fillRect/>
-          </a:stretch>
-        </p:blipFill>
-        <p:spPr>
-          <a:xfrm>
-            <a:off x="7470873" y="2698640"/>
-            <a:ext cx="4489614" cy="1125349"/>
-          </a:xfrm>
-          <a:prstGeom prst="rect">
-            <a:avLst/>
-          </a:prstGeom>
-        </p:spPr>
-      </p:pic>
-      <p:pic>
-        <p:nvPicPr>
-          <p:cNvPr id="4" name="Grafik 3">
-            <a:extLst>
-              <a:ext uri="{FF2B5EF4-FFF2-40B4-BE49-F238E27FC236}">
-                <a16:creationId xmlns:a16="http://schemas.microsoft.com/office/drawing/2014/main" id="{A7ED0E79-083D-43DE-BF6F-D2510335E980}"/>
-              </a:ext>
-            </a:extLst>
-          </p:cNvPr>
-          <p:cNvPicPr>
-            <a:picLocks noChangeAspect="1"/>
-          </p:cNvPicPr>
-          <p:nvPr/>
-        </p:nvPicPr>
-        <p:blipFill>
-          <a:blip r:embed="rId9"/>
-          <a:stretch>
-            <a:fillRect/>
-          </a:stretch>
-        </p:blipFill>
-        <p:spPr>
-          <a:xfrm>
-            <a:off x="7427146" y="895227"/>
-            <a:ext cx="4577992" cy="1137133"/>
-          </a:xfrm>
-          <a:prstGeom prst="rect">
-            <a:avLst/>
-          </a:prstGeom>
-        </p:spPr>
-      </p:pic>
-      <p:pic>
-        <p:nvPicPr>
-          <p:cNvPr id="7" name="Grafik 6">
-            <a:extLst>
-              <a:ext uri="{FF2B5EF4-FFF2-40B4-BE49-F238E27FC236}">
-                <a16:creationId xmlns:a16="http://schemas.microsoft.com/office/drawing/2014/main" id="{E9773847-59E5-4A70-94A9-D503A9497FE0}"/>
-              </a:ext>
-            </a:extLst>
-          </p:cNvPr>
-          <p:cNvPicPr>
-            <a:picLocks noChangeAspect="1"/>
-          </p:cNvPicPr>
-          <p:nvPr/>
-        </p:nvPicPr>
-        <p:blipFill rotWithShape="1">
-          <a:blip r:embed="rId10"/>
-          <a:srcRect l="1289" r="768" b="4434"/>
-          <a:stretch/>
-        </p:blipFill>
-        <p:spPr>
-          <a:xfrm>
-            <a:off x="5766998" y="4470559"/>
-            <a:ext cx="6238092" cy="1430181"/>
-          </a:xfrm>
-          <a:prstGeom prst="rect">
-            <a:avLst/>
-          </a:prstGeom>
-        </p:spPr>
-      </p:pic>
     </p:spTree>
   </p:cSld>
   <p:clrMapOvr>
